--- a/sunumlar/sunum-1.pptx
+++ b/sunumlar/sunum-1.pptx
@@ -9,9 +9,13 @@
     <p:sldId id="257" r:id="rId3"/>
     <p:sldId id="258" r:id="rId4"/>
     <p:sldId id="259" r:id="rId5"/>
+    <p:sldId id="260" r:id="rId6"/>
+    <p:sldId id="261" r:id="rId7"/>
+    <p:sldId id="262" r:id="rId8"/>
+    <p:sldId id="263" r:id="rId9"/>
   </p:sldIdLst>
   <p:notesMasterIdLst>
-    <p:notesMasterId r:id="rId6"/>
+    <p:notesMasterId r:id="rId10"/>
   </p:notesMasterIdLst>
   <p:sldSz cx="12192000" cy="6858000"/>
   <p:notesSz cx="6858000" cy="12192000"/>
@@ -811,6 +815,358 @@
 </p:notes>
 </file>
 
+<file path=ppt/notesSlides/notesSlide5.xml><?xml version="1.0" encoding="utf-8"?>
+<p:notes xmlns:a="http://schemas.openxmlformats.org/drawingml/2006/main" xmlns:r="http://schemas.openxmlformats.org/officeDocument/2006/relationships" xmlns:p="http://schemas.openxmlformats.org/presentationml/2006/main">
+  <p:cSld>
+    <p:spTree>
+      <p:nvGrpSpPr>
+        <p:cNvPr id="1" name=""/>
+        <p:cNvGrpSpPr/>
+        <p:nvPr/>
+      </p:nvGrpSpPr>
+      <p:grpSpPr>
+        <a:xfrm>
+          <a:off x="0" y="0"/>
+          <a:ext cx="0" cy="0"/>
+          <a:chOff x="0" y="0"/>
+          <a:chExt cx="0" cy="0"/>
+        </a:xfrm>
+      </p:grpSpPr>
+      <p:sp>
+        <p:nvSpPr>
+          <p:cNvPr id="2" name="Slide Image Placeholder 1"/>
+          <p:cNvSpPr>
+            <a:spLocks noGrp="1" noRot="1" noChangeAspect="1"/>
+          </p:cNvSpPr>
+          <p:nvPr>
+            <p:ph type="sldImg"/>
+          </p:nvPr>
+        </p:nvSpPr>
+        <p:spPr/>
+      </p:sp>
+      <p:sp>
+        <p:nvSpPr>
+          <p:cNvPr id="3" name="Notes Placeholder 2"/>
+          <p:cNvSpPr>
+            <a:spLocks noGrp="1"/>
+          </p:cNvSpPr>
+          <p:nvPr>
+            <p:ph type="body" idx="1"/>
+          </p:nvPr>
+        </p:nvSpPr>
+        <p:spPr/>
+        <p:txBody>
+          <a:bodyPr/>
+          <a:lstStyle/>
+          <a:p>
+            <a:r>
+              <a:rPr lang="en-US" dirty="0"/>
+              <a:t/>
+            </a:r>
+            <a:endParaRPr lang="en-US" dirty="0"/>
+          </a:p>
+        </p:txBody>
+      </p:sp>
+      <p:sp>
+        <p:nvSpPr>
+          <p:cNvPr id="4" name="Slide Number Placeholder 3"/>
+          <p:cNvSpPr>
+            <a:spLocks noGrp="1"/>
+          </p:cNvSpPr>
+          <p:nvPr>
+            <p:ph type="sldNum" sz="quarter" idx="10"/>
+          </p:nvPr>
+        </p:nvSpPr>
+        <p:spPr/>
+        <p:txBody>
+          <a:bodyPr/>
+          <a:lstStyle/>
+          <a:p>
+            <a:fld id="{F7021451-1387-4CA6-816F-3879F97B5CBC}" type="slidenum">
+              <a:rPr lang="en-US"/>
+              <a:t>5</a:t>
+            </a:fld>
+            <a:endParaRPr lang="en-US"/>
+          </a:p>
+        </p:txBody>
+      </p:sp>
+    </p:spTree>
+    <p:extLst>
+      <p:ext uri="{BB962C8B-B14F-4D97-AF65-F5344CB8AC3E}">
+        <p14:creationId xmlns:p14="http://schemas.microsoft.com/office/powerpoint/2010/main" val="1024086991"/>
+      </p:ext>
+    </p:extLst>
+  </p:cSld>
+  <p:clrMapOvr>
+    <a:masterClrMapping/>
+  </p:clrMapOvr>
+</p:notes>
+</file>
+
+<file path=ppt/notesSlides/notesSlide6.xml><?xml version="1.0" encoding="utf-8"?>
+<p:notes xmlns:a="http://schemas.openxmlformats.org/drawingml/2006/main" xmlns:r="http://schemas.openxmlformats.org/officeDocument/2006/relationships" xmlns:p="http://schemas.openxmlformats.org/presentationml/2006/main">
+  <p:cSld>
+    <p:spTree>
+      <p:nvGrpSpPr>
+        <p:cNvPr id="1" name=""/>
+        <p:cNvGrpSpPr/>
+        <p:nvPr/>
+      </p:nvGrpSpPr>
+      <p:grpSpPr>
+        <a:xfrm>
+          <a:off x="0" y="0"/>
+          <a:ext cx="0" cy="0"/>
+          <a:chOff x="0" y="0"/>
+          <a:chExt cx="0" cy="0"/>
+        </a:xfrm>
+      </p:grpSpPr>
+      <p:sp>
+        <p:nvSpPr>
+          <p:cNvPr id="2" name="Slide Image Placeholder 1"/>
+          <p:cNvSpPr>
+            <a:spLocks noGrp="1" noRot="1" noChangeAspect="1"/>
+          </p:cNvSpPr>
+          <p:nvPr>
+            <p:ph type="sldImg"/>
+          </p:nvPr>
+        </p:nvSpPr>
+        <p:spPr/>
+      </p:sp>
+      <p:sp>
+        <p:nvSpPr>
+          <p:cNvPr id="3" name="Notes Placeholder 2"/>
+          <p:cNvSpPr>
+            <a:spLocks noGrp="1"/>
+          </p:cNvSpPr>
+          <p:nvPr>
+            <p:ph type="body" idx="1"/>
+          </p:nvPr>
+        </p:nvSpPr>
+        <p:spPr/>
+        <p:txBody>
+          <a:bodyPr/>
+          <a:lstStyle/>
+          <a:p>
+            <a:r>
+              <a:rPr lang="en-US" dirty="0"/>
+              <a:t/>
+            </a:r>
+            <a:endParaRPr lang="en-US" dirty="0"/>
+          </a:p>
+        </p:txBody>
+      </p:sp>
+      <p:sp>
+        <p:nvSpPr>
+          <p:cNvPr id="4" name="Slide Number Placeholder 3"/>
+          <p:cNvSpPr>
+            <a:spLocks noGrp="1"/>
+          </p:cNvSpPr>
+          <p:nvPr>
+            <p:ph type="sldNum" sz="quarter" idx="10"/>
+          </p:nvPr>
+        </p:nvSpPr>
+        <p:spPr/>
+        <p:txBody>
+          <a:bodyPr/>
+          <a:lstStyle/>
+          <a:p>
+            <a:fld id="{F7021451-1387-4CA6-816F-3879F97B5CBC}" type="slidenum">
+              <a:rPr lang="en-US"/>
+              <a:t>6</a:t>
+            </a:fld>
+            <a:endParaRPr lang="en-US"/>
+          </a:p>
+        </p:txBody>
+      </p:sp>
+    </p:spTree>
+    <p:extLst>
+      <p:ext uri="{BB962C8B-B14F-4D97-AF65-F5344CB8AC3E}">
+        <p14:creationId xmlns:p14="http://schemas.microsoft.com/office/powerpoint/2010/main" val="1024086991"/>
+      </p:ext>
+    </p:extLst>
+  </p:cSld>
+  <p:clrMapOvr>
+    <a:masterClrMapping/>
+  </p:clrMapOvr>
+</p:notes>
+</file>
+
+<file path=ppt/notesSlides/notesSlide7.xml><?xml version="1.0" encoding="utf-8"?>
+<p:notes xmlns:a="http://schemas.openxmlformats.org/drawingml/2006/main" xmlns:r="http://schemas.openxmlformats.org/officeDocument/2006/relationships" xmlns:p="http://schemas.openxmlformats.org/presentationml/2006/main">
+  <p:cSld>
+    <p:spTree>
+      <p:nvGrpSpPr>
+        <p:cNvPr id="1" name=""/>
+        <p:cNvGrpSpPr/>
+        <p:nvPr/>
+      </p:nvGrpSpPr>
+      <p:grpSpPr>
+        <a:xfrm>
+          <a:off x="0" y="0"/>
+          <a:ext cx="0" cy="0"/>
+          <a:chOff x="0" y="0"/>
+          <a:chExt cx="0" cy="0"/>
+        </a:xfrm>
+      </p:grpSpPr>
+      <p:sp>
+        <p:nvSpPr>
+          <p:cNvPr id="2" name="Slide Image Placeholder 1"/>
+          <p:cNvSpPr>
+            <a:spLocks noGrp="1" noRot="1" noChangeAspect="1"/>
+          </p:cNvSpPr>
+          <p:nvPr>
+            <p:ph type="sldImg"/>
+          </p:nvPr>
+        </p:nvSpPr>
+        <p:spPr/>
+      </p:sp>
+      <p:sp>
+        <p:nvSpPr>
+          <p:cNvPr id="3" name="Notes Placeholder 2"/>
+          <p:cNvSpPr>
+            <a:spLocks noGrp="1"/>
+          </p:cNvSpPr>
+          <p:nvPr>
+            <p:ph type="body" idx="1"/>
+          </p:nvPr>
+        </p:nvSpPr>
+        <p:spPr/>
+        <p:txBody>
+          <a:bodyPr/>
+          <a:lstStyle/>
+          <a:p>
+            <a:r>
+              <a:rPr lang="en-US" dirty="0"/>
+              <a:t/>
+            </a:r>
+            <a:endParaRPr lang="en-US" dirty="0"/>
+          </a:p>
+        </p:txBody>
+      </p:sp>
+      <p:sp>
+        <p:nvSpPr>
+          <p:cNvPr id="4" name="Slide Number Placeholder 3"/>
+          <p:cNvSpPr>
+            <a:spLocks noGrp="1"/>
+          </p:cNvSpPr>
+          <p:nvPr>
+            <p:ph type="sldNum" sz="quarter" idx="10"/>
+          </p:nvPr>
+        </p:nvSpPr>
+        <p:spPr/>
+        <p:txBody>
+          <a:bodyPr/>
+          <a:lstStyle/>
+          <a:p>
+            <a:fld id="{F7021451-1387-4CA6-816F-3879F97B5CBC}" type="slidenum">
+              <a:rPr lang="en-US"/>
+              <a:t>7</a:t>
+            </a:fld>
+            <a:endParaRPr lang="en-US"/>
+          </a:p>
+        </p:txBody>
+      </p:sp>
+    </p:spTree>
+    <p:extLst>
+      <p:ext uri="{BB962C8B-B14F-4D97-AF65-F5344CB8AC3E}">
+        <p14:creationId xmlns:p14="http://schemas.microsoft.com/office/powerpoint/2010/main" val="1024086991"/>
+      </p:ext>
+    </p:extLst>
+  </p:cSld>
+  <p:clrMapOvr>
+    <a:masterClrMapping/>
+  </p:clrMapOvr>
+</p:notes>
+</file>
+
+<file path=ppt/notesSlides/notesSlide8.xml><?xml version="1.0" encoding="utf-8"?>
+<p:notes xmlns:a="http://schemas.openxmlformats.org/drawingml/2006/main" xmlns:r="http://schemas.openxmlformats.org/officeDocument/2006/relationships" xmlns:p="http://schemas.openxmlformats.org/presentationml/2006/main">
+  <p:cSld>
+    <p:spTree>
+      <p:nvGrpSpPr>
+        <p:cNvPr id="1" name=""/>
+        <p:cNvGrpSpPr/>
+        <p:nvPr/>
+      </p:nvGrpSpPr>
+      <p:grpSpPr>
+        <a:xfrm>
+          <a:off x="0" y="0"/>
+          <a:ext cx="0" cy="0"/>
+          <a:chOff x="0" y="0"/>
+          <a:chExt cx="0" cy="0"/>
+        </a:xfrm>
+      </p:grpSpPr>
+      <p:sp>
+        <p:nvSpPr>
+          <p:cNvPr id="2" name="Slide Image Placeholder 1"/>
+          <p:cNvSpPr>
+            <a:spLocks noGrp="1" noRot="1" noChangeAspect="1"/>
+          </p:cNvSpPr>
+          <p:nvPr>
+            <p:ph type="sldImg"/>
+          </p:nvPr>
+        </p:nvSpPr>
+        <p:spPr/>
+      </p:sp>
+      <p:sp>
+        <p:nvSpPr>
+          <p:cNvPr id="3" name="Notes Placeholder 2"/>
+          <p:cNvSpPr>
+            <a:spLocks noGrp="1"/>
+          </p:cNvSpPr>
+          <p:nvPr>
+            <p:ph type="body" idx="1"/>
+          </p:nvPr>
+        </p:nvSpPr>
+        <p:spPr/>
+        <p:txBody>
+          <a:bodyPr/>
+          <a:lstStyle/>
+          <a:p>
+            <a:r>
+              <a:rPr lang="en-US" dirty="0"/>
+              <a:t/>
+            </a:r>
+            <a:endParaRPr lang="en-US" dirty="0"/>
+          </a:p>
+        </p:txBody>
+      </p:sp>
+      <p:sp>
+        <p:nvSpPr>
+          <p:cNvPr id="4" name="Slide Number Placeholder 3"/>
+          <p:cNvSpPr>
+            <a:spLocks noGrp="1"/>
+          </p:cNvSpPr>
+          <p:nvPr>
+            <p:ph type="sldNum" sz="quarter" idx="10"/>
+          </p:nvPr>
+        </p:nvSpPr>
+        <p:spPr/>
+        <p:txBody>
+          <a:bodyPr/>
+          <a:lstStyle/>
+          <a:p>
+            <a:fld id="{F7021451-1387-4CA6-816F-3879F97B5CBC}" type="slidenum">
+              <a:rPr lang="en-US"/>
+              <a:t>8</a:t>
+            </a:fld>
+            <a:endParaRPr lang="en-US"/>
+          </a:p>
+        </p:txBody>
+      </p:sp>
+    </p:spTree>
+    <p:extLst>
+      <p:ext uri="{BB962C8B-B14F-4D97-AF65-F5344CB8AC3E}">
+        <p14:creationId xmlns:p14="http://schemas.microsoft.com/office/powerpoint/2010/main" val="1024086991"/>
+      </p:ext>
+    </p:extLst>
+  </p:cSld>
+  <p:clrMapOvr>
+    <a:masterClrMapping/>
+  </p:clrMapOvr>
+</p:notes>
+</file>
+
 <file path=ppt/slideLayouts/slideLayout1.xml><?xml version="1.0" encoding="utf-8"?>
 <p:sldLayout xmlns:a="http://schemas.openxmlformats.org/drawingml/2006/main" xmlns:r="http://schemas.openxmlformats.org/officeDocument/2006/relationships" xmlns:p="http://schemas.openxmlformats.org/presentationml/2006/main" preserve="1">
   <p:cSld name="DEFAULT">
@@ -1253,7 +1609,7 @@
         </p:nvSpPr>
         <p:spPr>
           <a:xfrm>
-            <a:off x="548640" y="1554480"/>
+            <a:off x="548640" y="1645920"/>
             <a:ext cx="11064240" cy="914400"/>
           </a:xfrm>
           <a:prstGeom prst="rect">
@@ -1292,7 +1648,7 @@
         </p:nvSpPr>
         <p:spPr>
           <a:xfrm>
-            <a:off x="548640" y="2487168"/>
+            <a:off x="548640" y="2578608"/>
             <a:ext cx="11064240" cy="365760"/>
           </a:xfrm>
           <a:prstGeom prst="rect">
@@ -1331,7 +1687,7 @@
         </p:nvSpPr>
         <p:spPr>
           <a:xfrm>
-            <a:off x="548640" y="3246120"/>
+            <a:off x="548640" y="3383280"/>
             <a:ext cx="7315200" cy="320040"/>
           </a:xfrm>
           <a:prstGeom prst="rect">
@@ -1370,24 +1726,24 @@
         </p:nvSpPr>
         <p:spPr>
           <a:xfrm>
-            <a:off x="548640" y="3566160"/>
-            <a:ext cx="7406640" cy="914400"/>
-          </a:xfrm>
-          <a:prstGeom prst="rect">
-            <a:avLst/>
-          </a:prstGeom>
-          <a:noFill/>
-          <a:ln/>
-        </p:spPr>
-        <p:txBody>
-          <a:bodyPr wrap="square" lIns="0" tIns="0" rIns="0" bIns="0" rtlCol="0" anchor="ctr"/>
-          <a:lstStyle/>
-          <a:p>
-            <a:pPr indent="0" marL="0">
-              <a:buNone/>
-            </a:pPr>
-            <a:r>
-              <a:rPr lang="en-US" sz="1700" dirty="0">
+            <a:off x="548640" y="3703320"/>
+            <a:ext cx="7406640" cy="1097280"/>
+          </a:xfrm>
+          <a:prstGeom prst="rect">
+            <a:avLst/>
+          </a:prstGeom>
+          <a:noFill/>
+          <a:ln/>
+        </p:spPr>
+        <p:txBody>
+          <a:bodyPr wrap="square" lIns="0" tIns="0" rIns="0" bIns="0" rtlCol="0" anchor="ctr"/>
+          <a:lstStyle/>
+          <a:p>
+            <a:pPr indent="0" marL="0">
+              <a:buNone/>
+            </a:pPr>
+            <a:r>
+              <a:rPr lang="en-US" sz="1600" dirty="0">
                 <a:solidFill>
                   <a:srgbClr val="EAF3EE"/>
                 </a:solidFill>
@@ -1395,9 +1751,9 @@
                 <a:ea typeface="Calibri" pitchFamily="34" charset="-122"/>
                 <a:cs typeface="Calibri" pitchFamily="34" charset="-120"/>
               </a:rPr>
-              <a:t>Mesajı netleştirmek, siteyi tasarlamadan önce ne anlatacağına karar vermek ve tasarım yönünü onaya sunmak.</a:t>
-            </a:r>
-            <a:endParaRPr lang="en-US" sz="1700" dirty="0"/>
+              <a:t>Mesajı netleştirmek, siteyi tasarlamadan önce ne anlatacağına karar vermek ve tasarım yönünü onaya sunmak. Bu hafta 5 görev tamamlandı — her birinin çıktısı ayrı slaytta.</a:t>
+            </a:r>
+            <a:endParaRPr lang="en-US" sz="1600" dirty="0"/>
           </a:p>
         </p:txBody>
       </p:sp>
@@ -1409,7 +1765,7 @@
         </p:nvSpPr>
         <p:spPr>
           <a:xfrm>
-            <a:off x="8549640" y="3383280"/>
+            <a:off x="8549640" y="3520440"/>
             <a:ext cx="3063240" cy="960120"/>
           </a:xfrm>
           <a:prstGeom prst="roundRect">
@@ -1431,7 +1787,7 @@
         </p:nvSpPr>
         <p:spPr>
           <a:xfrm>
-            <a:off x="8549640" y="3383280"/>
+            <a:off x="8549640" y="3520440"/>
             <a:ext cx="3063240" cy="960120"/>
           </a:xfrm>
           <a:prstGeom prst="rect">
@@ -1484,12 +1840,12 @@
         </p:nvSpPr>
         <p:spPr>
           <a:xfrm>
-            <a:off x="548640" y="4892040"/>
-            <a:ext cx="3520440" cy="1371600"/>
+            <a:off x="548640" y="5212080"/>
+            <a:ext cx="2075688" cy="1005840"/>
           </a:xfrm>
           <a:prstGeom prst="roundRect">
             <a:avLst>
-              <a:gd name="adj" fmla="val 6667"/>
+              <a:gd name="adj" fmla="val 7273"/>
             </a:avLst>
           </a:prstGeom>
           <a:solidFill>
@@ -1506,24 +1862,24 @@
         </p:nvSpPr>
         <p:spPr>
           <a:xfrm>
-            <a:off x="777240" y="5029200"/>
-            <a:ext cx="3063240" cy="685800"/>
-          </a:xfrm>
-          <a:prstGeom prst="rect">
-            <a:avLst/>
-          </a:prstGeom>
-          <a:noFill/>
-          <a:ln/>
-        </p:spPr>
-        <p:txBody>
-          <a:bodyPr wrap="square" lIns="0" tIns="0" rIns="0" bIns="0" rtlCol="0" anchor="ctr"/>
-          <a:lstStyle/>
-          <a:p>
-            <a:pPr indent="0" marL="0">
-              <a:buNone/>
-            </a:pPr>
-            <a:r>
-              <a:rPr lang="en-US" sz="3400" b="1" dirty="0">
+            <a:off x="713232" y="5303520"/>
+            <a:ext cx="1828800" cy="868680"/>
+          </a:xfrm>
+          <a:prstGeom prst="rect">
+            <a:avLst/>
+          </a:prstGeom>
+          <a:noFill/>
+          <a:ln/>
+        </p:spPr>
+        <p:txBody>
+          <a:bodyPr wrap="square" lIns="0" tIns="0" rIns="0" bIns="0" rtlCol="0" anchor="ctr"/>
+          <a:lstStyle/>
+          <a:p>
+            <a:pPr indent="0" marL="0">
+              <a:buNone/>
+            </a:pPr>
+            <a:r>
+              <a:rPr lang="en-US" sz="2000" b="1" dirty="0">
                 <a:solidFill>
                   <a:srgbClr val="F0A93F"/>
                 </a:solidFill>
@@ -1531,38 +1887,16 @@
                 <a:ea typeface="Cambria" pitchFamily="34" charset="-122"/>
                 <a:cs typeface="Cambria" pitchFamily="34" charset="-120"/>
               </a:rPr>
-              <a:t>7</a:t>
-            </a:r>
-            <a:endParaRPr lang="en-US" sz="3400" dirty="0"/>
-          </a:p>
-        </p:txBody>
-      </p:sp>
-      <p:sp>
-        <p:nvSpPr>
-          <p:cNvPr id="14" name="Text 12"/>
-          <p:cNvSpPr/>
-          <p:nvPr/>
-        </p:nvSpPr>
-        <p:spPr>
-          <a:xfrm>
-            <a:off x="777240" y="5715000"/>
-            <a:ext cx="3063240" cy="411480"/>
-          </a:xfrm>
-          <a:prstGeom prst="rect">
-            <a:avLst/>
-          </a:prstGeom>
-          <a:noFill/>
-          <a:ln/>
-        </p:spPr>
-        <p:txBody>
-          <a:bodyPr wrap="square" lIns="0" tIns="0" rIns="0" bIns="0" rtlCol="0" anchor="ctr"/>
-          <a:lstStyle/>
-          <a:p>
-            <a:pPr indent="0" marL="0">
-              <a:buNone/>
-            </a:pPr>
-            <a:r>
-              <a:rPr lang="en-US" sz="1300" dirty="0">
+              <a:t>1</a:t>
+            </a:r>
+            <a:endParaRPr lang="en-US" sz="2000" dirty="0"/>
+          </a:p>
+          <a:p>
+            <a:pPr indent="0" marL="0">
+              <a:buNone/>
+            </a:pPr>
+            <a:r>
+              <a:rPr lang="en-US" sz="1100" dirty="0">
                 <a:solidFill>
                   <a:srgbClr val="9CB2A8"/>
                 </a:solidFill>
@@ -1570,26 +1904,26 @@
                 <a:ea typeface="Calibri" pitchFamily="34" charset="-122"/>
                 <a:cs typeface="Calibri" pitchFamily="34" charset="-120"/>
               </a:rPr>
-              <a:t>çıktı üretildi ve depoda</a:t>
-            </a:r>
-            <a:endParaRPr lang="en-US" sz="1300" dirty="0"/>
-          </a:p>
-        </p:txBody>
-      </p:sp>
-      <p:sp>
-        <p:nvSpPr>
-          <p:cNvPr id="15" name="Shape 13"/>
-          <p:cNvSpPr/>
-          <p:nvPr/>
-        </p:nvSpPr>
-        <p:spPr>
-          <a:xfrm>
-            <a:off x="4343400" y="4892040"/>
-            <a:ext cx="3520440" cy="1371600"/>
+              <a:t>Araştırma &amp; Ana Mesajlar</a:t>
+            </a:r>
+            <a:endParaRPr lang="en-US" sz="2000" dirty="0"/>
+          </a:p>
+        </p:txBody>
+      </p:sp>
+      <p:sp>
+        <p:nvSpPr>
+          <p:cNvPr id="14" name="Shape 12"/>
+          <p:cNvSpPr/>
+          <p:nvPr/>
+        </p:nvSpPr>
+        <p:spPr>
+          <a:xfrm>
+            <a:off x="2807208" y="5212080"/>
+            <a:ext cx="2075688" cy="1005840"/>
           </a:xfrm>
           <a:prstGeom prst="roundRect">
             <a:avLst>
-              <a:gd name="adj" fmla="val 6667"/>
+              <a:gd name="adj" fmla="val 7273"/>
             </a:avLst>
           </a:prstGeom>
           <a:solidFill>
@@ -1600,30 +1934,30 @@
       </p:sp>
       <p:sp>
         <p:nvSpPr>
-          <p:cNvPr id="16" name="Text 14"/>
-          <p:cNvSpPr/>
-          <p:nvPr/>
-        </p:nvSpPr>
-        <p:spPr>
-          <a:xfrm>
-            <a:off x="4572000" y="5029200"/>
-            <a:ext cx="3063240" cy="685800"/>
-          </a:xfrm>
-          <a:prstGeom prst="rect">
-            <a:avLst/>
-          </a:prstGeom>
-          <a:noFill/>
-          <a:ln/>
-        </p:spPr>
-        <p:txBody>
-          <a:bodyPr wrap="square" lIns="0" tIns="0" rIns="0" bIns="0" rtlCol="0" anchor="ctr"/>
-          <a:lstStyle/>
-          <a:p>
-            <a:pPr indent="0" marL="0">
-              <a:buNone/>
-            </a:pPr>
-            <a:r>
-              <a:rPr lang="en-US" sz="3400" b="1" dirty="0">
+          <p:cNvPr id="15" name="Text 13"/>
+          <p:cNvSpPr/>
+          <p:nvPr/>
+        </p:nvSpPr>
+        <p:spPr>
+          <a:xfrm>
+            <a:off x="2971800" y="5303520"/>
+            <a:ext cx="1828800" cy="868680"/>
+          </a:xfrm>
+          <a:prstGeom prst="rect">
+            <a:avLst/>
+          </a:prstGeom>
+          <a:noFill/>
+          <a:ln/>
+        </p:spPr>
+        <p:txBody>
+          <a:bodyPr wrap="square" lIns="0" tIns="0" rIns="0" bIns="0" rtlCol="0" anchor="ctr"/>
+          <a:lstStyle/>
+          <a:p>
+            <a:pPr indent="0" marL="0">
+              <a:buNone/>
+            </a:pPr>
+            <a:r>
+              <a:rPr lang="en-US" sz="2000" b="1" dirty="0">
                 <a:solidFill>
                   <a:srgbClr val="F0A93F"/>
                 </a:solidFill>
@@ -1631,38 +1965,16 @@
                 <a:ea typeface="Cambria" pitchFamily="34" charset="-122"/>
                 <a:cs typeface="Cambria" pitchFamily="34" charset="-120"/>
               </a:rPr>
-              <a:t>6</a:t>
-            </a:r>
-            <a:endParaRPr lang="en-US" sz="3400" dirty="0"/>
-          </a:p>
-        </p:txBody>
-      </p:sp>
-      <p:sp>
-        <p:nvSpPr>
-          <p:cNvPr id="17" name="Text 15"/>
-          <p:cNvSpPr/>
-          <p:nvPr/>
-        </p:nvSpPr>
-        <p:spPr>
-          <a:xfrm>
-            <a:off x="4572000" y="5715000"/>
-            <a:ext cx="3063240" cy="411480"/>
-          </a:xfrm>
-          <a:prstGeom prst="rect">
-            <a:avLst/>
-          </a:prstGeom>
-          <a:noFill/>
-          <a:ln/>
-        </p:spPr>
-        <p:txBody>
-          <a:bodyPr wrap="square" lIns="0" tIns="0" rIns="0" bIns="0" rtlCol="0" anchor="ctr"/>
-          <a:lstStyle/>
-          <a:p>
-            <a:pPr indent="0" marL="0">
-              <a:buNone/>
-            </a:pPr>
-            <a:r>
-              <a:rPr lang="en-US" sz="1300" dirty="0">
+              <a:t>2</a:t>
+            </a:r>
+            <a:endParaRPr lang="en-US" sz="2000" dirty="0"/>
+          </a:p>
+          <a:p>
+            <a:pPr indent="0" marL="0">
+              <a:buNone/>
+            </a:pPr>
+            <a:r>
+              <a:rPr lang="en-US" sz="1100" dirty="0">
                 <a:solidFill>
                   <a:srgbClr val="9CB2A8"/>
                 </a:solidFill>
@@ -1670,26 +1982,26 @@
                 <a:ea typeface="Calibri" pitchFamily="34" charset="-122"/>
                 <a:cs typeface="Calibri" pitchFamily="34" charset="-120"/>
               </a:rPr>
-              <a:t>ana mesaj kesinleşti</a:t>
-            </a:r>
-            <a:endParaRPr lang="en-US" sz="1300" dirty="0"/>
-          </a:p>
-        </p:txBody>
-      </p:sp>
-      <p:sp>
-        <p:nvSpPr>
-          <p:cNvPr id="18" name="Shape 16"/>
-          <p:cNvSpPr/>
-          <p:nvPr/>
-        </p:nvSpPr>
-        <p:spPr>
-          <a:xfrm>
-            <a:off x="8138160" y="4892040"/>
-            <a:ext cx="3520440" cy="1371600"/>
+              <a:t>Benchmark</a:t>
+            </a:r>
+            <a:endParaRPr lang="en-US" sz="2000" dirty="0"/>
+          </a:p>
+        </p:txBody>
+      </p:sp>
+      <p:sp>
+        <p:nvSpPr>
+          <p:cNvPr id="16" name="Shape 14"/>
+          <p:cNvSpPr/>
+          <p:nvPr/>
+        </p:nvSpPr>
+        <p:spPr>
+          <a:xfrm>
+            <a:off x="5065776" y="5212080"/>
+            <a:ext cx="2075688" cy="1005840"/>
           </a:xfrm>
           <a:prstGeom prst="roundRect">
             <a:avLst>
-              <a:gd name="adj" fmla="val 6667"/>
+              <a:gd name="adj" fmla="val 7273"/>
             </a:avLst>
           </a:prstGeom>
           <a:solidFill>
@@ -1700,30 +2012,30 @@
       </p:sp>
       <p:sp>
         <p:nvSpPr>
-          <p:cNvPr id="19" name="Text 17"/>
-          <p:cNvSpPr/>
-          <p:nvPr/>
-        </p:nvSpPr>
-        <p:spPr>
-          <a:xfrm>
-            <a:off x="8366760" y="5029200"/>
-            <a:ext cx="3063240" cy="685800"/>
-          </a:xfrm>
-          <a:prstGeom prst="rect">
-            <a:avLst/>
-          </a:prstGeom>
-          <a:noFill/>
-          <a:ln/>
-        </p:spPr>
-        <p:txBody>
-          <a:bodyPr wrap="square" lIns="0" tIns="0" rIns="0" bIns="0" rtlCol="0" anchor="ctr"/>
-          <a:lstStyle/>
-          <a:p>
-            <a:pPr indent="0" marL="0">
-              <a:buNone/>
-            </a:pPr>
-            <a:r>
-              <a:rPr lang="en-US" sz="3400" b="1" dirty="0">
+          <p:cNvPr id="17" name="Text 15"/>
+          <p:cNvSpPr/>
+          <p:nvPr/>
+        </p:nvSpPr>
+        <p:spPr>
+          <a:xfrm>
+            <a:off x="5230368" y="5303520"/>
+            <a:ext cx="1828800" cy="868680"/>
+          </a:xfrm>
+          <a:prstGeom prst="rect">
+            <a:avLst/>
+          </a:prstGeom>
+          <a:noFill/>
+          <a:ln/>
+        </p:spPr>
+        <p:txBody>
+          <a:bodyPr wrap="square" lIns="0" tIns="0" rIns="0" bIns="0" rtlCol="0" anchor="ctr"/>
+          <a:lstStyle/>
+          <a:p>
+            <a:pPr indent="0" marL="0">
+              <a:buNone/>
+            </a:pPr>
+            <a:r>
+              <a:rPr lang="en-US" sz="2000" b="1" dirty="0">
                 <a:solidFill>
                   <a:srgbClr val="F0A93F"/>
                 </a:solidFill>
@@ -1731,38 +2043,172 @@
                 <a:ea typeface="Cambria" pitchFamily="34" charset="-122"/>
                 <a:cs typeface="Cambria" pitchFamily="34" charset="-120"/>
               </a:rPr>
+              <a:t>3</a:t>
+            </a:r>
+            <a:endParaRPr lang="en-US" sz="2000" dirty="0"/>
+          </a:p>
+          <a:p>
+            <a:pPr indent="0" marL="0">
+              <a:buNone/>
+            </a:pPr>
+            <a:r>
+              <a:rPr lang="en-US" sz="1100" dirty="0">
+                <a:solidFill>
+                  <a:srgbClr val="9CB2A8"/>
+                </a:solidFill>
+                <a:latin typeface="Calibri" pitchFamily="34" charset="0"/>
+                <a:ea typeface="Calibri" pitchFamily="34" charset="-122"/>
+                <a:cs typeface="Calibri" pitchFamily="34" charset="-120"/>
+              </a:rPr>
+              <a:t>Site Haritası &amp; Wireframe</a:t>
+            </a:r>
+            <a:endParaRPr lang="en-US" sz="2000" dirty="0"/>
+          </a:p>
+        </p:txBody>
+      </p:sp>
+      <p:sp>
+        <p:nvSpPr>
+          <p:cNvPr id="18" name="Shape 16"/>
+          <p:cNvSpPr/>
+          <p:nvPr/>
+        </p:nvSpPr>
+        <p:spPr>
+          <a:xfrm>
+            <a:off x="7324344" y="5212080"/>
+            <a:ext cx="2075688" cy="1005840"/>
+          </a:xfrm>
+          <a:prstGeom prst="roundRect">
+            <a:avLst>
+              <a:gd name="adj" fmla="val 7273"/>
+            </a:avLst>
+          </a:prstGeom>
+          <a:solidFill>
+            <a:srgbClr val="1A2F28"/>
+          </a:solidFill>
+          <a:ln/>
+        </p:spPr>
+      </p:sp>
+      <p:sp>
+        <p:nvSpPr>
+          <p:cNvPr id="19" name="Text 17"/>
+          <p:cNvSpPr/>
+          <p:nvPr/>
+        </p:nvSpPr>
+        <p:spPr>
+          <a:xfrm>
+            <a:off x="7488936" y="5303520"/>
+            <a:ext cx="1828800" cy="868680"/>
+          </a:xfrm>
+          <a:prstGeom prst="rect">
+            <a:avLst/>
+          </a:prstGeom>
+          <a:noFill/>
+          <a:ln/>
+        </p:spPr>
+        <p:txBody>
+          <a:bodyPr wrap="square" lIns="0" tIns="0" rIns="0" bIns="0" rtlCol="0" anchor="ctr"/>
+          <a:lstStyle/>
+          <a:p>
+            <a:pPr indent="0" marL="0">
+              <a:buNone/>
+            </a:pPr>
+            <a:r>
+              <a:rPr lang="en-US" sz="2000" b="1" dirty="0">
+                <a:solidFill>
+                  <a:srgbClr val="F0A93F"/>
+                </a:solidFill>
+                <a:latin typeface="Cambria" pitchFamily="34" charset="0"/>
+                <a:ea typeface="Cambria" pitchFamily="34" charset="-122"/>
+                <a:cs typeface="Cambria" pitchFamily="34" charset="-120"/>
+              </a:rPr>
+              <a:t>4</a:t>
+            </a:r>
+            <a:endParaRPr lang="en-US" sz="2000" dirty="0"/>
+          </a:p>
+          <a:p>
+            <a:pPr indent="0" marL="0">
+              <a:buNone/>
+            </a:pPr>
+            <a:r>
+              <a:rPr lang="en-US" sz="1100" dirty="0">
+                <a:solidFill>
+                  <a:srgbClr val="9CB2A8"/>
+                </a:solidFill>
+                <a:latin typeface="Calibri" pitchFamily="34" charset="0"/>
+                <a:ea typeface="Calibri" pitchFamily="34" charset="-122"/>
+                <a:cs typeface="Calibri" pitchFamily="34" charset="-120"/>
+              </a:rPr>
+              <a:t>Tasarım Dili</a:t>
+            </a:r>
+            <a:endParaRPr lang="en-US" sz="2000" dirty="0"/>
+          </a:p>
+        </p:txBody>
+      </p:sp>
+      <p:sp>
+        <p:nvSpPr>
+          <p:cNvPr id="20" name="Shape 18"/>
+          <p:cNvSpPr/>
+          <p:nvPr/>
+        </p:nvSpPr>
+        <p:spPr>
+          <a:xfrm>
+            <a:off x="9582912" y="5212080"/>
+            <a:ext cx="2075688" cy="1005840"/>
+          </a:xfrm>
+          <a:prstGeom prst="roundRect">
+            <a:avLst>
+              <a:gd name="adj" fmla="val 7273"/>
+            </a:avLst>
+          </a:prstGeom>
+          <a:solidFill>
+            <a:srgbClr val="1A2F28"/>
+          </a:solidFill>
+          <a:ln/>
+        </p:spPr>
+      </p:sp>
+      <p:sp>
+        <p:nvSpPr>
+          <p:cNvPr id="21" name="Text 19"/>
+          <p:cNvSpPr/>
+          <p:nvPr/>
+        </p:nvSpPr>
+        <p:spPr>
+          <a:xfrm>
+            <a:off x="9747504" y="5303520"/>
+            <a:ext cx="1828800" cy="868680"/>
+          </a:xfrm>
+          <a:prstGeom prst="rect">
+            <a:avLst/>
+          </a:prstGeom>
+          <a:noFill/>
+          <a:ln/>
+        </p:spPr>
+        <p:txBody>
+          <a:bodyPr wrap="square" lIns="0" tIns="0" rIns="0" bIns="0" rtlCol="0" anchor="ctr"/>
+          <a:lstStyle/>
+          <a:p>
+            <a:pPr indent="0" marL="0">
+              <a:buNone/>
+            </a:pPr>
+            <a:r>
+              <a:rPr lang="en-US" sz="2000" b="1" dirty="0">
+                <a:solidFill>
+                  <a:srgbClr val="F0A93F"/>
+                </a:solidFill>
+                <a:latin typeface="Cambria" pitchFamily="34" charset="0"/>
+                <a:ea typeface="Cambria" pitchFamily="34" charset="-122"/>
+                <a:cs typeface="Cambria" pitchFamily="34" charset="-120"/>
+              </a:rPr>
               <a:t>5</a:t>
             </a:r>
-            <a:endParaRPr lang="en-US" sz="3400" dirty="0"/>
-          </a:p>
-        </p:txBody>
-      </p:sp>
-      <p:sp>
-        <p:nvSpPr>
-          <p:cNvPr id="20" name="Text 18"/>
-          <p:cNvSpPr/>
-          <p:nvPr/>
-        </p:nvSpPr>
-        <p:spPr>
-          <a:xfrm>
-            <a:off x="8366760" y="5715000"/>
-            <a:ext cx="3063240" cy="411480"/>
-          </a:xfrm>
-          <a:prstGeom prst="rect">
-            <a:avLst/>
-          </a:prstGeom>
-          <a:noFill/>
-          <a:ln/>
-        </p:spPr>
-        <p:txBody>
-          <a:bodyPr wrap="square" lIns="0" tIns="0" rIns="0" bIns="0" rtlCol="0" anchor="ctr"/>
-          <a:lstStyle/>
-          <a:p>
-            <a:pPr indent="0" marL="0">
-              <a:buNone/>
-            </a:pPr>
-            <a:r>
-              <a:rPr lang="en-US" sz="1300" dirty="0">
+            <a:endParaRPr lang="en-US" sz="2000" dirty="0"/>
+          </a:p>
+          <a:p>
+            <a:pPr indent="0" marL="0">
+              <a:buNone/>
+            </a:pPr>
+            <a:r>
+              <a:rPr lang="en-US" sz="1100" dirty="0">
                 <a:solidFill>
                   <a:srgbClr val="9CB2A8"/>
                 </a:solidFill>
@@ -1770,9 +2216,9 @@
                 <a:ea typeface="Calibri" pitchFamily="34" charset="-122"/>
                 <a:cs typeface="Calibri" pitchFamily="34" charset="-120"/>
               </a:rPr>
-              <a:t>site benchmark edildi</a:t>
-            </a:r>
-            <a:endParaRPr lang="en-US" sz="1300" dirty="0"/>
+              <a:t>Hero Taslağı &amp; Kalibrasyon</a:t>
+            </a:r>
+            <a:endParaRPr lang="en-US" sz="2000" dirty="0"/>
           </a:p>
         </p:txBody>
       </p:sp>
@@ -1816,24 +2262,63 @@
         </p:nvSpPr>
         <p:spPr>
           <a:xfrm>
-            <a:off x="548640" y="457200"/>
-            <a:ext cx="11064240" cy="685800"/>
-          </a:xfrm>
-          <a:prstGeom prst="rect">
-            <a:avLst/>
-          </a:prstGeom>
-          <a:noFill/>
-          <a:ln/>
-        </p:spPr>
-        <p:txBody>
-          <a:bodyPr wrap="square" lIns="0" tIns="0" rIns="0" bIns="0" rtlCol="0" anchor="ctr"/>
-          <a:lstStyle/>
-          <a:p>
-            <a:pPr indent="0" marL="0">
-              <a:buNone/>
-            </a:pPr>
-            <a:r>
-              <a:rPr lang="en-US" sz="3400" b="1" dirty="0">
+            <a:off x="548640" y="384048"/>
+            <a:ext cx="4572000" cy="274320"/>
+          </a:xfrm>
+          <a:prstGeom prst="rect">
+            <a:avLst/>
+          </a:prstGeom>
+          <a:noFill/>
+          <a:ln/>
+        </p:spPr>
+        <p:txBody>
+          <a:bodyPr wrap="square" lIns="0" tIns="0" rIns="0" bIns="0" rtlCol="0" anchor="ctr"/>
+          <a:lstStyle/>
+          <a:p>
+            <a:pPr indent="0" marL="0">
+              <a:buNone/>
+            </a:pPr>
+            <a:r>
+              <a:rPr lang="en-US" sz="1200" b="1" spc="300" kern="0" dirty="0">
+                <a:solidFill>
+                  <a:srgbClr val="17604C"/>
+                </a:solidFill>
+                <a:latin typeface="Calibri" pitchFamily="34" charset="0"/>
+                <a:ea typeface="Calibri" pitchFamily="34" charset="-122"/>
+                <a:cs typeface="Calibri" pitchFamily="34" charset="-120"/>
+              </a:rPr>
+              <a:t>GÖREV 1 / 5</a:t>
+            </a:r>
+            <a:endParaRPr lang="en-US" sz="1200" dirty="0"/>
+          </a:p>
+        </p:txBody>
+      </p:sp>
+      <p:sp>
+        <p:nvSpPr>
+          <p:cNvPr id="3" name="Text 1"/>
+          <p:cNvSpPr/>
+          <p:nvPr/>
+        </p:nvSpPr>
+        <p:spPr>
+          <a:xfrm>
+            <a:off x="548640" y="658368"/>
+            <a:ext cx="11064240" cy="640080"/>
+          </a:xfrm>
+          <a:prstGeom prst="rect">
+            <a:avLst/>
+          </a:prstGeom>
+          <a:noFill/>
+          <a:ln/>
+        </p:spPr>
+        <p:txBody>
+          <a:bodyPr wrap="square" lIns="0" tIns="0" rIns="0" bIns="0" rtlCol="0" anchor="ctr"/>
+          <a:lstStyle/>
+          <a:p>
+            <a:pPr indent="0" marL="0">
+              <a:buNone/>
+            </a:pPr>
+            <a:r>
+              <a:rPr lang="en-US" sz="3000" b="1" dirty="0">
                 <a:solidFill>
                   <a:srgbClr val="1E2A24"/>
                 </a:solidFill>
@@ -1841,31 +2326,11 @@
                 <a:ea typeface="Cambria" pitchFamily="34" charset="-122"/>
                 <a:cs typeface="Cambria" pitchFamily="34" charset="-120"/>
               </a:rPr>
-              <a:t>Yapılanlar + Canlı Demo</a:t>
-            </a:r>
-            <a:endParaRPr lang="en-US" sz="3400" dirty="0"/>
-          </a:p>
-        </p:txBody>
-      </p:sp>
-      <p:sp>
-        <p:nvSpPr>
-          <p:cNvPr id="3" name="Shape 1"/>
-          <p:cNvSpPr/>
-          <p:nvPr/>
-        </p:nvSpPr>
-        <p:spPr>
-          <a:xfrm>
-            <a:off x="566928" y="1527048"/>
-            <a:ext cx="237744" cy="237744"/>
-          </a:xfrm>
-          <a:prstGeom prst="diamond">
-            <a:avLst/>
-          </a:prstGeom>
-          <a:solidFill>
-            <a:srgbClr val="17604C"/>
-          </a:solidFill>
-          <a:ln/>
-        </p:spPr>
+              <a:t>Araştırma &amp; Ana Mesajlar</a:t>
+            </a:r>
+            <a:endParaRPr lang="en-US" sz="3000" dirty="0"/>
+          </a:p>
+        </p:txBody>
       </p:sp>
       <p:sp>
         <p:nvSpPr>
@@ -1875,20 +2340,23 @@
         </p:nvSpPr>
         <p:spPr>
           <a:xfrm>
-            <a:off x="960120" y="1344168"/>
-            <a:ext cx="6035040" cy="822960"/>
-          </a:xfrm>
-          <a:prstGeom prst="rect">
-            <a:avLst/>
-          </a:prstGeom>
-          <a:noFill/>
-          <a:ln/>
-        </p:spPr>
-        <p:txBody>
-          <a:bodyPr wrap="square" lIns="0" tIns="0" rIns="0" bIns="0" rtlCol="0" anchor="ctr"/>
-          <a:lstStyle/>
-          <a:p>
-            <a:pPr indent="0" marL="0">
+            <a:off x="548640" y="1600200"/>
+            <a:ext cx="4754880" cy="4572000"/>
+          </a:xfrm>
+          <a:prstGeom prst="rect">
+            <a:avLst/>
+          </a:prstGeom>
+          <a:noFill/>
+          <a:ln/>
+        </p:spPr>
+        <p:txBody>
+          <a:bodyPr wrap="square" lIns="0" tIns="0" rIns="0" bIns="0" rtlCol="0" anchor="t"/>
+          <a:lstStyle/>
+          <a:p>
+            <a:pPr indent="0" marL="0">
+              <a:spcAft>
+                <a:spcPts val="600"/>
+              </a:spcAft>
               <a:buNone/>
             </a:pPr>
             <a:r>
@@ -1900,16 +2368,19 @@
                 <a:ea typeface="Calibri" pitchFamily="34" charset="-122"/>
                 <a:cs typeface="Calibri" pitchFamily="34" charset="-120"/>
               </a:rPr>
-              <a:t>Araştırma notları</a:t>
+              <a:t>Ne yaptım?</a:t>
             </a:r>
             <a:endParaRPr lang="en-US" sz="1500" dirty="0"/>
           </a:p>
           <a:p>
             <a:pPr indent="0" marL="0">
-              <a:buNone/>
-            </a:pPr>
-            <a:r>
-              <a:rPr lang="en-US" sz="1250" dirty="0">
+              <a:spcAft>
+                <a:spcPts val="1400"/>
+              </a:spcAft>
+              <a:buNone/>
+            </a:pPr>
+            <a:r>
+              <a:rPr lang="en-US" sz="1300" dirty="0">
                 <a:solidFill>
                   <a:srgbClr val="58635A"/>
                 </a:solidFill>
@@ -1917,54 +2388,15 @@
                 <a:ea typeface="Calibri" pitchFamily="34" charset="-122"/>
                 <a:cs typeface="Calibri" pitchFamily="34" charset="-120"/>
               </a:rPr>
-              <a:t>CBS kavramları, TUCBS, MVT, veri kalitesi — kaynaklı</a:t>
+              <a:t>Açık kaynaklardan CBS kavramlarını, TUCBS ulusal standardını, vektör karo (MVT) teknolojisini ve veri kalitesi kavramlarını araştırdım; kaynaklı not dosyası depoda.</a:t>
             </a:r>
             <a:endParaRPr lang="en-US" sz="1500" dirty="0"/>
           </a:p>
-        </p:txBody>
-      </p:sp>
-      <p:sp>
-        <p:nvSpPr>
-          <p:cNvPr id="5" name="Shape 3"/>
-          <p:cNvSpPr/>
-          <p:nvPr/>
-        </p:nvSpPr>
-        <p:spPr>
-          <a:xfrm>
-            <a:off x="566928" y="2368296"/>
-            <a:ext cx="237744" cy="237744"/>
-          </a:xfrm>
-          <a:prstGeom prst="diamond">
-            <a:avLst/>
-          </a:prstGeom>
-          <a:solidFill>
-            <a:srgbClr val="35C4B5"/>
-          </a:solidFill>
-          <a:ln/>
-        </p:spPr>
-      </p:sp>
-      <p:sp>
-        <p:nvSpPr>
-          <p:cNvPr id="6" name="Text 4"/>
-          <p:cNvSpPr/>
-          <p:nvPr/>
-        </p:nvSpPr>
-        <p:spPr>
-          <a:xfrm>
-            <a:off x="960120" y="2185416"/>
-            <a:ext cx="6035040" cy="822960"/>
-          </a:xfrm>
-          <a:prstGeom prst="rect">
-            <a:avLst/>
-          </a:prstGeom>
-          <a:noFill/>
-          <a:ln/>
-        </p:spPr>
-        <p:txBody>
-          <a:bodyPr wrap="square" lIns="0" tIns="0" rIns="0" bIns="0" rtlCol="0" anchor="ctr"/>
-          <a:lstStyle/>
-          <a:p>
-            <a:pPr indent="0" marL="0">
+          <a:p>
+            <a:pPr indent="0" marL="0">
+              <a:spcAft>
+                <a:spcPts val="600"/>
+              </a:spcAft>
               <a:buNone/>
             </a:pPr>
             <a:r>
@@ -1976,16 +2408,19 @@
                 <a:ea typeface="Calibri" pitchFamily="34" charset="-122"/>
                 <a:cs typeface="Calibri" pitchFamily="34" charset="-120"/>
               </a:rPr>
-              <a:t>Ana mesaj listesi (6)</a:t>
+              <a:t>Çıktı ne?</a:t>
             </a:r>
             <a:endParaRPr lang="en-US" sz="1500" dirty="0"/>
           </a:p>
           <a:p>
             <a:pPr indent="0" marL="0">
-              <a:buNone/>
-            </a:pPr>
-            <a:r>
-              <a:rPr lang="en-US" sz="1250" dirty="0">
+              <a:spcAft>
+                <a:spcPts val="1400"/>
+              </a:spcAft>
+              <a:buNone/>
+            </a:pPr>
+            <a:r>
+              <a:rPr lang="en-US" sz="1300" dirty="0">
                 <a:solidFill>
                   <a:srgbClr val="58635A"/>
                 </a:solidFill>
@@ -1993,54 +2428,15 @@
                 <a:ea typeface="Calibri" pitchFamily="34" charset="-122"/>
                 <a:cs typeface="Calibri" pitchFamily="34" charset="-120"/>
               </a:rPr>
-              <a:t>mesajlar.js — sıralı, açıklamalı, çelişki kontrolünden geçti</a:t>
+              <a:t>Sitenin anlatacağı 6 ana mesaj — araştırmayla doğrulandı, sıralaması bilinçli: önce herkesin anladığı mesajlar, sonra kurumsal güven mesajları.</a:t>
             </a:r>
             <a:endParaRPr lang="en-US" sz="1500" dirty="0"/>
           </a:p>
-        </p:txBody>
-      </p:sp>
-      <p:sp>
-        <p:nvSpPr>
-          <p:cNvPr id="7" name="Shape 5"/>
-          <p:cNvSpPr/>
-          <p:nvPr/>
-        </p:nvSpPr>
-        <p:spPr>
-          <a:xfrm>
-            <a:off x="566928" y="3209544"/>
-            <a:ext cx="237744" cy="237744"/>
-          </a:xfrm>
-          <a:prstGeom prst="diamond">
-            <a:avLst/>
-          </a:prstGeom>
-          <a:solidFill>
-            <a:srgbClr val="F0A93F"/>
-          </a:solidFill>
-          <a:ln/>
-        </p:spPr>
-      </p:sp>
-      <p:sp>
-        <p:nvSpPr>
-          <p:cNvPr id="8" name="Text 6"/>
-          <p:cNvSpPr/>
-          <p:nvPr/>
-        </p:nvSpPr>
-        <p:spPr>
-          <a:xfrm>
-            <a:off x="960120" y="3026664"/>
-            <a:ext cx="6035040" cy="822960"/>
-          </a:xfrm>
-          <a:prstGeom prst="rect">
-            <a:avLst/>
-          </a:prstGeom>
-          <a:noFill/>
-          <a:ln/>
-        </p:spPr>
-        <p:txBody>
-          <a:bodyPr wrap="square" lIns="0" tIns="0" rIns="0" bIns="0" rtlCol="0" anchor="ctr"/>
-          <a:lstStyle/>
-          <a:p>
-            <a:pPr indent="0" marL="0">
+          <a:p>
+            <a:pPr indent="0" marL="0">
+              <a:spcAft>
+                <a:spcPts val="600"/>
+              </a:spcAft>
               <a:buNone/>
             </a:pPr>
             <a:r>
@@ -2052,7 +2448,7 @@
                 <a:ea typeface="Calibri" pitchFamily="34" charset="-122"/>
                 <a:cs typeface="Calibri" pitchFamily="34" charset="-120"/>
               </a:rPr>
-              <a:t>Benchmark (5 site)</a:t>
+              <a:t>Nerede?</a:t>
             </a:r>
             <a:endParaRPr lang="en-US" sz="1500" dirty="0"/>
           </a:p>
@@ -2061,15 +2457,15 @@
               <a:buNone/>
             </a:pPr>
             <a:r>
-              <a:rPr lang="en-US" sz="1250" dirty="0">
-                <a:solidFill>
-                  <a:srgbClr val="58635A"/>
-                </a:solidFill>
-                <a:latin typeface="Calibri" pitchFamily="34" charset="0"/>
-                <a:ea typeface="Calibri" pitchFamily="34" charset="-122"/>
-                <a:cs typeface="Calibri" pitchFamily="34" charset="-120"/>
-              </a:rPr>
-              <a:t>Netcad KEOS, Mapbox, Felt + 2 belediye KBS örneği</a:t>
+              <a:rPr lang="en-US" sz="1200" dirty="0">
+                <a:solidFill>
+                  <a:srgbClr val="17604C"/>
+                </a:solidFill>
+                <a:latin typeface="Calibri" pitchFamily="34" charset="0"/>
+                <a:ea typeface="Calibri" pitchFamily="34" charset="-122"/>
+                <a:cs typeface="Calibri" pitchFamily="34" charset="-120"/>
+              </a:rPr>
+              <a:t>notlar/cbs-arastirma-notlari.md  ·  src/data/mesajlar.js</a:t>
             </a:r>
             <a:endParaRPr lang="en-US" sz="1500" dirty="0"/>
           </a:p>
@@ -2077,313 +2473,65 @@
       </p:sp>
       <p:sp>
         <p:nvSpPr>
-          <p:cNvPr id="9" name="Shape 7"/>
-          <p:cNvSpPr/>
-          <p:nvPr/>
-        </p:nvSpPr>
-        <p:spPr>
-          <a:xfrm>
-            <a:off x="566928" y="4050792"/>
-            <a:ext cx="237744" cy="237744"/>
-          </a:xfrm>
-          <a:prstGeom prst="diamond">
-            <a:avLst/>
-          </a:prstGeom>
-          <a:solidFill>
-            <a:srgbClr val="17604C"/>
-          </a:solidFill>
-          <a:ln/>
-        </p:spPr>
-      </p:sp>
-      <p:sp>
-        <p:nvSpPr>
-          <p:cNvPr id="10" name="Text 8"/>
-          <p:cNvSpPr/>
-          <p:nvPr/>
-        </p:nvSpPr>
-        <p:spPr>
-          <a:xfrm>
-            <a:off x="960120" y="3867912"/>
-            <a:ext cx="6035040" cy="822960"/>
-          </a:xfrm>
-          <a:prstGeom prst="rect">
-            <a:avLst/>
-          </a:prstGeom>
-          <a:noFill/>
-          <a:ln/>
-        </p:spPr>
-        <p:txBody>
-          <a:bodyPr wrap="square" lIns="0" tIns="0" rIns="0" bIns="0" rtlCol="0" anchor="ctr"/>
-          <a:lstStyle/>
-          <a:p>
-            <a:pPr indent="0" marL="0">
-              <a:buNone/>
-            </a:pPr>
-            <a:r>
-              <a:rPr lang="en-US" sz="1500" b="1" dirty="0">
-                <a:solidFill>
-                  <a:srgbClr val="1E2A24"/>
-                </a:solidFill>
-                <a:latin typeface="Calibri" pitchFamily="34" charset="0"/>
-                <a:ea typeface="Calibri" pitchFamily="34" charset="-122"/>
-                <a:cs typeface="Calibri" pitchFamily="34" charset="-120"/>
-              </a:rPr>
-              <a:t>Site haritası + wireframe</a:t>
-            </a:r>
-            <a:endParaRPr lang="en-US" sz="1500" dirty="0"/>
-          </a:p>
-          <a:p>
-            <a:pPr indent="0" marL="0">
-              <a:buNone/>
-            </a:pPr>
-            <a:r>
-              <a:rPr lang="en-US" sz="1250" dirty="0">
-                <a:solidFill>
-                  <a:srgbClr val="58635A"/>
-                </a:solidFill>
-                <a:latin typeface="Calibri" pitchFamily="34" charset="0"/>
-                <a:ea typeface="Calibri" pitchFamily="34" charset="-122"/>
-                <a:cs typeface="Calibri" pitchFamily="34" charset="-120"/>
-              </a:rPr>
-              <a:t>3 sayfanın yerleşimi ve başlık hiyerarşisi</a:t>
-            </a:r>
-            <a:endParaRPr lang="en-US" sz="1500" dirty="0"/>
-          </a:p>
-        </p:txBody>
-      </p:sp>
-      <p:sp>
-        <p:nvSpPr>
-          <p:cNvPr id="11" name="Shape 9"/>
-          <p:cNvSpPr/>
-          <p:nvPr/>
-        </p:nvSpPr>
-        <p:spPr>
-          <a:xfrm>
-            <a:off x="566928" y="4892040"/>
-            <a:ext cx="237744" cy="237744"/>
-          </a:xfrm>
-          <a:prstGeom prst="diamond">
-            <a:avLst/>
-          </a:prstGeom>
-          <a:solidFill>
-            <a:srgbClr val="35C4B5"/>
-          </a:solidFill>
-          <a:ln/>
-        </p:spPr>
-      </p:sp>
-      <p:sp>
-        <p:nvSpPr>
-          <p:cNvPr id="12" name="Text 10"/>
-          <p:cNvSpPr/>
-          <p:nvPr/>
-        </p:nvSpPr>
-        <p:spPr>
-          <a:xfrm>
-            <a:off x="960120" y="4709160"/>
-            <a:ext cx="6035040" cy="822960"/>
-          </a:xfrm>
-          <a:prstGeom prst="rect">
-            <a:avLst/>
-          </a:prstGeom>
-          <a:noFill/>
-          <a:ln/>
-        </p:spPr>
-        <p:txBody>
-          <a:bodyPr wrap="square" lIns="0" tIns="0" rIns="0" bIns="0" rtlCol="0" anchor="ctr"/>
-          <a:lstStyle/>
-          <a:p>
-            <a:pPr indent="0" marL="0">
-              <a:buNone/>
-            </a:pPr>
-            <a:r>
-              <a:rPr lang="en-US" sz="1500" b="1" dirty="0">
-                <a:solidFill>
-                  <a:srgbClr val="1E2A24"/>
-                </a:solidFill>
-                <a:latin typeface="Calibri" pitchFamily="34" charset="0"/>
-                <a:ea typeface="Calibri" pitchFamily="34" charset="-122"/>
-                <a:cs typeface="Calibri" pitchFamily="34" charset="-120"/>
-              </a:rPr>
-              <a:t>Kalibrasyon sayfası</a:t>
-            </a:r>
-            <a:endParaRPr lang="en-US" sz="1500" dirty="0"/>
-          </a:p>
-          <a:p>
-            <a:pPr indent="0" marL="0">
-              <a:buNone/>
-            </a:pPr>
-            <a:r>
-              <a:rPr lang="en-US" sz="1250" dirty="0">
-                <a:solidFill>
-                  <a:srgbClr val="58635A"/>
-                </a:solidFill>
-                <a:latin typeface="Calibri" pitchFamily="34" charset="0"/>
-                <a:ea typeface="Calibri" pitchFamily="34" charset="-122"/>
-                <a:cs typeface="Calibri" pitchFamily="34" charset="-120"/>
-              </a:rPr>
-              <a:t>Tek bölümlük duyarlı sayfa (3→2→1 sütun)</a:t>
-            </a:r>
-            <a:endParaRPr lang="en-US" sz="1500" dirty="0"/>
-          </a:p>
-        </p:txBody>
-      </p:sp>
-      <p:sp>
-        <p:nvSpPr>
-          <p:cNvPr id="13" name="Shape 11"/>
-          <p:cNvSpPr/>
-          <p:nvPr/>
-        </p:nvSpPr>
-        <p:spPr>
-          <a:xfrm>
-            <a:off x="566928" y="5733288"/>
-            <a:ext cx="237744" cy="237744"/>
-          </a:xfrm>
-          <a:prstGeom prst="diamond">
-            <a:avLst/>
-          </a:prstGeom>
-          <a:solidFill>
-            <a:srgbClr val="F0A93F"/>
-          </a:solidFill>
-          <a:ln/>
-        </p:spPr>
-      </p:sp>
-      <p:sp>
-        <p:nvSpPr>
-          <p:cNvPr id="14" name="Text 12"/>
-          <p:cNvSpPr/>
-          <p:nvPr/>
-        </p:nvSpPr>
-        <p:spPr>
-          <a:xfrm>
-            <a:off x="960120" y="5550408"/>
-            <a:ext cx="6035040" cy="822960"/>
-          </a:xfrm>
-          <a:prstGeom prst="rect">
-            <a:avLst/>
-          </a:prstGeom>
-          <a:noFill/>
-          <a:ln/>
-        </p:spPr>
-        <p:txBody>
-          <a:bodyPr wrap="square" lIns="0" tIns="0" rIns="0" bIns="0" rtlCol="0" anchor="ctr"/>
-          <a:lstStyle/>
-          <a:p>
-            <a:pPr indent="0" marL="0">
-              <a:buNone/>
-            </a:pPr>
-            <a:r>
-              <a:rPr lang="en-US" sz="1500" b="1" dirty="0">
-                <a:solidFill>
-                  <a:srgbClr val="1E2A24"/>
-                </a:solidFill>
-                <a:latin typeface="Calibri" pitchFamily="34" charset="0"/>
-                <a:ea typeface="Calibri" pitchFamily="34" charset="-122"/>
-                <a:cs typeface="Calibri" pitchFamily="34" charset="-120"/>
-              </a:rPr>
-              <a:t>Görsel kimlik</a:t>
-            </a:r>
-            <a:endParaRPr lang="en-US" sz="1500" dirty="0"/>
-          </a:p>
-          <a:p>
-            <a:pPr indent="0" marL="0">
-              <a:buNone/>
-            </a:pPr>
-            <a:r>
-              <a:rPr lang="en-US" sz="1250" dirty="0">
-                <a:solidFill>
-                  <a:srgbClr val="58635A"/>
-                </a:solidFill>
-                <a:latin typeface="Calibri" pitchFamily="34" charset="0"/>
-                <a:ea typeface="Calibri" pitchFamily="34" charset="-122"/>
-                <a:cs typeface="Calibri" pitchFamily="34" charset="-120"/>
-              </a:rPr>
-              <a:t>tokens.css paleti + hero taslağı + logo ve favicon</a:t>
-            </a:r>
-            <a:endParaRPr lang="en-US" sz="1500" dirty="0"/>
-          </a:p>
-        </p:txBody>
-      </p:sp>
-      <p:sp>
-        <p:nvSpPr>
-          <p:cNvPr id="15" name="Shape 13"/>
-          <p:cNvSpPr/>
-          <p:nvPr/>
-        </p:nvSpPr>
-        <p:spPr>
-          <a:xfrm>
-            <a:off x="7406640" y="1371600"/>
-            <a:ext cx="4206240" cy="4892040"/>
+          <p:cNvPr id="5" name="Text 3"/>
+          <p:cNvSpPr/>
+          <p:nvPr/>
+        </p:nvSpPr>
+        <p:spPr>
+          <a:xfrm>
+            <a:off x="5760720" y="1600200"/>
+            <a:ext cx="5486400" cy="274320"/>
+          </a:xfrm>
+          <a:prstGeom prst="rect">
+            <a:avLst/>
+          </a:prstGeom>
+          <a:noFill/>
+          <a:ln/>
+        </p:spPr>
+        <p:txBody>
+          <a:bodyPr wrap="square" lIns="0" tIns="0" rIns="0" bIns="0" rtlCol="0" anchor="ctr"/>
+          <a:lstStyle/>
+          <a:p>
+            <a:pPr indent="0" marL="0">
+              <a:buNone/>
+            </a:pPr>
+            <a:r>
+              <a:rPr lang="en-US" sz="1100" b="1" spc="300" kern="0" dirty="0">
+                <a:solidFill>
+                  <a:srgbClr val="17604C"/>
+                </a:solidFill>
+                <a:latin typeface="Calibri" pitchFamily="34" charset="0"/>
+                <a:ea typeface="Calibri" pitchFamily="34" charset="-122"/>
+                <a:cs typeface="Calibri" pitchFamily="34" charset="-120"/>
+              </a:rPr>
+              <a:t>ÇIKTI: 6 ANA MESAJ</a:t>
+            </a:r>
+            <a:endParaRPr lang="en-US" sz="1100" dirty="0"/>
+          </a:p>
+        </p:txBody>
+      </p:sp>
+      <p:sp>
+        <p:nvSpPr>
+          <p:cNvPr id="6" name="Shape 4"/>
+          <p:cNvSpPr/>
+          <p:nvPr/>
+        </p:nvSpPr>
+        <p:spPr>
+          <a:xfrm>
+            <a:off x="5760720" y="1965960"/>
+            <a:ext cx="5852160" cy="594360"/>
           </a:xfrm>
           <a:prstGeom prst="roundRect">
             <a:avLst>
-              <a:gd name="adj" fmla="val 2609"/>
+              <a:gd name="adj" fmla="val 12308"/>
             </a:avLst>
           </a:prstGeom>
           <a:solidFill>
-            <a:srgbClr val="10201B"/>
-          </a:solidFill>
-          <a:ln/>
-        </p:spPr>
-      </p:sp>
-      <p:sp>
-        <p:nvSpPr>
-          <p:cNvPr id="16" name="Text 14"/>
-          <p:cNvSpPr/>
-          <p:nvPr/>
-        </p:nvSpPr>
-        <p:spPr>
-          <a:xfrm>
-            <a:off x="7772400" y="1691640"/>
-            <a:ext cx="3474720" cy="320040"/>
-          </a:xfrm>
-          <a:prstGeom prst="rect">
-            <a:avLst/>
-          </a:prstGeom>
-          <a:noFill/>
-          <a:ln/>
-        </p:spPr>
-        <p:txBody>
-          <a:bodyPr wrap="square" lIns="0" tIns="0" rIns="0" bIns="0" rtlCol="0" anchor="ctr"/>
-          <a:lstStyle/>
-          <a:p>
-            <a:pPr indent="0" marL="0">
-              <a:buNone/>
-            </a:pPr>
-            <a:r>
-              <a:rPr lang="en-US" sz="1200" b="1" spc="300" kern="0" dirty="0">
-                <a:solidFill>
-                  <a:srgbClr val="35C4B5"/>
-                </a:solidFill>
-                <a:latin typeface="Calibri" pitchFamily="34" charset="0"/>
-                <a:ea typeface="Calibri" pitchFamily="34" charset="-122"/>
-                <a:cs typeface="Calibri" pitchFamily="34" charset="-120"/>
-              </a:rPr>
-              <a:t>DEMO AKIŞI</a:t>
-            </a:r>
-            <a:endParaRPr lang="en-US" sz="1200" dirty="0"/>
-          </a:p>
-        </p:txBody>
-      </p:sp>
-      <p:sp>
-        <p:nvSpPr>
-          <p:cNvPr id="17" name="Shape 15"/>
-          <p:cNvSpPr/>
-          <p:nvPr/>
-        </p:nvSpPr>
-        <p:spPr>
-          <a:xfrm>
-            <a:off x="7772400" y="2148840"/>
-            <a:ext cx="384048" cy="384048"/>
-          </a:xfrm>
-          <a:prstGeom prst="ellipse">
-            <a:avLst/>
-          </a:prstGeom>
-          <a:solidFill>
-            <a:srgbClr val="1A2F28"/>
+            <a:srgbClr val="FFFFFF"/>
           </a:solidFill>
           <a:ln w="12700">
             <a:solidFill>
-              <a:srgbClr val="35C4B5"/>
+              <a:srgbClr val="E8E1D2"/>
             </a:solidFill>
             <a:prstDash val="solid"/>
           </a:ln>
@@ -2391,53 +2539,53 @@
       </p:sp>
       <p:sp>
         <p:nvSpPr>
-          <p:cNvPr id="18" name="Text 16"/>
-          <p:cNvSpPr/>
-          <p:nvPr/>
-        </p:nvSpPr>
-        <p:spPr>
-          <a:xfrm>
-            <a:off x="7772400" y="2148840"/>
-            <a:ext cx="384048" cy="384048"/>
-          </a:xfrm>
-          <a:prstGeom prst="rect">
-            <a:avLst/>
-          </a:prstGeom>
-          <a:noFill/>
-          <a:ln/>
-        </p:spPr>
-        <p:txBody>
-          <a:bodyPr wrap="square" lIns="0" tIns="0" rIns="0" bIns="0" rtlCol="0" anchor="ctr"/>
-          <a:lstStyle/>
-          <a:p>
-            <a:pPr algn="ctr" indent="0" marL="0">
-              <a:buNone/>
-            </a:pPr>
-            <a:r>
-              <a:rPr lang="en-US" sz="1300" b="1" dirty="0">
-                <a:solidFill>
-                  <a:srgbClr val="35C4B5"/>
-                </a:solidFill>
-                <a:latin typeface="Calibri" pitchFamily="34" charset="0"/>
-                <a:ea typeface="Calibri" pitchFamily="34" charset="-122"/>
-                <a:cs typeface="Calibri" pitchFamily="34" charset="-120"/>
+          <p:cNvPr id="7" name="Text 5"/>
+          <p:cNvSpPr/>
+          <p:nvPr/>
+        </p:nvSpPr>
+        <p:spPr>
+          <a:xfrm>
+            <a:off x="5943600" y="1965960"/>
+            <a:ext cx="457200" cy="594360"/>
+          </a:xfrm>
+          <a:prstGeom prst="rect">
+            <a:avLst/>
+          </a:prstGeom>
+          <a:noFill/>
+          <a:ln/>
+        </p:spPr>
+        <p:txBody>
+          <a:bodyPr wrap="square" lIns="0" tIns="0" rIns="0" bIns="0" rtlCol="0" anchor="ctr"/>
+          <a:lstStyle/>
+          <a:p>
+            <a:pPr indent="0" marL="0">
+              <a:buNone/>
+            </a:pPr>
+            <a:r>
+              <a:rPr lang="en-US" sz="1800" b="1" dirty="0">
+                <a:solidFill>
+                  <a:srgbClr val="F0A93F"/>
+                </a:solidFill>
+                <a:latin typeface="Cambria" pitchFamily="34" charset="0"/>
+                <a:ea typeface="Cambria" pitchFamily="34" charset="-122"/>
+                <a:cs typeface="Cambria" pitchFamily="34" charset="-120"/>
               </a:rPr>
               <a:t>1</a:t>
             </a:r>
-            <a:endParaRPr lang="en-US" sz="1300" dirty="0"/>
-          </a:p>
-        </p:txBody>
-      </p:sp>
-      <p:sp>
-        <p:nvSpPr>
-          <p:cNvPr id="19" name="Text 17"/>
-          <p:cNvSpPr/>
-          <p:nvPr/>
-        </p:nvSpPr>
-        <p:spPr>
-          <a:xfrm>
-            <a:off x="8321040" y="2039112"/>
-            <a:ext cx="3200400" cy="640080"/>
+            <a:endParaRPr lang="en-US" sz="1800" dirty="0"/>
+          </a:p>
+        </p:txBody>
+      </p:sp>
+      <p:sp>
+        <p:nvSpPr>
+          <p:cNvPr id="8" name="Text 6"/>
+          <p:cNvSpPr/>
+          <p:nvPr/>
+        </p:nvSpPr>
+        <p:spPr>
+          <a:xfrm>
+            <a:off x="6446520" y="1965960"/>
+            <a:ext cx="5029200" cy="594360"/>
           </a:xfrm>
           <a:prstGeom prst="rect">
             <a:avLst/>
@@ -2455,13 +2603,13 @@
             <a:r>
               <a:rPr lang="en-US" sz="1250" dirty="0">
                 <a:solidFill>
-                  <a:srgbClr val="EAF3EE"/>
-                </a:solidFill>
-                <a:latin typeface="Calibri" pitchFamily="34" charset="0"/>
-                <a:ea typeface="Calibri" pitchFamily="34" charset="-122"/>
-                <a:cs typeface="Calibri" pitchFamily="34" charset="-120"/>
-              </a:rPr>
-              <a:t>Wireframe dosyası — sayfa düzenleri</a:t>
+                  <a:srgbClr val="1E2A24"/>
+                </a:solidFill>
+                <a:latin typeface="Calibri" pitchFamily="34" charset="0"/>
+                <a:ea typeface="Calibri" pitchFamily="34" charset="-122"/>
+                <a:cs typeface="Calibri" pitchFamily="34" charset="-120"/>
+              </a:rPr>
+              <a:t>Şehrin tüm altyapısı tek haritada, sorgulanabilir</a:t>
             </a:r>
             <a:endParaRPr lang="en-US" sz="1250" dirty="0"/>
           </a:p>
@@ -2469,24 +2617,26 @@
       </p:sp>
       <p:sp>
         <p:nvSpPr>
-          <p:cNvPr id="20" name="Shape 18"/>
-          <p:cNvSpPr/>
-          <p:nvPr/>
-        </p:nvSpPr>
-        <p:spPr>
-          <a:xfrm>
-            <a:off x="7772400" y="2898648"/>
-            <a:ext cx="384048" cy="384048"/>
-          </a:xfrm>
-          <a:prstGeom prst="ellipse">
-            <a:avLst/>
-          </a:prstGeom>
-          <a:solidFill>
-            <a:srgbClr val="1A2F28"/>
+          <p:cNvPr id="9" name="Shape 7"/>
+          <p:cNvSpPr/>
+          <p:nvPr/>
+        </p:nvSpPr>
+        <p:spPr>
+          <a:xfrm>
+            <a:off x="5760720" y="2679192"/>
+            <a:ext cx="5852160" cy="594360"/>
+          </a:xfrm>
+          <a:prstGeom prst="roundRect">
+            <a:avLst>
+              <a:gd name="adj" fmla="val 12308"/>
+            </a:avLst>
+          </a:prstGeom>
+          <a:solidFill>
+            <a:srgbClr val="FFFFFF"/>
           </a:solidFill>
           <a:ln w="12700">
             <a:solidFill>
-              <a:srgbClr val="35C4B5"/>
+              <a:srgbClr val="E8E1D2"/>
             </a:solidFill>
             <a:prstDash val="solid"/>
           </a:ln>
@@ -2494,53 +2644,53 @@
       </p:sp>
       <p:sp>
         <p:nvSpPr>
-          <p:cNvPr id="21" name="Text 19"/>
-          <p:cNvSpPr/>
-          <p:nvPr/>
-        </p:nvSpPr>
-        <p:spPr>
-          <a:xfrm>
-            <a:off x="7772400" y="2898648"/>
-            <a:ext cx="384048" cy="384048"/>
-          </a:xfrm>
-          <a:prstGeom prst="rect">
-            <a:avLst/>
-          </a:prstGeom>
-          <a:noFill/>
-          <a:ln/>
-        </p:spPr>
-        <p:txBody>
-          <a:bodyPr wrap="square" lIns="0" tIns="0" rIns="0" bIns="0" rtlCol="0" anchor="ctr"/>
-          <a:lstStyle/>
-          <a:p>
-            <a:pPr algn="ctr" indent="0" marL="0">
-              <a:buNone/>
-            </a:pPr>
-            <a:r>
-              <a:rPr lang="en-US" sz="1300" b="1" dirty="0">
-                <a:solidFill>
-                  <a:srgbClr val="35C4B5"/>
-                </a:solidFill>
-                <a:latin typeface="Calibri" pitchFamily="34" charset="0"/>
-                <a:ea typeface="Calibri" pitchFamily="34" charset="-122"/>
-                <a:cs typeface="Calibri" pitchFamily="34" charset="-120"/>
+          <p:cNvPr id="10" name="Text 8"/>
+          <p:cNvSpPr/>
+          <p:nvPr/>
+        </p:nvSpPr>
+        <p:spPr>
+          <a:xfrm>
+            <a:off x="5943600" y="2679192"/>
+            <a:ext cx="457200" cy="594360"/>
+          </a:xfrm>
+          <a:prstGeom prst="rect">
+            <a:avLst/>
+          </a:prstGeom>
+          <a:noFill/>
+          <a:ln/>
+        </p:spPr>
+        <p:txBody>
+          <a:bodyPr wrap="square" lIns="0" tIns="0" rIns="0" bIns="0" rtlCol="0" anchor="ctr"/>
+          <a:lstStyle/>
+          <a:p>
+            <a:pPr indent="0" marL="0">
+              <a:buNone/>
+            </a:pPr>
+            <a:r>
+              <a:rPr lang="en-US" sz="1800" b="1" dirty="0">
+                <a:solidFill>
+                  <a:srgbClr val="F0A93F"/>
+                </a:solidFill>
+                <a:latin typeface="Cambria" pitchFamily="34" charset="0"/>
+                <a:ea typeface="Cambria" pitchFamily="34" charset="-122"/>
+                <a:cs typeface="Cambria" pitchFamily="34" charset="-120"/>
               </a:rPr>
               <a:t>2</a:t>
             </a:r>
-            <a:endParaRPr lang="en-US" sz="1300" dirty="0"/>
-          </a:p>
-        </p:txBody>
-      </p:sp>
-      <p:sp>
-        <p:nvSpPr>
-          <p:cNvPr id="22" name="Text 20"/>
-          <p:cNvSpPr/>
-          <p:nvPr/>
-        </p:nvSpPr>
-        <p:spPr>
-          <a:xfrm>
-            <a:off x="8321040" y="2788920"/>
-            <a:ext cx="3200400" cy="640080"/>
+            <a:endParaRPr lang="en-US" sz="1800" dirty="0"/>
+          </a:p>
+        </p:txBody>
+      </p:sp>
+      <p:sp>
+        <p:nvSpPr>
+          <p:cNvPr id="11" name="Text 9"/>
+          <p:cNvSpPr/>
+          <p:nvPr/>
+        </p:nvSpPr>
+        <p:spPr>
+          <a:xfrm>
+            <a:off x="6446520" y="2679192"/>
+            <a:ext cx="5029200" cy="594360"/>
           </a:xfrm>
           <a:prstGeom prst="rect">
             <a:avLst/>
@@ -2558,13 +2708,13 @@
             <a:r>
               <a:rPr lang="en-US" sz="1250" dirty="0">
                 <a:solidFill>
-                  <a:srgbClr val="EAF3EE"/>
-                </a:solidFill>
-                <a:latin typeface="Calibri" pitchFamily="34" charset="0"/>
-                <a:ea typeface="Calibri" pitchFamily="34" charset="-122"/>
-                <a:cs typeface="Calibri" pitchFamily="34" charset="-120"/>
-              </a:rPr>
-              <a:t>Ana mesaj listesi ve sıralama mantığı</a:t>
+                  <a:srgbClr val="1E2A24"/>
+                </a:solidFill>
+                <a:latin typeface="Calibri" pitchFamily="34" charset="0"/>
+                <a:ea typeface="Calibri" pitchFamily="34" charset="-122"/>
+                <a:cs typeface="Calibri" pitchFamily="34" charset="-120"/>
+              </a:rPr>
+              <a:t>Her veri katmanı ayrı ayrı açılıp kapanır</a:t>
             </a:r>
             <a:endParaRPr lang="en-US" sz="1250" dirty="0"/>
           </a:p>
@@ -2572,24 +2722,26 @@
       </p:sp>
       <p:sp>
         <p:nvSpPr>
-          <p:cNvPr id="23" name="Shape 21"/>
-          <p:cNvSpPr/>
-          <p:nvPr/>
-        </p:nvSpPr>
-        <p:spPr>
-          <a:xfrm>
-            <a:off x="7772400" y="3648456"/>
-            <a:ext cx="384048" cy="384048"/>
-          </a:xfrm>
-          <a:prstGeom prst="ellipse">
-            <a:avLst/>
-          </a:prstGeom>
-          <a:solidFill>
-            <a:srgbClr val="1A2F28"/>
+          <p:cNvPr id="12" name="Shape 10"/>
+          <p:cNvSpPr/>
+          <p:nvPr/>
+        </p:nvSpPr>
+        <p:spPr>
+          <a:xfrm>
+            <a:off x="5760720" y="3392424"/>
+            <a:ext cx="5852160" cy="594360"/>
+          </a:xfrm>
+          <a:prstGeom prst="roundRect">
+            <a:avLst>
+              <a:gd name="adj" fmla="val 12308"/>
+            </a:avLst>
+          </a:prstGeom>
+          <a:solidFill>
+            <a:srgbClr val="FFFFFF"/>
           </a:solidFill>
           <a:ln w="12700">
             <a:solidFill>
-              <a:srgbClr val="35C4B5"/>
+              <a:srgbClr val="E8E1D2"/>
             </a:solidFill>
             <a:prstDash val="solid"/>
           </a:ln>
@@ -2597,53 +2749,53 @@
       </p:sp>
       <p:sp>
         <p:nvSpPr>
-          <p:cNvPr id="24" name="Text 22"/>
-          <p:cNvSpPr/>
-          <p:nvPr/>
-        </p:nvSpPr>
-        <p:spPr>
-          <a:xfrm>
-            <a:off x="7772400" y="3648456"/>
-            <a:ext cx="384048" cy="384048"/>
-          </a:xfrm>
-          <a:prstGeom prst="rect">
-            <a:avLst/>
-          </a:prstGeom>
-          <a:noFill/>
-          <a:ln/>
-        </p:spPr>
-        <p:txBody>
-          <a:bodyPr wrap="square" lIns="0" tIns="0" rIns="0" bIns="0" rtlCol="0" anchor="ctr"/>
-          <a:lstStyle/>
-          <a:p>
-            <a:pPr algn="ctr" indent="0" marL="0">
-              <a:buNone/>
-            </a:pPr>
-            <a:r>
-              <a:rPr lang="en-US" sz="1300" b="1" dirty="0">
-                <a:solidFill>
-                  <a:srgbClr val="35C4B5"/>
-                </a:solidFill>
-                <a:latin typeface="Calibri" pitchFamily="34" charset="0"/>
-                <a:ea typeface="Calibri" pitchFamily="34" charset="-122"/>
-                <a:cs typeface="Calibri" pitchFamily="34" charset="-120"/>
+          <p:cNvPr id="13" name="Text 11"/>
+          <p:cNvSpPr/>
+          <p:nvPr/>
+        </p:nvSpPr>
+        <p:spPr>
+          <a:xfrm>
+            <a:off x="5943600" y="3392424"/>
+            <a:ext cx="457200" cy="594360"/>
+          </a:xfrm>
+          <a:prstGeom prst="rect">
+            <a:avLst/>
+          </a:prstGeom>
+          <a:noFill/>
+          <a:ln/>
+        </p:spPr>
+        <p:txBody>
+          <a:bodyPr wrap="square" lIns="0" tIns="0" rIns="0" bIns="0" rtlCol="0" anchor="ctr"/>
+          <a:lstStyle/>
+          <a:p>
+            <a:pPr indent="0" marL="0">
+              <a:buNone/>
+            </a:pPr>
+            <a:r>
+              <a:rPr lang="en-US" sz="1800" b="1" dirty="0">
+                <a:solidFill>
+                  <a:srgbClr val="F0A93F"/>
+                </a:solidFill>
+                <a:latin typeface="Cambria" pitchFamily="34" charset="0"/>
+                <a:ea typeface="Cambria" pitchFamily="34" charset="-122"/>
+                <a:cs typeface="Cambria" pitchFamily="34" charset="-120"/>
               </a:rPr>
               <a:t>3</a:t>
             </a:r>
-            <a:endParaRPr lang="en-US" sz="1300" dirty="0"/>
-          </a:p>
-        </p:txBody>
-      </p:sp>
-      <p:sp>
-        <p:nvSpPr>
-          <p:cNvPr id="25" name="Text 23"/>
-          <p:cNvSpPr/>
-          <p:nvPr/>
-        </p:nvSpPr>
-        <p:spPr>
-          <a:xfrm>
-            <a:off x="8321040" y="3538728"/>
-            <a:ext cx="3200400" cy="640080"/>
+            <a:endParaRPr lang="en-US" sz="1800" dirty="0"/>
+          </a:p>
+        </p:txBody>
+      </p:sp>
+      <p:sp>
+        <p:nvSpPr>
+          <p:cNvPr id="14" name="Text 12"/>
+          <p:cNvSpPr/>
+          <p:nvPr/>
+        </p:nvSpPr>
+        <p:spPr>
+          <a:xfrm>
+            <a:off x="6446520" y="3392424"/>
+            <a:ext cx="5029200" cy="594360"/>
           </a:xfrm>
           <a:prstGeom prst="rect">
             <a:avLst/>
@@ -2661,13 +2813,13 @@
             <a:r>
               <a:rPr lang="en-US" sz="1250" dirty="0">
                 <a:solidFill>
-                  <a:srgbClr val="EAF3EE"/>
-                </a:solidFill>
-                <a:latin typeface="Calibri" pitchFamily="34" charset="0"/>
-                <a:ea typeface="Calibri" pitchFamily="34" charset="-122"/>
-                <a:cs typeface="Calibri" pitchFamily="34" charset="-120"/>
-              </a:rPr>
-              <a:t>Hero taslağı — masaüstü + mobil</a:t>
+                  <a:srgbClr val="1E2A24"/>
+                </a:solidFill>
+                <a:latin typeface="Calibri" pitchFamily="34" charset="0"/>
+                <a:ea typeface="Calibri" pitchFamily="34" charset="-122"/>
+                <a:cs typeface="Calibri" pitchFamily="34" charset="-120"/>
+              </a:rPr>
+              <a:t>Hızlı ve akıcı harita deneyimi (MVT)</a:t>
             </a:r>
             <a:endParaRPr lang="en-US" sz="1250" dirty="0"/>
           </a:p>
@@ -2675,24 +2827,26 @@
       </p:sp>
       <p:sp>
         <p:nvSpPr>
-          <p:cNvPr id="26" name="Shape 24"/>
-          <p:cNvSpPr/>
-          <p:nvPr/>
-        </p:nvSpPr>
-        <p:spPr>
-          <a:xfrm>
-            <a:off x="7772400" y="4398264"/>
-            <a:ext cx="384048" cy="384048"/>
-          </a:xfrm>
-          <a:prstGeom prst="ellipse">
-            <a:avLst/>
-          </a:prstGeom>
-          <a:solidFill>
-            <a:srgbClr val="1A2F28"/>
+          <p:cNvPr id="15" name="Shape 13"/>
+          <p:cNvSpPr/>
+          <p:nvPr/>
+        </p:nvSpPr>
+        <p:spPr>
+          <a:xfrm>
+            <a:off x="5760720" y="4105656"/>
+            <a:ext cx="5852160" cy="594360"/>
+          </a:xfrm>
+          <a:prstGeom prst="roundRect">
+            <a:avLst>
+              <a:gd name="adj" fmla="val 12308"/>
+            </a:avLst>
+          </a:prstGeom>
+          <a:solidFill>
+            <a:srgbClr val="FFFFFF"/>
           </a:solidFill>
           <a:ln w="12700">
             <a:solidFill>
-              <a:srgbClr val="35C4B5"/>
+              <a:srgbClr val="E8E1D2"/>
             </a:solidFill>
             <a:prstDash val="solid"/>
           </a:ln>
@@ -2700,53 +2854,53 @@
       </p:sp>
       <p:sp>
         <p:nvSpPr>
-          <p:cNvPr id="27" name="Text 25"/>
-          <p:cNvSpPr/>
-          <p:nvPr/>
-        </p:nvSpPr>
-        <p:spPr>
-          <a:xfrm>
-            <a:off x="7772400" y="4398264"/>
-            <a:ext cx="384048" cy="384048"/>
-          </a:xfrm>
-          <a:prstGeom prst="rect">
-            <a:avLst/>
-          </a:prstGeom>
-          <a:noFill/>
-          <a:ln/>
-        </p:spPr>
-        <p:txBody>
-          <a:bodyPr wrap="square" lIns="0" tIns="0" rIns="0" bIns="0" rtlCol="0" anchor="ctr"/>
-          <a:lstStyle/>
-          <a:p>
-            <a:pPr algn="ctr" indent="0" marL="0">
-              <a:buNone/>
-            </a:pPr>
-            <a:r>
-              <a:rPr lang="en-US" sz="1300" b="1" dirty="0">
-                <a:solidFill>
-                  <a:srgbClr val="35C4B5"/>
-                </a:solidFill>
-                <a:latin typeface="Calibri" pitchFamily="34" charset="0"/>
-                <a:ea typeface="Calibri" pitchFamily="34" charset="-122"/>
-                <a:cs typeface="Calibri" pitchFamily="34" charset="-120"/>
+          <p:cNvPr id="16" name="Text 14"/>
+          <p:cNvSpPr/>
+          <p:nvPr/>
+        </p:nvSpPr>
+        <p:spPr>
+          <a:xfrm>
+            <a:off x="5943600" y="4105656"/>
+            <a:ext cx="457200" cy="594360"/>
+          </a:xfrm>
+          <a:prstGeom prst="rect">
+            <a:avLst/>
+          </a:prstGeom>
+          <a:noFill/>
+          <a:ln/>
+        </p:spPr>
+        <p:txBody>
+          <a:bodyPr wrap="square" lIns="0" tIns="0" rIns="0" bIns="0" rtlCol="0" anchor="ctr"/>
+          <a:lstStyle/>
+          <a:p>
+            <a:pPr indent="0" marL="0">
+              <a:buNone/>
+            </a:pPr>
+            <a:r>
+              <a:rPr lang="en-US" sz="1800" b="1" dirty="0">
+                <a:solidFill>
+                  <a:srgbClr val="F0A93F"/>
+                </a:solidFill>
+                <a:latin typeface="Cambria" pitchFamily="34" charset="0"/>
+                <a:ea typeface="Cambria" pitchFamily="34" charset="-122"/>
+                <a:cs typeface="Cambria" pitchFamily="34" charset="-120"/>
               </a:rPr>
               <a:t>4</a:t>
             </a:r>
-            <a:endParaRPr lang="en-US" sz="1300" dirty="0"/>
-          </a:p>
-        </p:txBody>
-      </p:sp>
-      <p:sp>
-        <p:nvSpPr>
-          <p:cNvPr id="28" name="Text 26"/>
-          <p:cNvSpPr/>
-          <p:nvPr/>
-        </p:nvSpPr>
-        <p:spPr>
-          <a:xfrm>
-            <a:off x="8321040" y="4288536"/>
-            <a:ext cx="3200400" cy="640080"/>
+            <a:endParaRPr lang="en-US" sz="1800" dirty="0"/>
+          </a:p>
+        </p:txBody>
+      </p:sp>
+      <p:sp>
+        <p:nvSpPr>
+          <p:cNvPr id="17" name="Text 15"/>
+          <p:cNvSpPr/>
+          <p:nvPr/>
+        </p:nvSpPr>
+        <p:spPr>
+          <a:xfrm>
+            <a:off x="6446520" y="4105656"/>
+            <a:ext cx="5029200" cy="594360"/>
           </a:xfrm>
           <a:prstGeom prst="rect">
             <a:avLst/>
@@ -2764,13 +2918,13 @@
             <a:r>
               <a:rPr lang="en-US" sz="1250" dirty="0">
                 <a:solidFill>
-                  <a:srgbClr val="EAF3EE"/>
-                </a:solidFill>
-                <a:latin typeface="Calibri" pitchFamily="34" charset="0"/>
-                <a:ea typeface="Calibri" pitchFamily="34" charset="-122"/>
-                <a:cs typeface="Calibri" pitchFamily="34" charset="-120"/>
-              </a:rPr>
-              <a:t>Kalibrasyon sayfası — duyarlılık</a:t>
+                  <a:srgbClr val="1E2A24"/>
+                </a:solidFill>
+                <a:latin typeface="Calibri" pitchFamily="34" charset="0"/>
+                <a:ea typeface="Calibri" pitchFamily="34" charset="-122"/>
+                <a:cs typeface="Calibri" pitchFamily="34" charset="-120"/>
+              </a:rPr>
+              <a:t>Veri kurumun kendi sunucusunda — dışarı çıkmaz</a:t>
             </a:r>
             <a:endParaRPr lang="en-US" sz="1250" dirty="0"/>
           </a:p>
@@ -2778,24 +2932,26 @@
       </p:sp>
       <p:sp>
         <p:nvSpPr>
-          <p:cNvPr id="29" name="Shape 27"/>
-          <p:cNvSpPr/>
-          <p:nvPr/>
-        </p:nvSpPr>
-        <p:spPr>
-          <a:xfrm>
-            <a:off x="7772400" y="5148072"/>
-            <a:ext cx="384048" cy="384048"/>
-          </a:xfrm>
-          <a:prstGeom prst="ellipse">
-            <a:avLst/>
-          </a:prstGeom>
-          <a:solidFill>
-            <a:srgbClr val="1A2F28"/>
+          <p:cNvPr id="18" name="Shape 16"/>
+          <p:cNvSpPr/>
+          <p:nvPr/>
+        </p:nvSpPr>
+        <p:spPr>
+          <a:xfrm>
+            <a:off x="5760720" y="4818888"/>
+            <a:ext cx="5852160" cy="594360"/>
+          </a:xfrm>
+          <a:prstGeom prst="roundRect">
+            <a:avLst>
+              <a:gd name="adj" fmla="val 12308"/>
+            </a:avLst>
+          </a:prstGeom>
+          <a:solidFill>
+            <a:srgbClr val="FFFFFF"/>
           </a:solidFill>
           <a:ln w="12700">
             <a:solidFill>
-              <a:srgbClr val="35C4B5"/>
+              <a:srgbClr val="E8E1D2"/>
             </a:solidFill>
             <a:prstDash val="solid"/>
           </a:ln>
@@ -2803,53 +2959,53 @@
       </p:sp>
       <p:sp>
         <p:nvSpPr>
-          <p:cNvPr id="30" name="Text 28"/>
-          <p:cNvSpPr/>
-          <p:nvPr/>
-        </p:nvSpPr>
-        <p:spPr>
-          <a:xfrm>
-            <a:off x="7772400" y="5148072"/>
-            <a:ext cx="384048" cy="384048"/>
-          </a:xfrm>
-          <a:prstGeom prst="rect">
-            <a:avLst/>
-          </a:prstGeom>
-          <a:noFill/>
-          <a:ln/>
-        </p:spPr>
-        <p:txBody>
-          <a:bodyPr wrap="square" lIns="0" tIns="0" rIns="0" bIns="0" rtlCol="0" anchor="ctr"/>
-          <a:lstStyle/>
-          <a:p>
-            <a:pPr algn="ctr" indent="0" marL="0">
-              <a:buNone/>
-            </a:pPr>
-            <a:r>
-              <a:rPr lang="en-US" sz="1300" b="1" dirty="0">
-                <a:solidFill>
-                  <a:srgbClr val="35C4B5"/>
-                </a:solidFill>
-                <a:latin typeface="Calibri" pitchFamily="34" charset="0"/>
-                <a:ea typeface="Calibri" pitchFamily="34" charset="-122"/>
-                <a:cs typeface="Calibri" pitchFamily="34" charset="-120"/>
+          <p:cNvPr id="19" name="Text 17"/>
+          <p:cNvSpPr/>
+          <p:nvPr/>
+        </p:nvSpPr>
+        <p:spPr>
+          <a:xfrm>
+            <a:off x="5943600" y="4818888"/>
+            <a:ext cx="457200" cy="594360"/>
+          </a:xfrm>
+          <a:prstGeom prst="rect">
+            <a:avLst/>
+          </a:prstGeom>
+          <a:noFill/>
+          <a:ln/>
+        </p:spPr>
+        <p:txBody>
+          <a:bodyPr wrap="square" lIns="0" tIns="0" rIns="0" bIns="0" rtlCol="0" anchor="ctr"/>
+          <a:lstStyle/>
+          <a:p>
+            <a:pPr indent="0" marL="0">
+              <a:buNone/>
+            </a:pPr>
+            <a:r>
+              <a:rPr lang="en-US" sz="1800" b="1" dirty="0">
+                <a:solidFill>
+                  <a:srgbClr val="F0A93F"/>
+                </a:solidFill>
+                <a:latin typeface="Cambria" pitchFamily="34" charset="0"/>
+                <a:ea typeface="Cambria" pitchFamily="34" charset="-122"/>
+                <a:cs typeface="Cambria" pitchFamily="34" charset="-120"/>
               </a:rPr>
               <a:t>5</a:t>
             </a:r>
-            <a:endParaRPr lang="en-US" sz="1300" dirty="0"/>
-          </a:p>
-        </p:txBody>
-      </p:sp>
-      <p:sp>
-        <p:nvSpPr>
-          <p:cNvPr id="31" name="Text 29"/>
-          <p:cNvSpPr/>
-          <p:nvPr/>
-        </p:nvSpPr>
-        <p:spPr>
-          <a:xfrm>
-            <a:off x="8321040" y="5038344"/>
-            <a:ext cx="3200400" cy="640080"/>
+            <a:endParaRPr lang="en-US" sz="1800" dirty="0"/>
+          </a:p>
+        </p:txBody>
+      </p:sp>
+      <p:sp>
+        <p:nvSpPr>
+          <p:cNvPr id="20" name="Text 18"/>
+          <p:cNvSpPr/>
+          <p:nvPr/>
+        </p:nvSpPr>
+        <p:spPr>
+          <a:xfrm>
+            <a:off x="6446520" y="4818888"/>
+            <a:ext cx="5029200" cy="594360"/>
           </a:xfrm>
           <a:prstGeom prst="rect">
             <a:avLst/>
@@ -2867,13 +3023,13 @@
             <a:r>
               <a:rPr lang="en-US" sz="1250" dirty="0">
                 <a:solidFill>
-                  <a:srgbClr val="EAF3EE"/>
-                </a:solidFill>
-                <a:latin typeface="Calibri" pitchFamily="34" charset="0"/>
-                <a:ea typeface="Calibri" pitchFamily="34" charset="-122"/>
-                <a:cs typeface="Calibri" pitchFamily="34" charset="-120"/>
-              </a:rPr>
-              <a:t>Logo seçenekleri ve seçilen işaret</a:t>
+                  <a:srgbClr val="1E2A24"/>
+                </a:solidFill>
+                <a:latin typeface="Calibri" pitchFamily="34" charset="0"/>
+                <a:ea typeface="Calibri" pitchFamily="34" charset="-122"/>
+                <a:cs typeface="Calibri" pitchFamily="34" charset="-120"/>
+              </a:rPr>
+              <a:t>Ulusal standartlarla (TUCBS) uyumlu</a:t>
             </a:r>
             <a:endParaRPr lang="en-US" sz="1250" dirty="0"/>
           </a:p>
@@ -2881,40 +3037,106 @@
       </p:sp>
       <p:sp>
         <p:nvSpPr>
-          <p:cNvPr id="32" name="Text 30"/>
-          <p:cNvSpPr/>
-          <p:nvPr/>
-        </p:nvSpPr>
-        <p:spPr>
-          <a:xfrm>
-            <a:off x="7772400" y="5870448"/>
-            <a:ext cx="3474720" cy="274320"/>
-          </a:xfrm>
-          <a:prstGeom prst="rect">
-            <a:avLst/>
-          </a:prstGeom>
-          <a:noFill/>
-          <a:ln/>
-        </p:spPr>
-        <p:txBody>
-          <a:bodyPr wrap="square" lIns="0" tIns="0" rIns="0" bIns="0" rtlCol="0" anchor="ctr"/>
-          <a:lstStyle/>
-          <a:p>
-            <a:pPr indent="0" marL="0">
-              <a:buNone/>
-            </a:pPr>
-            <a:r>
-              <a:rPr lang="en-US" sz="1100" i="1" dirty="0">
-                <a:solidFill>
-                  <a:srgbClr val="9CB2A8"/>
-                </a:solidFill>
-                <a:latin typeface="Calibri" pitchFamily="34" charset="0"/>
-                <a:ea typeface="Calibri" pitchFamily="34" charset="-122"/>
-                <a:cs typeface="Calibri" pitchFamily="34" charset="-120"/>
-              </a:rPr>
-              <a:t>Tümü tarayıcıda canlı gösterilecek</a:t>
-            </a:r>
-            <a:endParaRPr lang="en-US" sz="1100" dirty="0"/>
+          <p:cNvPr id="21" name="Shape 19"/>
+          <p:cNvSpPr/>
+          <p:nvPr/>
+        </p:nvSpPr>
+        <p:spPr>
+          <a:xfrm>
+            <a:off x="5760720" y="5532120"/>
+            <a:ext cx="5852160" cy="594360"/>
+          </a:xfrm>
+          <a:prstGeom prst="roundRect">
+            <a:avLst>
+              <a:gd name="adj" fmla="val 12308"/>
+            </a:avLst>
+          </a:prstGeom>
+          <a:solidFill>
+            <a:srgbClr val="FFFFFF"/>
+          </a:solidFill>
+          <a:ln w="12700">
+            <a:solidFill>
+              <a:srgbClr val="E8E1D2"/>
+            </a:solidFill>
+            <a:prstDash val="solid"/>
+          </a:ln>
+        </p:spPr>
+      </p:sp>
+      <p:sp>
+        <p:nvSpPr>
+          <p:cNvPr id="22" name="Text 20"/>
+          <p:cNvSpPr/>
+          <p:nvPr/>
+        </p:nvSpPr>
+        <p:spPr>
+          <a:xfrm>
+            <a:off x="5943600" y="5532120"/>
+            <a:ext cx="457200" cy="594360"/>
+          </a:xfrm>
+          <a:prstGeom prst="rect">
+            <a:avLst/>
+          </a:prstGeom>
+          <a:noFill/>
+          <a:ln/>
+        </p:spPr>
+        <p:txBody>
+          <a:bodyPr wrap="square" lIns="0" tIns="0" rIns="0" bIns="0" rtlCol="0" anchor="ctr"/>
+          <a:lstStyle/>
+          <a:p>
+            <a:pPr indent="0" marL="0">
+              <a:buNone/>
+            </a:pPr>
+            <a:r>
+              <a:rPr lang="en-US" sz="1800" b="1" dirty="0">
+                <a:solidFill>
+                  <a:srgbClr val="F0A93F"/>
+                </a:solidFill>
+                <a:latin typeface="Cambria" pitchFamily="34" charset="0"/>
+                <a:ea typeface="Cambria" pitchFamily="34" charset="-122"/>
+                <a:cs typeface="Cambria" pitchFamily="34" charset="-120"/>
+              </a:rPr>
+              <a:t>6</a:t>
+            </a:r>
+            <a:endParaRPr lang="en-US" sz="1800" dirty="0"/>
+          </a:p>
+        </p:txBody>
+      </p:sp>
+      <p:sp>
+        <p:nvSpPr>
+          <p:cNvPr id="23" name="Text 21"/>
+          <p:cNvSpPr/>
+          <p:nvPr/>
+        </p:nvSpPr>
+        <p:spPr>
+          <a:xfrm>
+            <a:off x="6446520" y="5532120"/>
+            <a:ext cx="5029200" cy="594360"/>
+          </a:xfrm>
+          <a:prstGeom prst="rect">
+            <a:avLst/>
+          </a:prstGeom>
+          <a:noFill/>
+          <a:ln/>
+        </p:spPr>
+        <p:txBody>
+          <a:bodyPr wrap="square" lIns="0" tIns="0" rIns="0" bIns="0" rtlCol="0" anchor="ctr"/>
+          <a:lstStyle/>
+          <a:p>
+            <a:pPr indent="0" marL="0">
+              <a:buNone/>
+            </a:pPr>
+            <a:r>
+              <a:rPr lang="en-US" sz="1250" dirty="0">
+                <a:solidFill>
+                  <a:srgbClr val="1E2A24"/>
+                </a:solidFill>
+                <a:latin typeface="Calibri" pitchFamily="34" charset="0"/>
+                <a:ea typeface="Calibri" pitchFamily="34" charset="-122"/>
+                <a:cs typeface="Calibri" pitchFamily="34" charset="-120"/>
+              </a:rPr>
+              <a:t>Her verinin kaynağı belli — denetlenebilir kalite</a:t>
+            </a:r>
+            <a:endParaRPr lang="en-US" sz="1250" dirty="0"/>
           </a:p>
         </p:txBody>
       </p:sp>
@@ -2958,24 +3180,63 @@
         </p:nvSpPr>
         <p:spPr>
           <a:xfrm>
-            <a:off x="548640" y="457200"/>
-            <a:ext cx="11064240" cy="685800"/>
-          </a:xfrm>
-          <a:prstGeom prst="rect">
-            <a:avLst/>
-          </a:prstGeom>
-          <a:noFill/>
-          <a:ln/>
-        </p:spPr>
-        <p:txBody>
-          <a:bodyPr wrap="square" lIns="0" tIns="0" rIns="0" bIns="0" rtlCol="0" anchor="ctr"/>
-          <a:lstStyle/>
-          <a:p>
-            <a:pPr indent="0" marL="0">
-              <a:buNone/>
-            </a:pPr>
-            <a:r>
-              <a:rPr lang="en-US" sz="3400" b="1" dirty="0">
+            <a:off x="548640" y="384048"/>
+            <a:ext cx="4572000" cy="274320"/>
+          </a:xfrm>
+          <a:prstGeom prst="rect">
+            <a:avLst/>
+          </a:prstGeom>
+          <a:noFill/>
+          <a:ln/>
+        </p:spPr>
+        <p:txBody>
+          <a:bodyPr wrap="square" lIns="0" tIns="0" rIns="0" bIns="0" rtlCol="0" anchor="ctr"/>
+          <a:lstStyle/>
+          <a:p>
+            <a:pPr indent="0" marL="0">
+              <a:buNone/>
+            </a:pPr>
+            <a:r>
+              <a:rPr lang="en-US" sz="1200" b="1" spc="300" kern="0" dirty="0">
+                <a:solidFill>
+                  <a:srgbClr val="17604C"/>
+                </a:solidFill>
+                <a:latin typeface="Calibri" pitchFamily="34" charset="0"/>
+                <a:ea typeface="Calibri" pitchFamily="34" charset="-122"/>
+                <a:cs typeface="Calibri" pitchFamily="34" charset="-120"/>
+              </a:rPr>
+              <a:t>GÖREV 2 / 5</a:t>
+            </a:r>
+            <a:endParaRPr lang="en-US" sz="1200" dirty="0"/>
+          </a:p>
+        </p:txBody>
+      </p:sp>
+      <p:sp>
+        <p:nvSpPr>
+          <p:cNvPr id="3" name="Text 1"/>
+          <p:cNvSpPr/>
+          <p:nvPr/>
+        </p:nvSpPr>
+        <p:spPr>
+          <a:xfrm>
+            <a:off x="548640" y="658368"/>
+            <a:ext cx="11064240" cy="640080"/>
+          </a:xfrm>
+          <a:prstGeom prst="rect">
+            <a:avLst/>
+          </a:prstGeom>
+          <a:noFill/>
+          <a:ln/>
+        </p:spPr>
+        <p:txBody>
+          <a:bodyPr wrap="square" lIns="0" tIns="0" rIns="0" bIns="0" rtlCol="0" anchor="ctr"/>
+          <a:lstStyle/>
+          <a:p>
+            <a:pPr indent="0" marL="0">
+              <a:buNone/>
+            </a:pPr>
+            <a:r>
+              <a:rPr lang="en-US" sz="3000" b="1" dirty="0">
                 <a:solidFill>
                   <a:srgbClr val="1E2A24"/>
                 </a:solidFill>
@@ -2983,75 +3244,448 @@
                 <a:ea typeface="Cambria" pitchFamily="34" charset="-122"/>
                 <a:cs typeface="Cambria" pitchFamily="34" charset="-120"/>
               </a:rPr>
-              <a:t>Ne Öğrendim · Neyi Farklı Yapardım</a:t>
-            </a:r>
-            <a:endParaRPr lang="en-US" sz="3400" dirty="0"/>
-          </a:p>
-        </p:txBody>
-      </p:sp>
-      <p:sp>
-        <p:nvSpPr>
-          <p:cNvPr id="3" name="Shape 1"/>
-          <p:cNvSpPr/>
-          <p:nvPr/>
-        </p:nvSpPr>
-        <p:spPr>
-          <a:xfrm>
-            <a:off x="548640" y="1417320"/>
-            <a:ext cx="5669280" cy="4846320"/>
+              <a:t>Benchmark — 5 Referans Site</a:t>
+            </a:r>
+            <a:endParaRPr lang="en-US" sz="3000" dirty="0"/>
+          </a:p>
+        </p:txBody>
+      </p:sp>
+      <p:sp>
+        <p:nvSpPr>
+          <p:cNvPr id="4" name="Shape 2"/>
+          <p:cNvSpPr/>
+          <p:nvPr/>
+        </p:nvSpPr>
+        <p:spPr>
+          <a:xfrm>
+            <a:off x="566928" y="1773936"/>
+            <a:ext cx="219456" cy="219456"/>
+          </a:xfrm>
+          <a:prstGeom prst="diamond">
+            <a:avLst/>
+          </a:prstGeom>
+          <a:solidFill>
+            <a:srgbClr val="17604C"/>
+          </a:solidFill>
+          <a:ln/>
+        </p:spPr>
+      </p:sp>
+      <p:sp>
+        <p:nvSpPr>
+          <p:cNvPr id="5" name="Text 3"/>
+          <p:cNvSpPr/>
+          <p:nvPr/>
+        </p:nvSpPr>
+        <p:spPr>
+          <a:xfrm>
+            <a:off x="960120" y="1591056"/>
+            <a:ext cx="6492240" cy="868680"/>
+          </a:xfrm>
+          <a:prstGeom prst="rect">
+            <a:avLst/>
+          </a:prstGeom>
+          <a:noFill/>
+          <a:ln/>
+        </p:spPr>
+        <p:txBody>
+          <a:bodyPr wrap="square" lIns="0" tIns="0" rIns="0" bIns="0" rtlCol="0" anchor="ctr"/>
+          <a:lstStyle/>
+          <a:p>
+            <a:pPr indent="0" marL="0">
+              <a:buNone/>
+            </a:pPr>
+            <a:r>
+              <a:rPr lang="en-US" sz="1450" b="1" dirty="0">
+                <a:solidFill>
+                  <a:srgbClr val="1E2A24"/>
+                </a:solidFill>
+                <a:latin typeface="Calibri" pitchFamily="34" charset="0"/>
+                <a:ea typeface="Calibri" pitchFamily="34" charset="-122"/>
+                <a:cs typeface="Calibri" pitchFamily="34" charset="-120"/>
+              </a:rPr>
+              <a:t>Netcad KEOS</a:t>
+            </a:r>
+            <a:endParaRPr lang="en-US" sz="1450" dirty="0"/>
+          </a:p>
+          <a:p>
+            <a:pPr indent="0" marL="0">
+              <a:buNone/>
+            </a:pPr>
+            <a:r>
+              <a:rPr lang="en-US" sz="1200" dirty="0">
+                <a:solidFill>
+                  <a:srgbClr val="58635A"/>
+                </a:solidFill>
+                <a:latin typeface="Calibri" pitchFamily="34" charset="0"/>
+                <a:ea typeface="Calibri" pitchFamily="34" charset="-122"/>
+                <a:cs typeface="Calibri" pitchFamily="34" charset="-120"/>
+              </a:rPr>
+              <a:t>6'lı özellik kartı düzeni ve SSS yapısı güçlü; uzun metin blokları yorucu</a:t>
+            </a:r>
+            <a:endParaRPr lang="en-US" sz="1450" dirty="0"/>
+          </a:p>
+        </p:txBody>
+      </p:sp>
+      <p:sp>
+        <p:nvSpPr>
+          <p:cNvPr id="6" name="Shape 4"/>
+          <p:cNvSpPr/>
+          <p:nvPr/>
+        </p:nvSpPr>
+        <p:spPr>
+          <a:xfrm>
+            <a:off x="566928" y="2670048"/>
+            <a:ext cx="219456" cy="219456"/>
+          </a:xfrm>
+          <a:prstGeom prst="diamond">
+            <a:avLst/>
+          </a:prstGeom>
+          <a:solidFill>
+            <a:srgbClr val="35C4B5"/>
+          </a:solidFill>
+          <a:ln/>
+        </p:spPr>
+      </p:sp>
+      <p:sp>
+        <p:nvSpPr>
+          <p:cNvPr id="7" name="Text 5"/>
+          <p:cNvSpPr/>
+          <p:nvPr/>
+        </p:nvSpPr>
+        <p:spPr>
+          <a:xfrm>
+            <a:off x="960120" y="2487168"/>
+            <a:ext cx="6492240" cy="868680"/>
+          </a:xfrm>
+          <a:prstGeom prst="rect">
+            <a:avLst/>
+          </a:prstGeom>
+          <a:noFill/>
+          <a:ln/>
+        </p:spPr>
+        <p:txBody>
+          <a:bodyPr wrap="square" lIns="0" tIns="0" rIns="0" bIns="0" rtlCol="0" anchor="ctr"/>
+          <a:lstStyle/>
+          <a:p>
+            <a:pPr indent="0" marL="0">
+              <a:buNone/>
+            </a:pPr>
+            <a:r>
+              <a:rPr lang="en-US" sz="1450" b="1" dirty="0">
+                <a:solidFill>
+                  <a:srgbClr val="1E2A24"/>
+                </a:solidFill>
+                <a:latin typeface="Calibri" pitchFamily="34" charset="0"/>
+                <a:ea typeface="Calibri" pitchFamily="34" charset="-122"/>
+                <a:cs typeface="Calibri" pitchFamily="34" charset="-120"/>
+              </a:rPr>
+              <a:t>Mapbox</a:t>
+            </a:r>
+            <a:endParaRPr lang="en-US" sz="1450" dirty="0"/>
+          </a:p>
+          <a:p>
+            <a:pPr indent="0" marL="0">
+              <a:buNone/>
+            </a:pPr>
+            <a:r>
+              <a:rPr lang="en-US" sz="1200" dirty="0">
+                <a:solidFill>
+                  <a:srgbClr val="58635A"/>
+                </a:solidFill>
+                <a:latin typeface="Calibri" pitchFamily="34" charset="0"/>
+                <a:ea typeface="Calibri" pitchFamily="34" charset="-122"/>
+                <a:cs typeface="Calibri" pitchFamily="34" charset="-120"/>
+              </a:rPr>
+              <a:t>En güçlü görsel haritanın kendisi — hero'da harita göstermek işe yarıyor</a:t>
+            </a:r>
+            <a:endParaRPr lang="en-US" sz="1450" dirty="0"/>
+          </a:p>
+        </p:txBody>
+      </p:sp>
+      <p:sp>
+        <p:nvSpPr>
+          <p:cNvPr id="8" name="Shape 6"/>
+          <p:cNvSpPr/>
+          <p:nvPr/>
+        </p:nvSpPr>
+        <p:spPr>
+          <a:xfrm>
+            <a:off x="566928" y="3566160"/>
+            <a:ext cx="219456" cy="219456"/>
+          </a:xfrm>
+          <a:prstGeom prst="diamond">
+            <a:avLst/>
+          </a:prstGeom>
+          <a:solidFill>
+            <a:srgbClr val="F0A93F"/>
+          </a:solidFill>
+          <a:ln/>
+        </p:spPr>
+      </p:sp>
+      <p:sp>
+        <p:nvSpPr>
+          <p:cNvPr id="9" name="Text 7"/>
+          <p:cNvSpPr/>
+          <p:nvPr/>
+        </p:nvSpPr>
+        <p:spPr>
+          <a:xfrm>
+            <a:off x="960120" y="3383280"/>
+            <a:ext cx="6492240" cy="868680"/>
+          </a:xfrm>
+          <a:prstGeom prst="rect">
+            <a:avLst/>
+          </a:prstGeom>
+          <a:noFill/>
+          <a:ln/>
+        </p:spPr>
+        <p:txBody>
+          <a:bodyPr wrap="square" lIns="0" tIns="0" rIns="0" bIns="0" rtlCol="0" anchor="ctr"/>
+          <a:lstStyle/>
+          <a:p>
+            <a:pPr indent="0" marL="0">
+              <a:buNone/>
+            </a:pPr>
+            <a:r>
+              <a:rPr lang="en-US" sz="1450" b="1" dirty="0">
+                <a:solidFill>
+                  <a:srgbClr val="1E2A24"/>
+                </a:solidFill>
+                <a:latin typeface="Calibri" pitchFamily="34" charset="0"/>
+                <a:ea typeface="Calibri" pitchFamily="34" charset="-122"/>
+                <a:cs typeface="Calibri" pitchFamily="34" charset="-120"/>
+              </a:rPr>
+              <a:t>Felt</a:t>
+            </a:r>
+            <a:endParaRPr lang="en-US" sz="1450" dirty="0"/>
+          </a:p>
+          <a:p>
+            <a:pPr indent="0" marL="0">
+              <a:buNone/>
+            </a:pPr>
+            <a:r>
+              <a:rPr lang="en-US" sz="1200" dirty="0">
+                <a:solidFill>
+                  <a:srgbClr val="58635A"/>
+                </a:solidFill>
+                <a:latin typeface="Calibri" pitchFamily="34" charset="0"/>
+                <a:ea typeface="Calibri" pitchFamily="34" charset="-122"/>
+                <a:cs typeface="Calibri" pitchFamily="34" charset="-120"/>
+              </a:rPr>
+              <a:t>"Veri sahipliği &amp; güvenlik" ayrı bölüm olarak işlenmiş — bizim 4. mesajla aynı akıl</a:t>
+            </a:r>
+            <a:endParaRPr lang="en-US" sz="1450" dirty="0"/>
+          </a:p>
+        </p:txBody>
+      </p:sp>
+      <p:sp>
+        <p:nvSpPr>
+          <p:cNvPr id="10" name="Shape 8"/>
+          <p:cNvSpPr/>
+          <p:nvPr/>
+        </p:nvSpPr>
+        <p:spPr>
+          <a:xfrm>
+            <a:off x="566928" y="4462272"/>
+            <a:ext cx="219456" cy="219456"/>
+          </a:xfrm>
+          <a:prstGeom prst="diamond">
+            <a:avLst/>
+          </a:prstGeom>
+          <a:solidFill>
+            <a:srgbClr val="17604C"/>
+          </a:solidFill>
+          <a:ln/>
+        </p:spPr>
+      </p:sp>
+      <p:sp>
+        <p:nvSpPr>
+          <p:cNvPr id="11" name="Text 9"/>
+          <p:cNvSpPr/>
+          <p:nvPr/>
+        </p:nvSpPr>
+        <p:spPr>
+          <a:xfrm>
+            <a:off x="960120" y="4279392"/>
+            <a:ext cx="6492240" cy="868680"/>
+          </a:xfrm>
+          <a:prstGeom prst="rect">
+            <a:avLst/>
+          </a:prstGeom>
+          <a:noFill/>
+          <a:ln/>
+        </p:spPr>
+        <p:txBody>
+          <a:bodyPr wrap="square" lIns="0" tIns="0" rIns="0" bIns="0" rtlCol="0" anchor="ctr"/>
+          <a:lstStyle/>
+          <a:p>
+            <a:pPr indent="0" marL="0">
+              <a:buNone/>
+            </a:pPr>
+            <a:r>
+              <a:rPr lang="en-US" sz="1450" b="1" dirty="0">
+                <a:solidFill>
+                  <a:srgbClr val="1E2A24"/>
+                </a:solidFill>
+                <a:latin typeface="Calibri" pitchFamily="34" charset="0"/>
+                <a:ea typeface="Calibri" pitchFamily="34" charset="-122"/>
+                <a:cs typeface="Calibri" pitchFamily="34" charset="-120"/>
+              </a:rPr>
+              <a:t>Altındağ KBS</a:t>
+            </a:r>
+            <a:endParaRPr lang="en-US" sz="1450" dirty="0"/>
+          </a:p>
+          <a:p>
+            <a:pPr indent="0" marL="0">
+              <a:buNone/>
+            </a:pPr>
+            <a:r>
+              <a:rPr lang="en-US" sz="1200" dirty="0">
+                <a:solidFill>
+                  <a:srgbClr val="58635A"/>
+                </a:solidFill>
+                <a:latin typeface="Calibri" pitchFamily="34" charset="0"/>
+                <a:ea typeface="Calibri" pitchFamily="34" charset="-122"/>
+                <a:cs typeface="Calibri" pitchFamily="34" charset="-120"/>
+              </a:rPr>
+              <a:t>Ziyaretçiye hiçbir açıklama yok, direkt login — tanıtım vitrini ihtiyacının kanıtı</a:t>
+            </a:r>
+            <a:endParaRPr lang="en-US" sz="1450" dirty="0"/>
+          </a:p>
+        </p:txBody>
+      </p:sp>
+      <p:sp>
+        <p:nvSpPr>
+          <p:cNvPr id="12" name="Shape 10"/>
+          <p:cNvSpPr/>
+          <p:nvPr/>
+        </p:nvSpPr>
+        <p:spPr>
+          <a:xfrm>
+            <a:off x="566928" y="5358384"/>
+            <a:ext cx="219456" cy="219456"/>
+          </a:xfrm>
+          <a:prstGeom prst="diamond">
+            <a:avLst/>
+          </a:prstGeom>
+          <a:solidFill>
+            <a:srgbClr val="35C4B5"/>
+          </a:solidFill>
+          <a:ln/>
+        </p:spPr>
+      </p:sp>
+      <p:sp>
+        <p:nvSpPr>
+          <p:cNvPr id="13" name="Text 11"/>
+          <p:cNvSpPr/>
+          <p:nvPr/>
+        </p:nvSpPr>
+        <p:spPr>
+          <a:xfrm>
+            <a:off x="960120" y="5175504"/>
+            <a:ext cx="6492240" cy="868680"/>
+          </a:xfrm>
+          <a:prstGeom prst="rect">
+            <a:avLst/>
+          </a:prstGeom>
+          <a:noFill/>
+          <a:ln/>
+        </p:spPr>
+        <p:txBody>
+          <a:bodyPr wrap="square" lIns="0" tIns="0" rIns="0" bIns="0" rtlCol="0" anchor="ctr"/>
+          <a:lstStyle/>
+          <a:p>
+            <a:pPr indent="0" marL="0">
+              <a:buNone/>
+            </a:pPr>
+            <a:r>
+              <a:rPr lang="en-US" sz="1450" b="1" dirty="0">
+                <a:solidFill>
+                  <a:srgbClr val="1E2A24"/>
+                </a:solidFill>
+                <a:latin typeface="Calibri" pitchFamily="34" charset="0"/>
+                <a:ea typeface="Calibri" pitchFamily="34" charset="-122"/>
+                <a:cs typeface="Calibri" pitchFamily="34" charset="-120"/>
+              </a:rPr>
+              <a:t>Konya KBS</a:t>
+            </a:r>
+            <a:endParaRPr lang="en-US" sz="1450" dirty="0"/>
+          </a:p>
+          <a:p>
+            <a:pPr indent="0" marL="0">
+              <a:buNone/>
+            </a:pPr>
+            <a:r>
+              <a:rPr lang="en-US" sz="1200" dirty="0">
+                <a:solidFill>
+                  <a:srgbClr val="58635A"/>
+                </a:solidFill>
+                <a:latin typeface="Calibri" pitchFamily="34" charset="0"/>
+                <a:ea typeface="Calibri" pitchFamily="34" charset="-122"/>
+                <a:cs typeface="Calibri" pitchFamily="34" charset="-120"/>
+              </a:rPr>
+              <a:t>İçerik tamamen JS'le yükleniyor; arama motoru boş sayfa görüyor</a:t>
+            </a:r>
+            <a:endParaRPr lang="en-US" sz="1450" dirty="0"/>
+          </a:p>
+        </p:txBody>
+      </p:sp>
+      <p:sp>
+        <p:nvSpPr>
+          <p:cNvPr id="14" name="Shape 12"/>
+          <p:cNvSpPr/>
+          <p:nvPr/>
+        </p:nvSpPr>
+        <p:spPr>
+          <a:xfrm>
+            <a:off x="7863840" y="1645920"/>
+            <a:ext cx="3749040" cy="4434840"/>
           </a:xfrm>
           <a:prstGeom prst="roundRect">
             <a:avLst>
-              <a:gd name="adj" fmla="val 2264"/>
+              <a:gd name="adj" fmla="val 2927"/>
             </a:avLst>
           </a:prstGeom>
           <a:solidFill>
-            <a:srgbClr val="FFFFFF"/>
-          </a:solidFill>
-          <a:ln/>
-          <a:effectLst>
-            <a:outerShdw sx="100000" sy="100000" kx="0" ky="0" algn="bl" rotWithShape="0" blurRad="101600" dist="38100" dir="5400000">
-              <a:srgbClr val="1E2A24">
-                <a:alpha val="12000"/>
-              </a:srgbClr>
-            </a:outerShdw>
-          </a:effectLst>
-        </p:spPr>
-      </p:sp>
-      <p:sp>
-        <p:nvSpPr>
-          <p:cNvPr id="4" name="Text 2"/>
-          <p:cNvSpPr/>
-          <p:nvPr/>
-        </p:nvSpPr>
-        <p:spPr>
-          <a:xfrm>
-            <a:off x="914400" y="1737360"/>
-            <a:ext cx="4937760" cy="320040"/>
-          </a:xfrm>
-          <a:prstGeom prst="rect">
-            <a:avLst/>
-          </a:prstGeom>
-          <a:noFill/>
-          <a:ln/>
-        </p:spPr>
-        <p:txBody>
-          <a:bodyPr wrap="square" lIns="0" tIns="0" rIns="0" bIns="0" rtlCol="0" anchor="ctr"/>
-          <a:lstStyle/>
-          <a:p>
-            <a:pPr indent="0" marL="0">
-              <a:buNone/>
-            </a:pPr>
-            <a:r>
-              <a:rPr lang="en-US" sz="1200" b="1" spc="300" kern="0" dirty="0">
-                <a:solidFill>
-                  <a:srgbClr val="17604C"/>
-                </a:solidFill>
-                <a:latin typeface="Calibri" pitchFamily="34" charset="0"/>
-                <a:ea typeface="Calibri" pitchFamily="34" charset="-122"/>
-                <a:cs typeface="Calibri" pitchFamily="34" charset="-120"/>
-              </a:rPr>
-              <a:t>NE ÖĞRENDİM</a:t>
+            <a:srgbClr val="10201B"/>
+          </a:solidFill>
+          <a:ln/>
+        </p:spPr>
+      </p:sp>
+      <p:sp>
+        <p:nvSpPr>
+          <p:cNvPr id="15" name="Text 13"/>
+          <p:cNvSpPr/>
+          <p:nvPr/>
+        </p:nvSpPr>
+        <p:spPr>
+          <a:xfrm>
+            <a:off x="8183880" y="1965960"/>
+            <a:ext cx="3108960" cy="320040"/>
+          </a:xfrm>
+          <a:prstGeom prst="rect">
+            <a:avLst/>
+          </a:prstGeom>
+          <a:noFill/>
+          <a:ln/>
+        </p:spPr>
+        <p:txBody>
+          <a:bodyPr wrap="square" lIns="0" tIns="0" rIns="0" bIns="0" rtlCol="0" anchor="ctr"/>
+          <a:lstStyle/>
+          <a:p>
+            <a:pPr indent="0" marL="0">
+              <a:buNone/>
+            </a:pPr>
+            <a:r>
+              <a:rPr lang="en-US" sz="1200" b="1" spc="200" kern="0" dirty="0">
+                <a:solidFill>
+                  <a:srgbClr val="F0A93F"/>
+                </a:solidFill>
+                <a:latin typeface="Calibri" pitchFamily="34" charset="0"/>
+                <a:ea typeface="Calibri" pitchFamily="34" charset="-122"/>
+                <a:cs typeface="Calibri" pitchFamily="34" charset="-120"/>
+              </a:rPr>
+              <a:t>KARARLARA ETKİSİ</a:t>
             </a:r>
             <a:endParaRPr lang="en-US" sz="1200" dirty="0"/>
           </a:p>
@@ -3059,434 +3693,34 @@
       </p:sp>
       <p:sp>
         <p:nvSpPr>
-          <p:cNvPr id="5" name="Shape 3"/>
-          <p:cNvSpPr/>
-          <p:nvPr/>
-        </p:nvSpPr>
-        <p:spPr>
-          <a:xfrm>
-            <a:off x="914400" y="2286000"/>
-            <a:ext cx="201168" cy="201168"/>
-          </a:xfrm>
-          <a:prstGeom prst="diamond">
-            <a:avLst/>
-          </a:prstGeom>
-          <a:solidFill>
-            <a:srgbClr val="35C4B5"/>
-          </a:solidFill>
-          <a:ln/>
-        </p:spPr>
-      </p:sp>
-      <p:sp>
-        <p:nvSpPr>
-          <p:cNvPr id="6" name="Text 4"/>
-          <p:cNvSpPr/>
-          <p:nvPr/>
-        </p:nvSpPr>
-        <p:spPr>
-          <a:xfrm>
-            <a:off x="1280160" y="2103120"/>
-            <a:ext cx="4663440" cy="960120"/>
-          </a:xfrm>
-          <a:prstGeom prst="rect">
-            <a:avLst/>
-          </a:prstGeom>
-          <a:noFill/>
-          <a:ln/>
-        </p:spPr>
-        <p:txBody>
-          <a:bodyPr wrap="square" lIns="0" tIns="0" rIns="0" bIns="0" rtlCol="0" anchor="ctr"/>
-          <a:lstStyle/>
-          <a:p>
-            <a:pPr indent="0" marL="0">
-              <a:buNone/>
-            </a:pPr>
-            <a:r>
-              <a:rPr lang="en-US" sz="1400" b="1" dirty="0">
-                <a:solidFill>
-                  <a:srgbClr val="1E2A24"/>
-                </a:solidFill>
-                <a:latin typeface="Calibri" pitchFamily="34" charset="0"/>
-                <a:ea typeface="Calibri" pitchFamily="34" charset="-122"/>
-                <a:cs typeface="Calibri" pitchFamily="34" charset="-120"/>
-              </a:rPr>
-              <a:t>TUCBS</a:t>
-            </a:r>
-            <a:endParaRPr lang="en-US" sz="1400" dirty="0"/>
-          </a:p>
-          <a:p>
-            <a:pPr indent="0" marL="0">
-              <a:buNone/>
-            </a:pPr>
-            <a:r>
-              <a:rPr lang="en-US" sz="1150" dirty="0">
-                <a:solidFill>
-                  <a:srgbClr val="58635A"/>
-                </a:solidFill>
-                <a:latin typeface="Calibri" pitchFamily="34" charset="0"/>
-                <a:ea typeface="Calibri" pitchFamily="34" charset="-122"/>
-                <a:cs typeface="Calibri" pitchFamily="34" charset="-120"/>
-              </a:rPr>
-              <a:t>Ulusal coğrafi veri standardı; 32 veri teması var — "uyumluluk" mesajımızın dayanağı</a:t>
-            </a:r>
-            <a:endParaRPr lang="en-US" sz="1400" dirty="0"/>
-          </a:p>
-        </p:txBody>
-      </p:sp>
-      <p:sp>
-        <p:nvSpPr>
-          <p:cNvPr id="7" name="Shape 5"/>
-          <p:cNvSpPr/>
-          <p:nvPr/>
-        </p:nvSpPr>
-        <p:spPr>
-          <a:xfrm>
-            <a:off x="914400" y="3273552"/>
-            <a:ext cx="201168" cy="201168"/>
-          </a:xfrm>
-          <a:prstGeom prst="diamond">
-            <a:avLst/>
-          </a:prstGeom>
-          <a:solidFill>
-            <a:srgbClr val="35C4B5"/>
-          </a:solidFill>
-          <a:ln/>
-        </p:spPr>
-      </p:sp>
-      <p:sp>
-        <p:nvSpPr>
-          <p:cNvPr id="8" name="Text 6"/>
-          <p:cNvSpPr/>
-          <p:nvPr/>
-        </p:nvSpPr>
-        <p:spPr>
-          <a:xfrm>
-            <a:off x="1280160" y="3090672"/>
-            <a:ext cx="4663440" cy="960120"/>
-          </a:xfrm>
-          <a:prstGeom prst="rect">
-            <a:avLst/>
-          </a:prstGeom>
-          <a:noFill/>
-          <a:ln/>
-        </p:spPr>
-        <p:txBody>
-          <a:bodyPr wrap="square" lIns="0" tIns="0" rIns="0" bIns="0" rtlCol="0" anchor="ctr"/>
-          <a:lstStyle/>
-          <a:p>
-            <a:pPr indent="0" marL="0">
-              <a:buNone/>
-            </a:pPr>
-            <a:r>
-              <a:rPr lang="en-US" sz="1400" b="1" dirty="0">
-                <a:solidFill>
-                  <a:srgbClr val="1E2A24"/>
-                </a:solidFill>
-                <a:latin typeface="Calibri" pitchFamily="34" charset="0"/>
-                <a:ea typeface="Calibri" pitchFamily="34" charset="-122"/>
-                <a:cs typeface="Calibri" pitchFamily="34" charset="-120"/>
-              </a:rPr>
-              <a:t>Vektör karo (MVT)</a:t>
-            </a:r>
-            <a:endParaRPr lang="en-US" sz="1400" dirty="0"/>
-          </a:p>
-          <a:p>
-            <a:pPr indent="0" marL="0">
-              <a:buNone/>
-            </a:pPr>
-            <a:r>
-              <a:rPr lang="en-US" sz="1150" dirty="0">
-                <a:solidFill>
-                  <a:srgbClr val="58635A"/>
-                </a:solidFill>
-                <a:latin typeface="Calibri" pitchFamily="34" charset="0"/>
-                <a:ea typeface="Calibri" pitchFamily="34" charset="-122"/>
-                <a:cs typeface="Calibri" pitchFamily="34" charset="-120"/>
-              </a:rPr>
-              <a:t>Raster karodan 5–10× küçük; çizim tarayıcıda — "hızlı harita" iddiası ölçülebilir</a:t>
-            </a:r>
-            <a:endParaRPr lang="en-US" sz="1400" dirty="0"/>
-          </a:p>
-        </p:txBody>
-      </p:sp>
-      <p:sp>
-        <p:nvSpPr>
-          <p:cNvPr id="9" name="Shape 7"/>
-          <p:cNvSpPr/>
-          <p:nvPr/>
-        </p:nvSpPr>
-        <p:spPr>
-          <a:xfrm>
-            <a:off x="914400" y="4261104"/>
-            <a:ext cx="201168" cy="201168"/>
-          </a:xfrm>
-          <a:prstGeom prst="diamond">
-            <a:avLst/>
-          </a:prstGeom>
-          <a:solidFill>
-            <a:srgbClr val="35C4B5"/>
-          </a:solidFill>
-          <a:ln/>
-        </p:spPr>
-      </p:sp>
-      <p:sp>
-        <p:nvSpPr>
-          <p:cNvPr id="10" name="Text 8"/>
-          <p:cNvSpPr/>
-          <p:nvPr/>
-        </p:nvSpPr>
-        <p:spPr>
-          <a:xfrm>
-            <a:off x="1280160" y="4078224"/>
-            <a:ext cx="4663440" cy="960120"/>
-          </a:xfrm>
-          <a:prstGeom prst="rect">
-            <a:avLst/>
-          </a:prstGeom>
-          <a:noFill/>
-          <a:ln/>
-        </p:spPr>
-        <p:txBody>
-          <a:bodyPr wrap="square" lIns="0" tIns="0" rIns="0" bIns="0" rtlCol="0" anchor="ctr"/>
-          <a:lstStyle/>
-          <a:p>
-            <a:pPr indent="0" marL="0">
-              <a:buNone/>
-            </a:pPr>
-            <a:r>
-              <a:rPr lang="en-US" sz="1400" b="1" dirty="0">
-                <a:solidFill>
-                  <a:srgbClr val="1E2A24"/>
-                </a:solidFill>
-                <a:latin typeface="Calibri" pitchFamily="34" charset="0"/>
-                <a:ea typeface="Calibri" pitchFamily="34" charset="-122"/>
-                <a:cs typeface="Calibri" pitchFamily="34" charset="-120"/>
-              </a:rPr>
-              <a:t>Metaveri &amp; lineage</a:t>
-            </a:r>
-            <a:endParaRPr lang="en-US" sz="1400" dirty="0"/>
-          </a:p>
-          <a:p>
-            <a:pPr indent="0" marL="0">
-              <a:buNone/>
-            </a:pPr>
-            <a:r>
-              <a:rPr lang="en-US" sz="1150" dirty="0">
-                <a:solidFill>
-                  <a:srgbClr val="58635A"/>
-                </a:solidFill>
-                <a:latin typeface="Calibri" pitchFamily="34" charset="0"/>
-                <a:ea typeface="Calibri" pitchFamily="34" charset="-122"/>
-                <a:cs typeface="Calibri" pitchFamily="34" charset="-120"/>
-              </a:rPr>
-              <a:t>"Veri nereden geldi" sorusunun teknik karşılığı — veri kalitesi mesajının temeli</a:t>
-            </a:r>
-            <a:endParaRPr lang="en-US" sz="1400" dirty="0"/>
-          </a:p>
-        </p:txBody>
-      </p:sp>
-      <p:sp>
-        <p:nvSpPr>
-          <p:cNvPr id="11" name="Shape 9"/>
-          <p:cNvSpPr/>
-          <p:nvPr/>
-        </p:nvSpPr>
-        <p:spPr>
-          <a:xfrm>
-            <a:off x="914400" y="5248656"/>
-            <a:ext cx="201168" cy="201168"/>
-          </a:xfrm>
-          <a:prstGeom prst="diamond">
-            <a:avLst/>
-          </a:prstGeom>
-          <a:solidFill>
-            <a:srgbClr val="35C4B5"/>
-          </a:solidFill>
-          <a:ln/>
-        </p:spPr>
-      </p:sp>
-      <p:sp>
-        <p:nvSpPr>
-          <p:cNvPr id="12" name="Text 10"/>
-          <p:cNvSpPr/>
-          <p:nvPr/>
-        </p:nvSpPr>
-        <p:spPr>
-          <a:xfrm>
-            <a:off x="1280160" y="5065776"/>
-            <a:ext cx="4663440" cy="960120"/>
-          </a:xfrm>
-          <a:prstGeom prst="rect">
-            <a:avLst/>
-          </a:prstGeom>
-          <a:noFill/>
-          <a:ln/>
-        </p:spPr>
-        <p:txBody>
-          <a:bodyPr wrap="square" lIns="0" tIns="0" rIns="0" bIns="0" rtlCol="0" anchor="ctr"/>
-          <a:lstStyle/>
-          <a:p>
-            <a:pPr indent="0" marL="0">
-              <a:buNone/>
-            </a:pPr>
-            <a:r>
-              <a:rPr lang="en-US" sz="1400" b="1" dirty="0">
-                <a:solidFill>
-                  <a:srgbClr val="1E2A24"/>
-                </a:solidFill>
-                <a:latin typeface="Calibri" pitchFamily="34" charset="0"/>
-                <a:ea typeface="Calibri" pitchFamily="34" charset="-122"/>
-                <a:cs typeface="Calibri" pitchFamily="34" charset="-120"/>
-              </a:rPr>
-              <a:t>Benchmark dersi</a:t>
-            </a:r>
-            <a:endParaRPr lang="en-US" sz="1400" dirty="0"/>
-          </a:p>
-          <a:p>
-            <a:pPr indent="0" marL="0">
-              <a:buNone/>
-            </a:pPr>
-            <a:r>
-              <a:rPr lang="en-US" sz="1150" dirty="0">
-                <a:solidFill>
-                  <a:srgbClr val="58635A"/>
-                </a:solidFill>
-                <a:latin typeface="Calibri" pitchFamily="34" charset="0"/>
-                <a:ea typeface="Calibri" pitchFamily="34" charset="-122"/>
-                <a:cs typeface="Calibri" pitchFamily="34" charset="-120"/>
-              </a:rPr>
-              <a:t>İçeriği JS'e gömülü KBS siteleri arama motoruna görünmüyor — statik HTML kararı doğru</a:t>
-            </a:r>
-            <a:endParaRPr lang="en-US" sz="1400" dirty="0"/>
-          </a:p>
-        </p:txBody>
-      </p:sp>
-      <p:sp>
-        <p:nvSpPr>
-          <p:cNvPr id="13" name="Shape 11"/>
-          <p:cNvSpPr/>
-          <p:nvPr/>
-        </p:nvSpPr>
-        <p:spPr>
-          <a:xfrm>
-            <a:off x="6492240" y="1417320"/>
-            <a:ext cx="5120640" cy="4846320"/>
-          </a:xfrm>
-          <a:prstGeom prst="roundRect">
-            <a:avLst>
-              <a:gd name="adj" fmla="val 2264"/>
-            </a:avLst>
-          </a:prstGeom>
-          <a:solidFill>
-            <a:srgbClr val="10201B"/>
-          </a:solidFill>
-          <a:ln/>
-        </p:spPr>
-      </p:sp>
-      <p:sp>
-        <p:nvSpPr>
-          <p:cNvPr id="14" name="Text 12"/>
-          <p:cNvSpPr/>
-          <p:nvPr/>
-        </p:nvSpPr>
-        <p:spPr>
-          <a:xfrm>
-            <a:off x="6858000" y="1737360"/>
-            <a:ext cx="4389120" cy="320040"/>
-          </a:xfrm>
-          <a:prstGeom prst="rect">
-            <a:avLst/>
-          </a:prstGeom>
-          <a:noFill/>
-          <a:ln/>
-        </p:spPr>
-        <p:txBody>
-          <a:bodyPr wrap="square" lIns="0" tIns="0" rIns="0" bIns="0" rtlCol="0" anchor="ctr"/>
-          <a:lstStyle/>
-          <a:p>
-            <a:pPr indent="0" marL="0">
-              <a:buNone/>
-            </a:pPr>
-            <a:r>
-              <a:rPr lang="en-US" sz="1200" b="1" spc="300" kern="0" dirty="0">
-                <a:solidFill>
-                  <a:srgbClr val="F0A93F"/>
-                </a:solidFill>
-                <a:latin typeface="Calibri" pitchFamily="34" charset="0"/>
-                <a:ea typeface="Calibri" pitchFamily="34" charset="-122"/>
-                <a:cs typeface="Calibri" pitchFamily="34" charset="-120"/>
-              </a:rPr>
-              <a:t>NEYİ FARKLI YAPARDIM</a:t>
-            </a:r>
-            <a:endParaRPr lang="en-US" sz="1200" dirty="0"/>
-          </a:p>
-        </p:txBody>
-      </p:sp>
-      <p:sp>
-        <p:nvSpPr>
-          <p:cNvPr id="15" name="Text 13"/>
-          <p:cNvSpPr/>
-          <p:nvPr/>
-        </p:nvSpPr>
-        <p:spPr>
-          <a:xfrm>
-            <a:off x="6858000" y="2194560"/>
-            <a:ext cx="457200" cy="548640"/>
-          </a:xfrm>
-          <a:prstGeom prst="rect">
-            <a:avLst/>
-          </a:prstGeom>
-          <a:noFill/>
-          <a:ln/>
-        </p:spPr>
-        <p:txBody>
-          <a:bodyPr wrap="square" lIns="0" tIns="0" rIns="0" bIns="0" rtlCol="0" anchor="ctr"/>
-          <a:lstStyle/>
-          <a:p>
-            <a:pPr indent="0" marL="0">
-              <a:buNone/>
-            </a:pPr>
-            <a:r>
-              <a:rPr lang="en-US" sz="2600" b="1" dirty="0">
-                <a:solidFill>
-                  <a:srgbClr val="F0A93F"/>
-                </a:solidFill>
-                <a:latin typeface="Cambria" pitchFamily="34" charset="0"/>
-                <a:ea typeface="Cambria" pitchFamily="34" charset="-122"/>
-                <a:cs typeface="Cambria" pitchFamily="34" charset="-120"/>
-              </a:rPr>
-              <a:t>1</a:t>
-            </a:r>
-            <a:endParaRPr lang="en-US" sz="2600" dirty="0"/>
-          </a:p>
-        </p:txBody>
-      </p:sp>
-      <p:sp>
-        <p:nvSpPr>
           <p:cNvPr id="16" name="Text 14"/>
           <p:cNvSpPr/>
           <p:nvPr/>
         </p:nvSpPr>
         <p:spPr>
           <a:xfrm>
-            <a:off x="7452360" y="2148840"/>
-            <a:ext cx="3931920" cy="1234440"/>
-          </a:xfrm>
-          <a:prstGeom prst="rect">
-            <a:avLst/>
-          </a:prstGeom>
-          <a:noFill/>
-          <a:ln/>
-        </p:spPr>
-        <p:txBody>
-          <a:bodyPr wrap="square" lIns="0" tIns="0" rIns="0" bIns="0" rtlCol="0" anchor="ctr"/>
-          <a:lstStyle/>
-          <a:p>
-            <a:pPr indent="0" marL="0">
-              <a:buNone/>
-            </a:pPr>
-            <a:r>
-              <a:rPr lang="en-US" sz="1400" b="1" dirty="0">
+            <a:off x="8183880" y="2377440"/>
+            <a:ext cx="3154680" cy="3566160"/>
+          </a:xfrm>
+          <a:prstGeom prst="rect">
+            <a:avLst/>
+          </a:prstGeom>
+          <a:noFill/>
+          <a:ln/>
+        </p:spPr>
+        <p:txBody>
+          <a:bodyPr wrap="square" lIns="0" tIns="0" rIns="0" bIns="0" rtlCol="0" anchor="t"/>
+          <a:lstStyle/>
+          <a:p>
+            <a:pPr marL="342900" indent="-342900">
+              <a:spcAft>
+                <a:spcPts val="1000"/>
+              </a:spcAft>
+              <a:buSzPct val="100000"/>
+              <a:buChar char="•"/>
+            </a:pPr>
+            <a:r>
+              <a:rPr lang="en-US" sz="1250" dirty="0">
                 <a:solidFill>
                   <a:srgbClr val="EAF3EE"/>
                 </a:solidFill>
@@ -3494,94 +3728,20 @@
                 <a:ea typeface="Calibri" pitchFamily="34" charset="-122"/>
                 <a:cs typeface="Calibri" pitchFamily="34" charset="-120"/>
               </a:rPr>
-              <a:t>Depoyu ilk iş kurmak</a:t>
-            </a:r>
-            <a:endParaRPr lang="en-US" sz="1400" dirty="0"/>
-          </a:p>
-          <a:p>
-            <a:pPr indent="0" marL="0">
-              <a:buNone/>
-            </a:pPr>
-            <a:r>
-              <a:rPr lang="en-US" sz="1150" dirty="0">
-                <a:solidFill>
-                  <a:srgbClr val="9CB2A8"/>
-                </a:solidFill>
-                <a:latin typeface="Calibri" pitchFamily="34" charset="0"/>
-                <a:ea typeface="Calibri" pitchFamily="34" charset="-122"/>
-                <a:cs typeface="Calibri" pitchFamily="34" charset="-120"/>
-              </a:rPr>
-              <a:t>GitHub bağlantısı sona kaldı; birleştirme çakışmasıyla uğraştım. Önce iskelet, sonra üretim.</a:t>
-            </a:r>
-            <a:endParaRPr lang="en-US" sz="1400" dirty="0"/>
-          </a:p>
-        </p:txBody>
-      </p:sp>
-      <p:sp>
-        <p:nvSpPr>
-          <p:cNvPr id="17" name="Text 15"/>
-          <p:cNvSpPr/>
-          <p:nvPr/>
-        </p:nvSpPr>
-        <p:spPr>
-          <a:xfrm>
-            <a:off x="6858000" y="3474720"/>
-            <a:ext cx="457200" cy="548640"/>
-          </a:xfrm>
-          <a:prstGeom prst="rect">
-            <a:avLst/>
-          </a:prstGeom>
-          <a:noFill/>
-          <a:ln/>
-        </p:spPr>
-        <p:txBody>
-          <a:bodyPr wrap="square" lIns="0" tIns="0" rIns="0" bIns="0" rtlCol="0" anchor="ctr"/>
-          <a:lstStyle/>
-          <a:p>
-            <a:pPr indent="0" marL="0">
-              <a:buNone/>
-            </a:pPr>
-            <a:r>
-              <a:rPr lang="en-US" sz="2600" b="1" dirty="0">
-                <a:solidFill>
-                  <a:srgbClr val="F0A93F"/>
-                </a:solidFill>
-                <a:latin typeface="Cambria" pitchFamily="34" charset="0"/>
-                <a:ea typeface="Cambria" pitchFamily="34" charset="-122"/>
-                <a:cs typeface="Cambria" pitchFamily="34" charset="-120"/>
-              </a:rPr>
-              <a:t>2</a:t>
-            </a:r>
-            <a:endParaRPr lang="en-US" sz="2600" dirty="0"/>
-          </a:p>
-        </p:txBody>
-      </p:sp>
-      <p:sp>
-        <p:nvSpPr>
-          <p:cNvPr id="18" name="Text 16"/>
-          <p:cNvSpPr/>
-          <p:nvPr/>
-        </p:nvSpPr>
-        <p:spPr>
-          <a:xfrm>
-            <a:off x="7452360" y="3429000"/>
-            <a:ext cx="3931920" cy="1234440"/>
-          </a:xfrm>
-          <a:prstGeom prst="rect">
-            <a:avLst/>
-          </a:prstGeom>
-          <a:noFill/>
-          <a:ln/>
-        </p:spPr>
-        <p:txBody>
-          <a:bodyPr wrap="square" lIns="0" tIns="0" rIns="0" bIns="0" rtlCol="0" anchor="ctr"/>
-          <a:lstStyle/>
-          <a:p>
-            <a:pPr indent="0" marL="0">
-              <a:buNone/>
-            </a:pPr>
-            <a:r>
-              <a:rPr lang="en-US" sz="1400" b="1" dirty="0">
+              <a:t>Ana sayfa 6 mesaj kartı ızgarası olacak</a:t>
+            </a:r>
+            <a:endParaRPr lang="en-US" sz="1250" dirty="0"/>
+          </a:p>
+          <a:p>
+            <a:pPr marL="342900" indent="-342900">
+              <a:spcAft>
+                <a:spcPts val="1000"/>
+              </a:spcAft>
+              <a:buSzPct val="100000"/>
+              <a:buChar char="•"/>
+            </a:pPr>
+            <a:r>
+              <a:rPr lang="en-US" sz="1250" dirty="0">
                 <a:solidFill>
                   <a:srgbClr val="EAF3EE"/>
                 </a:solidFill>
@@ -3589,94 +3749,20 @@
                 <a:ea typeface="Calibri" pitchFamily="34" charset="-122"/>
                 <a:cs typeface="Calibri" pitchFamily="34" charset="-120"/>
               </a:rPr>
-              <a:t>Tek turda tek değişiklik</a:t>
-            </a:r>
-            <a:endParaRPr lang="en-US" sz="1400" dirty="0"/>
-          </a:p>
-          <a:p>
-            <a:pPr indent="0" marL="0">
-              <a:buNone/>
-            </a:pPr>
-            <a:r>
-              <a:rPr lang="en-US" sz="1150" dirty="0">
-                <a:solidFill>
-                  <a:srgbClr val="9CB2A8"/>
-                </a:solidFill>
-                <a:latin typeface="Calibri" pitchFamily="34" charset="0"/>
-                <a:ea typeface="Calibri" pitchFamily="34" charset="-122"/>
-                <a:cs typeface="Calibri" pitchFamily="34" charset="-120"/>
-              </a:rPr>
-              <a:t>Hero'da aynı anda çok şeyi değiştirmek karşılaştırmayı zorlaştırdı; küçük adım daha hızlı sonuç verdi.</a:t>
-            </a:r>
-            <a:endParaRPr lang="en-US" sz="1400" dirty="0"/>
-          </a:p>
-        </p:txBody>
-      </p:sp>
-      <p:sp>
-        <p:nvSpPr>
-          <p:cNvPr id="19" name="Text 17"/>
-          <p:cNvSpPr/>
-          <p:nvPr/>
-        </p:nvSpPr>
-        <p:spPr>
-          <a:xfrm>
-            <a:off x="6858000" y="4754880"/>
-            <a:ext cx="457200" cy="548640"/>
-          </a:xfrm>
-          <a:prstGeom prst="rect">
-            <a:avLst/>
-          </a:prstGeom>
-          <a:noFill/>
-          <a:ln/>
-        </p:spPr>
-        <p:txBody>
-          <a:bodyPr wrap="square" lIns="0" tIns="0" rIns="0" bIns="0" rtlCol="0" anchor="ctr"/>
-          <a:lstStyle/>
-          <a:p>
-            <a:pPr indent="0" marL="0">
-              <a:buNone/>
-            </a:pPr>
-            <a:r>
-              <a:rPr lang="en-US" sz="2600" b="1" dirty="0">
-                <a:solidFill>
-                  <a:srgbClr val="F0A93F"/>
-                </a:solidFill>
-                <a:latin typeface="Cambria" pitchFamily="34" charset="0"/>
-                <a:ea typeface="Cambria" pitchFamily="34" charset="-122"/>
-                <a:cs typeface="Cambria" pitchFamily="34" charset="-120"/>
-              </a:rPr>
-              <a:t>3</a:t>
-            </a:r>
-            <a:endParaRPr lang="en-US" sz="2600" dirty="0"/>
-          </a:p>
-        </p:txBody>
-      </p:sp>
-      <p:sp>
-        <p:nvSpPr>
-          <p:cNvPr id="20" name="Text 18"/>
-          <p:cNvSpPr/>
-          <p:nvPr/>
-        </p:nvSpPr>
-        <p:spPr>
-          <a:xfrm>
-            <a:off x="7452360" y="4709160"/>
-            <a:ext cx="3931920" cy="1234440"/>
-          </a:xfrm>
-          <a:prstGeom prst="rect">
-            <a:avLst/>
-          </a:prstGeom>
-          <a:noFill/>
-          <a:ln/>
-        </p:spPr>
-        <p:txBody>
-          <a:bodyPr wrap="square" lIns="0" tIns="0" rIns="0" bIns="0" rtlCol="0" anchor="ctr"/>
-          <a:lstStyle/>
-          <a:p>
-            <a:pPr indent="0" marL="0">
-              <a:buNone/>
-            </a:pPr>
-            <a:r>
-              <a:rPr lang="en-US" sz="1400" b="1" dirty="0">
+              <a:t>Harita mockup'ı hero'nun merkezinde</a:t>
+            </a:r>
+            <a:endParaRPr lang="en-US" sz="1250" dirty="0"/>
+          </a:p>
+          <a:p>
+            <a:pPr marL="342900" indent="-342900">
+              <a:spcAft>
+                <a:spcPts val="1000"/>
+              </a:spcAft>
+              <a:buSzPct val="100000"/>
+              <a:buChar char="•"/>
+            </a:pPr>
+            <a:r>
+              <a:rPr lang="en-US" sz="1250" dirty="0">
                 <a:solidFill>
                   <a:srgbClr val="EAF3EE"/>
                 </a:solidFill>
@@ -3684,26 +3770,48 @@
                 <a:ea typeface="Calibri" pitchFamily="34" charset="-122"/>
                 <a:cs typeface="Calibri" pitchFamily="34" charset="-120"/>
               </a:rPr>
-              <a:t>Görsel yönü erken göstermek</a:t>
-            </a:r>
-            <a:endParaRPr lang="en-US" sz="1400" dirty="0"/>
-          </a:p>
-          <a:p>
-            <a:pPr indent="0" marL="0">
-              <a:buNone/>
-            </a:pPr>
-            <a:r>
-              <a:rPr lang="en-US" sz="1150" dirty="0">
-                <a:solidFill>
-                  <a:srgbClr val="9CB2A8"/>
-                </a:solidFill>
-                <a:latin typeface="Calibri" pitchFamily="34" charset="0"/>
-                <a:ea typeface="Calibri" pitchFamily="34" charset="-122"/>
-                <a:cs typeface="Calibri" pitchFamily="34" charset="-120"/>
-              </a:rPr>
-              <a:t>Krem zemin + serif kararına geri bildirimle ulaştık — ilk taslağı daha erken paylaşmak zaman kazandırırdı.</a:t>
-            </a:r>
-            <a:endParaRPr lang="en-US" sz="1400" dirty="0"/>
+              <a:t>"Veri kurumda" ayrı güven bölümü olarak işlenecek</a:t>
+            </a:r>
+            <a:endParaRPr lang="en-US" sz="1250" dirty="0"/>
+          </a:p>
+          <a:p>
+            <a:pPr marL="342900" indent="-342900">
+              <a:spcAft>
+                <a:spcPts val="1000"/>
+              </a:spcAft>
+              <a:buSzPct val="100000"/>
+              <a:buChar char="•"/>
+            </a:pPr>
+            <a:r>
+              <a:rPr lang="en-US" sz="1250" dirty="0">
+                <a:solidFill>
+                  <a:srgbClr val="EAF3EE"/>
+                </a:solidFill>
+                <a:latin typeface="Calibri" pitchFamily="34" charset="0"/>
+                <a:ea typeface="Calibri" pitchFamily="34" charset="-122"/>
+                <a:cs typeface="Calibri" pitchFamily="34" charset="-120"/>
+              </a:rPr>
+              <a:t>Statik HTML kararı doğrulandı — içerik JS'siz okunabilir, SEO hedefi buna bağlı</a:t>
+            </a:r>
+            <a:endParaRPr lang="en-US" sz="1250" dirty="0"/>
+          </a:p>
+          <a:p>
+            <a:pPr marL="342900" indent="-342900">
+              <a:buSzPct val="100000"/>
+              <a:buChar char="•"/>
+            </a:pPr>
+            <a:r>
+              <a:rPr lang="en-US" sz="1250" dirty="0">
+                <a:solidFill>
+                  <a:srgbClr val="EAF3EE"/>
+                </a:solidFill>
+                <a:latin typeface="Calibri" pitchFamily="34" charset="0"/>
+                <a:ea typeface="Calibri" pitchFamily="34" charset="-122"/>
+                <a:cs typeface="Calibri" pitchFamily="34" charset="-120"/>
+              </a:rPr>
+              <a:t>Metinler kısa tutulacak — bölüm başına tek fikir</a:t>
+            </a:r>
+            <a:endParaRPr lang="en-US" sz="1250" dirty="0"/>
           </a:p>
         </p:txBody>
       </p:sp>
@@ -3718,6 +3826,2613 @@
 <file path=ppt/slides/slide4.xml><?xml version="1.0" encoding="utf-8"?>
 <p:sld xmlns:a="http://schemas.openxmlformats.org/drawingml/2006/main" xmlns:r="http://schemas.openxmlformats.org/officeDocument/2006/relationships" xmlns:p="http://schemas.openxmlformats.org/presentationml/2006/main">
   <p:cSld name="Slide 4">
+    <p:bg>
+      <p:bgPr>
+        <a:solidFill>
+          <a:srgbClr val="FAF6EC"/>
+        </a:solidFill>
+      </p:bgPr>
+    </p:bg>
+    <p:spTree>
+      <p:nvGrpSpPr>
+        <p:cNvPr id="1" name=""/>
+        <p:cNvGrpSpPr/>
+        <p:nvPr/>
+      </p:nvGrpSpPr>
+      <p:grpSpPr>
+        <a:xfrm>
+          <a:off x="0" y="0"/>
+          <a:ext cx="0" cy="0"/>
+          <a:chOff x="0" y="0"/>
+          <a:chExt cx="0" cy="0"/>
+        </a:xfrm>
+      </p:grpSpPr>
+      <p:sp>
+        <p:nvSpPr>
+          <p:cNvPr id="2" name="Text 0"/>
+          <p:cNvSpPr/>
+          <p:nvPr/>
+        </p:nvSpPr>
+        <p:spPr>
+          <a:xfrm>
+            <a:off x="548640" y="384048"/>
+            <a:ext cx="4572000" cy="274320"/>
+          </a:xfrm>
+          <a:prstGeom prst="rect">
+            <a:avLst/>
+          </a:prstGeom>
+          <a:noFill/>
+          <a:ln/>
+        </p:spPr>
+        <p:txBody>
+          <a:bodyPr wrap="square" lIns="0" tIns="0" rIns="0" bIns="0" rtlCol="0" anchor="ctr"/>
+          <a:lstStyle/>
+          <a:p>
+            <a:pPr indent="0" marL="0">
+              <a:buNone/>
+            </a:pPr>
+            <a:r>
+              <a:rPr lang="en-US" sz="1200" b="1" spc="300" kern="0" dirty="0">
+                <a:solidFill>
+                  <a:srgbClr val="17604C"/>
+                </a:solidFill>
+                <a:latin typeface="Calibri" pitchFamily="34" charset="0"/>
+                <a:ea typeface="Calibri" pitchFamily="34" charset="-122"/>
+                <a:cs typeface="Calibri" pitchFamily="34" charset="-120"/>
+              </a:rPr>
+              <a:t>GÖREV 3 / 5</a:t>
+            </a:r>
+            <a:endParaRPr lang="en-US" sz="1200" dirty="0"/>
+          </a:p>
+        </p:txBody>
+      </p:sp>
+      <p:sp>
+        <p:nvSpPr>
+          <p:cNvPr id="3" name="Text 1"/>
+          <p:cNvSpPr/>
+          <p:nvPr/>
+        </p:nvSpPr>
+        <p:spPr>
+          <a:xfrm>
+            <a:off x="548640" y="658368"/>
+            <a:ext cx="11064240" cy="640080"/>
+          </a:xfrm>
+          <a:prstGeom prst="rect">
+            <a:avLst/>
+          </a:prstGeom>
+          <a:noFill/>
+          <a:ln/>
+        </p:spPr>
+        <p:txBody>
+          <a:bodyPr wrap="square" lIns="0" tIns="0" rIns="0" bIns="0" rtlCol="0" anchor="ctr"/>
+          <a:lstStyle/>
+          <a:p>
+            <a:pPr indent="0" marL="0">
+              <a:buNone/>
+            </a:pPr>
+            <a:r>
+              <a:rPr lang="en-US" sz="3000" b="1" dirty="0">
+                <a:solidFill>
+                  <a:srgbClr val="1E2A24"/>
+                </a:solidFill>
+                <a:latin typeface="Cambria" pitchFamily="34" charset="0"/>
+                <a:ea typeface="Cambria" pitchFamily="34" charset="-122"/>
+                <a:cs typeface="Cambria" pitchFamily="34" charset="-120"/>
+              </a:rPr>
+              <a:t>Site Haritası &amp; Wireframe</a:t>
+            </a:r>
+            <a:endParaRPr lang="en-US" sz="3000" dirty="0"/>
+          </a:p>
+        </p:txBody>
+      </p:sp>
+      <p:sp>
+        <p:nvSpPr>
+          <p:cNvPr id="4" name="Shape 2"/>
+          <p:cNvSpPr/>
+          <p:nvPr/>
+        </p:nvSpPr>
+        <p:spPr>
+          <a:xfrm>
+            <a:off x="548640" y="1691640"/>
+            <a:ext cx="3383280" cy="3794760"/>
+          </a:xfrm>
+          <a:prstGeom prst="rect">
+            <a:avLst/>
+          </a:prstGeom>
+          <a:solidFill>
+            <a:srgbClr val="FFFFFF"/>
+          </a:solidFill>
+          <a:ln w="15875">
+            <a:solidFill>
+              <a:srgbClr val="1E2A24"/>
+            </a:solidFill>
+            <a:prstDash val="solid"/>
+          </a:ln>
+        </p:spPr>
+      </p:sp>
+      <p:sp>
+        <p:nvSpPr>
+          <p:cNvPr id="5" name="Shape 3"/>
+          <p:cNvSpPr/>
+          <p:nvPr/>
+        </p:nvSpPr>
+        <p:spPr>
+          <a:xfrm>
+            <a:off x="658368" y="1801368"/>
+            <a:ext cx="3163824" cy="274320"/>
+          </a:xfrm>
+          <a:prstGeom prst="rect">
+            <a:avLst/>
+          </a:prstGeom>
+          <a:solidFill>
+            <a:srgbClr val="FFFFFF"/>
+          </a:solidFill>
+          <a:ln w="9525">
+            <a:solidFill>
+              <a:srgbClr val="58635A"/>
+            </a:solidFill>
+            <a:prstDash val="solid"/>
+          </a:ln>
+        </p:spPr>
+      </p:sp>
+      <p:sp>
+        <p:nvSpPr>
+          <p:cNvPr id="6" name="Text 4"/>
+          <p:cNvSpPr/>
+          <p:nvPr/>
+        </p:nvSpPr>
+        <p:spPr>
+          <a:xfrm>
+            <a:off x="658368" y="1801368"/>
+            <a:ext cx="3163824" cy="274320"/>
+          </a:xfrm>
+          <a:prstGeom prst="rect">
+            <a:avLst/>
+          </a:prstGeom>
+          <a:noFill/>
+          <a:ln/>
+        </p:spPr>
+        <p:txBody>
+          <a:bodyPr wrap="square" lIns="0" tIns="0" rIns="0" bIns="0" rtlCol="0" anchor="ctr"/>
+          <a:lstStyle/>
+          <a:p>
+            <a:pPr algn="ctr" indent="0" marL="0">
+              <a:buNone/>
+            </a:pPr>
+            <a:r>
+              <a:rPr lang="en-US" sz="850" dirty="0">
+                <a:solidFill>
+                  <a:srgbClr val="58635A"/>
+                </a:solidFill>
+                <a:latin typeface="Calibri" pitchFamily="34" charset="0"/>
+                <a:ea typeface="Calibri" pitchFamily="34" charset="-122"/>
+                <a:cs typeface="Calibri" pitchFamily="34" charset="-120"/>
+              </a:rPr>
+              <a:t>logo · nav · CTA</a:t>
+            </a:r>
+            <a:endParaRPr lang="en-US" sz="850" dirty="0"/>
+          </a:p>
+        </p:txBody>
+      </p:sp>
+      <p:sp>
+        <p:nvSpPr>
+          <p:cNvPr id="7" name="Shape 5"/>
+          <p:cNvSpPr/>
+          <p:nvPr/>
+        </p:nvSpPr>
+        <p:spPr>
+          <a:xfrm>
+            <a:off x="658368" y="2148840"/>
+            <a:ext cx="3163824" cy="777240"/>
+          </a:xfrm>
+          <a:prstGeom prst="rect">
+            <a:avLst/>
+          </a:prstGeom>
+          <a:solidFill>
+            <a:srgbClr val="F3EDDE"/>
+          </a:solidFill>
+          <a:ln w="9525">
+            <a:solidFill>
+              <a:srgbClr val="58635A"/>
+            </a:solidFill>
+            <a:prstDash val="solid"/>
+          </a:ln>
+        </p:spPr>
+      </p:sp>
+      <p:sp>
+        <p:nvSpPr>
+          <p:cNvPr id="8" name="Text 6"/>
+          <p:cNvSpPr/>
+          <p:nvPr/>
+        </p:nvSpPr>
+        <p:spPr>
+          <a:xfrm>
+            <a:off x="658368" y="2148840"/>
+            <a:ext cx="3163824" cy="777240"/>
+          </a:xfrm>
+          <a:prstGeom prst="rect">
+            <a:avLst/>
+          </a:prstGeom>
+          <a:noFill/>
+          <a:ln/>
+        </p:spPr>
+        <p:txBody>
+          <a:bodyPr wrap="square" lIns="0" tIns="0" rIns="0" bIns="0" rtlCol="0" anchor="ctr"/>
+          <a:lstStyle/>
+          <a:p>
+            <a:pPr algn="ctr" indent="0" marL="0">
+              <a:buNone/>
+            </a:pPr>
+            <a:r>
+              <a:rPr lang="en-US" sz="850" dirty="0">
+                <a:solidFill>
+                  <a:srgbClr val="58635A"/>
+                </a:solidFill>
+                <a:latin typeface="Calibri" pitchFamily="34" charset="0"/>
+                <a:ea typeface="Calibri" pitchFamily="34" charset="-122"/>
+                <a:cs typeface="Calibri" pitchFamily="34" charset="-120"/>
+              </a:rPr>
+              <a:t>HERO — başlık + harita kartı</a:t>
+            </a:r>
+            <a:endParaRPr lang="en-US" sz="850" dirty="0"/>
+          </a:p>
+        </p:txBody>
+      </p:sp>
+      <p:sp>
+        <p:nvSpPr>
+          <p:cNvPr id="9" name="Shape 7"/>
+          <p:cNvSpPr/>
+          <p:nvPr/>
+        </p:nvSpPr>
+        <p:spPr>
+          <a:xfrm>
+            <a:off x="658368" y="2999232"/>
+            <a:ext cx="1005840" cy="384048"/>
+          </a:xfrm>
+          <a:prstGeom prst="rect">
+            <a:avLst/>
+          </a:prstGeom>
+          <a:solidFill>
+            <a:srgbClr val="FFFFFF"/>
+          </a:solidFill>
+          <a:ln w="9525">
+            <a:solidFill>
+              <a:srgbClr val="58635A"/>
+            </a:solidFill>
+            <a:prstDash val="solid"/>
+          </a:ln>
+        </p:spPr>
+      </p:sp>
+      <p:sp>
+        <p:nvSpPr>
+          <p:cNvPr id="10" name="Shape 8"/>
+          <p:cNvSpPr/>
+          <p:nvPr/>
+        </p:nvSpPr>
+        <p:spPr>
+          <a:xfrm>
+            <a:off x="1737360" y="2999232"/>
+            <a:ext cx="1005840" cy="384048"/>
+          </a:xfrm>
+          <a:prstGeom prst="rect">
+            <a:avLst/>
+          </a:prstGeom>
+          <a:solidFill>
+            <a:srgbClr val="FFFFFF"/>
+          </a:solidFill>
+          <a:ln w="9525">
+            <a:solidFill>
+              <a:srgbClr val="58635A"/>
+            </a:solidFill>
+            <a:prstDash val="solid"/>
+          </a:ln>
+        </p:spPr>
+      </p:sp>
+      <p:sp>
+        <p:nvSpPr>
+          <p:cNvPr id="11" name="Text 9"/>
+          <p:cNvSpPr/>
+          <p:nvPr/>
+        </p:nvSpPr>
+        <p:spPr>
+          <a:xfrm>
+            <a:off x="1737360" y="2999232"/>
+            <a:ext cx="1005840" cy="384048"/>
+          </a:xfrm>
+          <a:prstGeom prst="rect">
+            <a:avLst/>
+          </a:prstGeom>
+          <a:noFill/>
+          <a:ln/>
+        </p:spPr>
+        <p:txBody>
+          <a:bodyPr wrap="square" lIns="0" tIns="0" rIns="0" bIns="0" rtlCol="0" anchor="ctr"/>
+          <a:lstStyle/>
+          <a:p>
+            <a:pPr algn="ctr" indent="0" marL="0">
+              <a:buNone/>
+            </a:pPr>
+            <a:r>
+              <a:rPr lang="en-US" sz="850" dirty="0">
+                <a:solidFill>
+                  <a:srgbClr val="58635A"/>
+                </a:solidFill>
+                <a:latin typeface="Calibri" pitchFamily="34" charset="0"/>
+                <a:ea typeface="Calibri" pitchFamily="34" charset="-122"/>
+                <a:cs typeface="Calibri" pitchFamily="34" charset="-120"/>
+              </a:rPr>
+              <a:t>6 kart</a:t>
+            </a:r>
+            <a:endParaRPr lang="en-US" sz="850" dirty="0"/>
+          </a:p>
+        </p:txBody>
+      </p:sp>
+      <p:sp>
+        <p:nvSpPr>
+          <p:cNvPr id="12" name="Shape 10"/>
+          <p:cNvSpPr/>
+          <p:nvPr/>
+        </p:nvSpPr>
+        <p:spPr>
+          <a:xfrm>
+            <a:off x="2816352" y="2999232"/>
+            <a:ext cx="1005840" cy="384048"/>
+          </a:xfrm>
+          <a:prstGeom prst="rect">
+            <a:avLst/>
+          </a:prstGeom>
+          <a:solidFill>
+            <a:srgbClr val="FFFFFF"/>
+          </a:solidFill>
+          <a:ln w="9525">
+            <a:solidFill>
+              <a:srgbClr val="58635A"/>
+            </a:solidFill>
+            <a:prstDash val="solid"/>
+          </a:ln>
+        </p:spPr>
+      </p:sp>
+      <p:sp>
+        <p:nvSpPr>
+          <p:cNvPr id="13" name="Shape 11"/>
+          <p:cNvSpPr/>
+          <p:nvPr/>
+        </p:nvSpPr>
+        <p:spPr>
+          <a:xfrm>
+            <a:off x="658368" y="3456432"/>
+            <a:ext cx="1005840" cy="384048"/>
+          </a:xfrm>
+          <a:prstGeom prst="rect">
+            <a:avLst/>
+          </a:prstGeom>
+          <a:solidFill>
+            <a:srgbClr val="FFFFFF"/>
+          </a:solidFill>
+          <a:ln w="9525">
+            <a:solidFill>
+              <a:srgbClr val="58635A"/>
+            </a:solidFill>
+            <a:prstDash val="solid"/>
+          </a:ln>
+        </p:spPr>
+      </p:sp>
+      <p:sp>
+        <p:nvSpPr>
+          <p:cNvPr id="14" name="Shape 12"/>
+          <p:cNvSpPr/>
+          <p:nvPr/>
+        </p:nvSpPr>
+        <p:spPr>
+          <a:xfrm>
+            <a:off x="1737360" y="3456432"/>
+            <a:ext cx="1005840" cy="384048"/>
+          </a:xfrm>
+          <a:prstGeom prst="rect">
+            <a:avLst/>
+          </a:prstGeom>
+          <a:solidFill>
+            <a:srgbClr val="FFFFFF"/>
+          </a:solidFill>
+          <a:ln w="9525">
+            <a:solidFill>
+              <a:srgbClr val="58635A"/>
+            </a:solidFill>
+            <a:prstDash val="solid"/>
+          </a:ln>
+        </p:spPr>
+      </p:sp>
+      <p:sp>
+        <p:nvSpPr>
+          <p:cNvPr id="15" name="Shape 13"/>
+          <p:cNvSpPr/>
+          <p:nvPr/>
+        </p:nvSpPr>
+        <p:spPr>
+          <a:xfrm>
+            <a:off x="2816352" y="3456432"/>
+            <a:ext cx="1005840" cy="384048"/>
+          </a:xfrm>
+          <a:prstGeom prst="rect">
+            <a:avLst/>
+          </a:prstGeom>
+          <a:solidFill>
+            <a:srgbClr val="FFFFFF"/>
+          </a:solidFill>
+          <a:ln w="9525">
+            <a:solidFill>
+              <a:srgbClr val="58635A"/>
+            </a:solidFill>
+            <a:prstDash val="solid"/>
+          </a:ln>
+        </p:spPr>
+      </p:sp>
+      <p:sp>
+        <p:nvSpPr>
+          <p:cNvPr id="16" name="Shape 14"/>
+          <p:cNvSpPr/>
+          <p:nvPr/>
+        </p:nvSpPr>
+        <p:spPr>
+          <a:xfrm>
+            <a:off x="658368" y="3977640"/>
+            <a:ext cx="3163824" cy="347472"/>
+          </a:xfrm>
+          <a:prstGeom prst="rect">
+            <a:avLst/>
+          </a:prstGeom>
+          <a:solidFill>
+            <a:srgbClr val="F3EDDE"/>
+          </a:solidFill>
+          <a:ln w="9525">
+            <a:solidFill>
+              <a:srgbClr val="58635A"/>
+            </a:solidFill>
+            <a:prstDash val="solid"/>
+          </a:ln>
+        </p:spPr>
+      </p:sp>
+      <p:sp>
+        <p:nvSpPr>
+          <p:cNvPr id="17" name="Text 15"/>
+          <p:cNvSpPr/>
+          <p:nvPr/>
+        </p:nvSpPr>
+        <p:spPr>
+          <a:xfrm>
+            <a:off x="658368" y="3977640"/>
+            <a:ext cx="3163824" cy="347472"/>
+          </a:xfrm>
+          <a:prstGeom prst="rect">
+            <a:avLst/>
+          </a:prstGeom>
+          <a:noFill/>
+          <a:ln/>
+        </p:spPr>
+        <p:txBody>
+          <a:bodyPr wrap="square" lIns="0" tIns="0" rIns="0" bIns="0" rtlCol="0" anchor="ctr"/>
+          <a:lstStyle/>
+          <a:p>
+            <a:pPr algn="ctr" indent="0" marL="0">
+              <a:buNone/>
+            </a:pPr>
+            <a:r>
+              <a:rPr lang="en-US" sz="850" dirty="0">
+                <a:solidFill>
+                  <a:srgbClr val="58635A"/>
+                </a:solidFill>
+                <a:latin typeface="Calibri" pitchFamily="34" charset="0"/>
+                <a:ea typeface="Calibri" pitchFamily="34" charset="-122"/>
+                <a:cs typeface="Calibri" pitchFamily="34" charset="-120"/>
+              </a:rPr>
+              <a:t>Rakamlarla CBS bandı</a:t>
+            </a:r>
+            <a:endParaRPr lang="en-US" sz="850" dirty="0"/>
+          </a:p>
+        </p:txBody>
+      </p:sp>
+      <p:sp>
+        <p:nvSpPr>
+          <p:cNvPr id="18" name="Shape 16"/>
+          <p:cNvSpPr/>
+          <p:nvPr/>
+        </p:nvSpPr>
+        <p:spPr>
+          <a:xfrm>
+            <a:off x="658368" y="4398264"/>
+            <a:ext cx="3163824" cy="548640"/>
+          </a:xfrm>
+          <a:prstGeom prst="rect">
+            <a:avLst/>
+          </a:prstGeom>
+          <a:solidFill>
+            <a:srgbClr val="FFFFFF"/>
+          </a:solidFill>
+          <a:ln w="9525">
+            <a:solidFill>
+              <a:srgbClr val="58635A"/>
+            </a:solidFill>
+            <a:prstDash val="solid"/>
+          </a:ln>
+        </p:spPr>
+      </p:sp>
+      <p:sp>
+        <p:nvSpPr>
+          <p:cNvPr id="19" name="Text 17"/>
+          <p:cNvSpPr/>
+          <p:nvPr/>
+        </p:nvSpPr>
+        <p:spPr>
+          <a:xfrm>
+            <a:off x="658368" y="4398264"/>
+            <a:ext cx="3163824" cy="548640"/>
+          </a:xfrm>
+          <a:prstGeom prst="rect">
+            <a:avLst/>
+          </a:prstGeom>
+          <a:noFill/>
+          <a:ln/>
+        </p:spPr>
+        <p:txBody>
+          <a:bodyPr wrap="square" lIns="0" tIns="0" rIns="0" bIns="0" rtlCol="0" anchor="ctr"/>
+          <a:lstStyle/>
+          <a:p>
+            <a:pPr algn="ctr" indent="0" marL="0">
+              <a:buNone/>
+            </a:pPr>
+            <a:r>
+              <a:rPr lang="en-US" sz="850" dirty="0">
+                <a:solidFill>
+                  <a:srgbClr val="58635A"/>
+                </a:solidFill>
+                <a:latin typeface="Calibri" pitchFamily="34" charset="0"/>
+                <a:ea typeface="Calibri" pitchFamily="34" charset="-122"/>
+                <a:cs typeface="Calibri" pitchFamily="34" charset="-120"/>
+              </a:rPr>
+              <a:t>öne çıkan özellikler</a:t>
+            </a:r>
+            <a:endParaRPr lang="en-US" sz="850" dirty="0"/>
+          </a:p>
+        </p:txBody>
+      </p:sp>
+      <p:sp>
+        <p:nvSpPr>
+          <p:cNvPr id="20" name="Shape 18"/>
+          <p:cNvSpPr/>
+          <p:nvPr/>
+        </p:nvSpPr>
+        <p:spPr>
+          <a:xfrm>
+            <a:off x="658368" y="5020056"/>
+            <a:ext cx="3163824" cy="347472"/>
+          </a:xfrm>
+          <a:prstGeom prst="rect">
+            <a:avLst/>
+          </a:prstGeom>
+          <a:solidFill>
+            <a:srgbClr val="F3EDDE"/>
+          </a:solidFill>
+          <a:ln w="9525">
+            <a:solidFill>
+              <a:srgbClr val="58635A"/>
+            </a:solidFill>
+            <a:prstDash val="solid"/>
+          </a:ln>
+        </p:spPr>
+      </p:sp>
+      <p:sp>
+        <p:nvSpPr>
+          <p:cNvPr id="21" name="Text 19"/>
+          <p:cNvSpPr/>
+          <p:nvPr/>
+        </p:nvSpPr>
+        <p:spPr>
+          <a:xfrm>
+            <a:off x="658368" y="5020056"/>
+            <a:ext cx="3163824" cy="347472"/>
+          </a:xfrm>
+          <a:prstGeom prst="rect">
+            <a:avLst/>
+          </a:prstGeom>
+          <a:noFill/>
+          <a:ln/>
+        </p:spPr>
+        <p:txBody>
+          <a:bodyPr wrap="square" lIns="0" tIns="0" rIns="0" bIns="0" rtlCol="0" anchor="ctr"/>
+          <a:lstStyle/>
+          <a:p>
+            <a:pPr algn="ctr" indent="0" marL="0">
+              <a:buNone/>
+            </a:pPr>
+            <a:r>
+              <a:rPr lang="en-US" sz="850" dirty="0">
+                <a:solidFill>
+                  <a:srgbClr val="58635A"/>
+                </a:solidFill>
+                <a:latin typeface="Calibri" pitchFamily="34" charset="0"/>
+                <a:ea typeface="Calibri" pitchFamily="34" charset="-122"/>
+                <a:cs typeface="Calibri" pitchFamily="34" charset="-120"/>
+              </a:rPr>
+              <a:t>kapanış CTA</a:t>
+            </a:r>
+            <a:endParaRPr lang="en-US" sz="850" dirty="0"/>
+          </a:p>
+        </p:txBody>
+      </p:sp>
+      <p:sp>
+        <p:nvSpPr>
+          <p:cNvPr id="22" name="Text 20"/>
+          <p:cNvSpPr/>
+          <p:nvPr/>
+        </p:nvSpPr>
+        <p:spPr>
+          <a:xfrm>
+            <a:off x="548640" y="5577840"/>
+            <a:ext cx="3383280" cy="274320"/>
+          </a:xfrm>
+          <a:prstGeom prst="rect">
+            <a:avLst/>
+          </a:prstGeom>
+          <a:noFill/>
+          <a:ln/>
+        </p:spPr>
+        <p:txBody>
+          <a:bodyPr wrap="square" lIns="0" tIns="0" rIns="0" bIns="0" rtlCol="0" anchor="ctr"/>
+          <a:lstStyle/>
+          <a:p>
+            <a:pPr algn="ctr" indent="0" marL="0">
+              <a:buNone/>
+            </a:pPr>
+            <a:r>
+              <a:rPr lang="en-US" sz="1200" b="1" dirty="0">
+                <a:solidFill>
+                  <a:srgbClr val="1E2A24"/>
+                </a:solidFill>
+                <a:latin typeface="Calibri" pitchFamily="34" charset="0"/>
+                <a:ea typeface="Calibri" pitchFamily="34" charset="-122"/>
+                <a:cs typeface="Calibri" pitchFamily="34" charset="-120"/>
+              </a:rPr>
+              <a:t>Ana sayfa  /</a:t>
+            </a:r>
+            <a:endParaRPr lang="en-US" sz="1200" dirty="0"/>
+          </a:p>
+        </p:txBody>
+      </p:sp>
+      <p:sp>
+        <p:nvSpPr>
+          <p:cNvPr id="23" name="Shape 21"/>
+          <p:cNvSpPr/>
+          <p:nvPr/>
+        </p:nvSpPr>
+        <p:spPr>
+          <a:xfrm>
+            <a:off x="4407408" y="1691640"/>
+            <a:ext cx="3383280" cy="3794760"/>
+          </a:xfrm>
+          <a:prstGeom prst="rect">
+            <a:avLst/>
+          </a:prstGeom>
+          <a:solidFill>
+            <a:srgbClr val="FFFFFF"/>
+          </a:solidFill>
+          <a:ln w="15875">
+            <a:solidFill>
+              <a:srgbClr val="1E2A24"/>
+            </a:solidFill>
+            <a:prstDash val="solid"/>
+          </a:ln>
+        </p:spPr>
+      </p:sp>
+      <p:sp>
+        <p:nvSpPr>
+          <p:cNvPr id="24" name="Shape 22"/>
+          <p:cNvSpPr/>
+          <p:nvPr/>
+        </p:nvSpPr>
+        <p:spPr>
+          <a:xfrm>
+            <a:off x="4517136" y="1801368"/>
+            <a:ext cx="3163824" cy="274320"/>
+          </a:xfrm>
+          <a:prstGeom prst="rect">
+            <a:avLst/>
+          </a:prstGeom>
+          <a:solidFill>
+            <a:srgbClr val="FFFFFF"/>
+          </a:solidFill>
+          <a:ln w="9525">
+            <a:solidFill>
+              <a:srgbClr val="58635A"/>
+            </a:solidFill>
+            <a:prstDash val="solid"/>
+          </a:ln>
+        </p:spPr>
+      </p:sp>
+      <p:sp>
+        <p:nvSpPr>
+          <p:cNvPr id="25" name="Text 23"/>
+          <p:cNvSpPr/>
+          <p:nvPr/>
+        </p:nvSpPr>
+        <p:spPr>
+          <a:xfrm>
+            <a:off x="4517136" y="1801368"/>
+            <a:ext cx="3163824" cy="274320"/>
+          </a:xfrm>
+          <a:prstGeom prst="rect">
+            <a:avLst/>
+          </a:prstGeom>
+          <a:noFill/>
+          <a:ln/>
+        </p:spPr>
+        <p:txBody>
+          <a:bodyPr wrap="square" lIns="0" tIns="0" rIns="0" bIns="0" rtlCol="0" anchor="ctr"/>
+          <a:lstStyle/>
+          <a:p>
+            <a:pPr algn="ctr" indent="0" marL="0">
+              <a:buNone/>
+            </a:pPr>
+            <a:r>
+              <a:rPr lang="en-US" sz="850" dirty="0">
+                <a:solidFill>
+                  <a:srgbClr val="58635A"/>
+                </a:solidFill>
+                <a:latin typeface="Calibri" pitchFamily="34" charset="0"/>
+                <a:ea typeface="Calibri" pitchFamily="34" charset="-122"/>
+                <a:cs typeface="Calibri" pitchFamily="34" charset="-120"/>
+              </a:rPr>
+              <a:t>başlık + özet</a:t>
+            </a:r>
+            <a:endParaRPr lang="en-US" sz="850" dirty="0"/>
+          </a:p>
+        </p:txBody>
+      </p:sp>
+      <p:sp>
+        <p:nvSpPr>
+          <p:cNvPr id="26" name="Shape 24"/>
+          <p:cNvSpPr/>
+          <p:nvPr/>
+        </p:nvSpPr>
+        <p:spPr>
+          <a:xfrm>
+            <a:off x="4517136" y="2148840"/>
+            <a:ext cx="1545336" cy="1005840"/>
+          </a:xfrm>
+          <a:prstGeom prst="rect">
+            <a:avLst/>
+          </a:prstGeom>
+          <a:solidFill>
+            <a:srgbClr val="FFFFFF"/>
+          </a:solidFill>
+          <a:ln w="9525">
+            <a:solidFill>
+              <a:srgbClr val="58635A"/>
+            </a:solidFill>
+            <a:prstDash val="solid"/>
+          </a:ln>
+        </p:spPr>
+      </p:sp>
+      <p:sp>
+        <p:nvSpPr>
+          <p:cNvPr id="27" name="Text 25"/>
+          <p:cNvSpPr/>
+          <p:nvPr/>
+        </p:nvSpPr>
+        <p:spPr>
+          <a:xfrm>
+            <a:off x="4517136" y="2148840"/>
+            <a:ext cx="1545336" cy="1005840"/>
+          </a:xfrm>
+          <a:prstGeom prst="rect">
+            <a:avLst/>
+          </a:prstGeom>
+          <a:noFill/>
+          <a:ln/>
+        </p:spPr>
+        <p:txBody>
+          <a:bodyPr wrap="square" lIns="0" tIns="0" rIns="0" bIns="0" rtlCol="0" anchor="ctr"/>
+          <a:lstStyle/>
+          <a:p>
+            <a:pPr algn="ctr" indent="0" marL="0">
+              <a:buNone/>
+            </a:pPr>
+            <a:r>
+              <a:rPr lang="en-US" sz="850" dirty="0">
+                <a:solidFill>
+                  <a:srgbClr val="58635A"/>
+                </a:solidFill>
+                <a:latin typeface="Calibri" pitchFamily="34" charset="0"/>
+                <a:ea typeface="Calibri" pitchFamily="34" charset="-122"/>
+                <a:cs typeface="Calibri" pitchFamily="34" charset="-120"/>
+              </a:rPr>
+              <a:t>metin</a:t>
+            </a:r>
+            <a:endParaRPr lang="en-US" sz="850" dirty="0"/>
+          </a:p>
+        </p:txBody>
+      </p:sp>
+      <p:sp>
+        <p:nvSpPr>
+          <p:cNvPr id="28" name="Shape 26"/>
+          <p:cNvSpPr/>
+          <p:nvPr/>
+        </p:nvSpPr>
+        <p:spPr>
+          <a:xfrm>
+            <a:off x="6135624" y="2148840"/>
+            <a:ext cx="1545336" cy="1005840"/>
+          </a:xfrm>
+          <a:prstGeom prst="rect">
+            <a:avLst/>
+          </a:prstGeom>
+          <a:solidFill>
+            <a:srgbClr val="F3EDDE"/>
+          </a:solidFill>
+          <a:ln w="9525">
+            <a:solidFill>
+              <a:srgbClr val="58635A"/>
+            </a:solidFill>
+            <a:prstDash val="solid"/>
+          </a:ln>
+        </p:spPr>
+      </p:sp>
+      <p:sp>
+        <p:nvSpPr>
+          <p:cNvPr id="29" name="Text 27"/>
+          <p:cNvSpPr/>
+          <p:nvPr/>
+        </p:nvSpPr>
+        <p:spPr>
+          <a:xfrm>
+            <a:off x="6135624" y="2148840"/>
+            <a:ext cx="1545336" cy="1005840"/>
+          </a:xfrm>
+          <a:prstGeom prst="rect">
+            <a:avLst/>
+          </a:prstGeom>
+          <a:noFill/>
+          <a:ln/>
+        </p:spPr>
+        <p:txBody>
+          <a:bodyPr wrap="square" lIns="0" tIns="0" rIns="0" bIns="0" rtlCol="0" anchor="ctr"/>
+          <a:lstStyle/>
+          <a:p>
+            <a:pPr algn="ctr" indent="0" marL="0">
+              <a:buNone/>
+            </a:pPr>
+            <a:r>
+              <a:rPr lang="en-US" sz="850" dirty="0">
+                <a:solidFill>
+                  <a:srgbClr val="58635A"/>
+                </a:solidFill>
+                <a:latin typeface="Calibri" pitchFamily="34" charset="0"/>
+                <a:ea typeface="Calibri" pitchFamily="34" charset="-122"/>
+                <a:cs typeface="Calibri" pitchFamily="34" charset="-120"/>
+              </a:rPr>
+              <a:t>mockup</a:t>
+            </a:r>
+            <a:endParaRPr lang="en-US" sz="850" dirty="0"/>
+          </a:p>
+        </p:txBody>
+      </p:sp>
+      <p:sp>
+        <p:nvSpPr>
+          <p:cNvPr id="30" name="Shape 28"/>
+          <p:cNvSpPr/>
+          <p:nvPr/>
+        </p:nvSpPr>
+        <p:spPr>
+          <a:xfrm>
+            <a:off x="4517136" y="3227832"/>
+            <a:ext cx="1545336" cy="1005840"/>
+          </a:xfrm>
+          <a:prstGeom prst="rect">
+            <a:avLst/>
+          </a:prstGeom>
+          <a:solidFill>
+            <a:srgbClr val="F3EDDE"/>
+          </a:solidFill>
+          <a:ln w="9525">
+            <a:solidFill>
+              <a:srgbClr val="58635A"/>
+            </a:solidFill>
+            <a:prstDash val="solid"/>
+          </a:ln>
+        </p:spPr>
+      </p:sp>
+      <p:sp>
+        <p:nvSpPr>
+          <p:cNvPr id="31" name="Text 29"/>
+          <p:cNvSpPr/>
+          <p:nvPr/>
+        </p:nvSpPr>
+        <p:spPr>
+          <a:xfrm>
+            <a:off x="4517136" y="3227832"/>
+            <a:ext cx="1545336" cy="1005840"/>
+          </a:xfrm>
+          <a:prstGeom prst="rect">
+            <a:avLst/>
+          </a:prstGeom>
+          <a:noFill/>
+          <a:ln/>
+        </p:spPr>
+        <p:txBody>
+          <a:bodyPr wrap="square" lIns="0" tIns="0" rIns="0" bIns="0" rtlCol="0" anchor="ctr"/>
+          <a:lstStyle/>
+          <a:p>
+            <a:pPr algn="ctr" indent="0" marL="0">
+              <a:buNone/>
+            </a:pPr>
+            <a:r>
+              <a:rPr lang="en-US" sz="850" dirty="0">
+                <a:solidFill>
+                  <a:srgbClr val="58635A"/>
+                </a:solidFill>
+                <a:latin typeface="Calibri" pitchFamily="34" charset="0"/>
+                <a:ea typeface="Calibri" pitchFamily="34" charset="-122"/>
+                <a:cs typeface="Calibri" pitchFamily="34" charset="-120"/>
+              </a:rPr>
+              <a:t>görsel</a:t>
+            </a:r>
+            <a:endParaRPr lang="en-US" sz="850" dirty="0"/>
+          </a:p>
+        </p:txBody>
+      </p:sp>
+      <p:sp>
+        <p:nvSpPr>
+          <p:cNvPr id="32" name="Shape 30"/>
+          <p:cNvSpPr/>
+          <p:nvPr/>
+        </p:nvSpPr>
+        <p:spPr>
+          <a:xfrm>
+            <a:off x="6135624" y="3227832"/>
+            <a:ext cx="1545336" cy="1005840"/>
+          </a:xfrm>
+          <a:prstGeom prst="rect">
+            <a:avLst/>
+          </a:prstGeom>
+          <a:solidFill>
+            <a:srgbClr val="FFFFFF"/>
+          </a:solidFill>
+          <a:ln w="9525">
+            <a:solidFill>
+              <a:srgbClr val="58635A"/>
+            </a:solidFill>
+            <a:prstDash val="solid"/>
+          </a:ln>
+        </p:spPr>
+      </p:sp>
+      <p:sp>
+        <p:nvSpPr>
+          <p:cNvPr id="33" name="Text 31"/>
+          <p:cNvSpPr/>
+          <p:nvPr/>
+        </p:nvSpPr>
+        <p:spPr>
+          <a:xfrm>
+            <a:off x="6135624" y="3227832"/>
+            <a:ext cx="1545336" cy="1005840"/>
+          </a:xfrm>
+          <a:prstGeom prst="rect">
+            <a:avLst/>
+          </a:prstGeom>
+          <a:noFill/>
+          <a:ln/>
+        </p:spPr>
+        <p:txBody>
+          <a:bodyPr wrap="square" lIns="0" tIns="0" rIns="0" bIns="0" rtlCol="0" anchor="ctr"/>
+          <a:lstStyle/>
+          <a:p>
+            <a:pPr algn="ctr" indent="0" marL="0">
+              <a:buNone/>
+            </a:pPr>
+            <a:r>
+              <a:rPr lang="en-US" sz="850" dirty="0">
+                <a:solidFill>
+                  <a:srgbClr val="58635A"/>
+                </a:solidFill>
+                <a:latin typeface="Calibri" pitchFamily="34" charset="0"/>
+                <a:ea typeface="Calibri" pitchFamily="34" charset="-122"/>
+                <a:cs typeface="Calibri" pitchFamily="34" charset="-120"/>
+              </a:rPr>
+              <a:t>metin</a:t>
+            </a:r>
+            <a:endParaRPr lang="en-US" sz="850" dirty="0"/>
+          </a:p>
+        </p:txBody>
+      </p:sp>
+      <p:sp>
+        <p:nvSpPr>
+          <p:cNvPr id="34" name="Shape 32"/>
+          <p:cNvSpPr/>
+          <p:nvPr/>
+        </p:nvSpPr>
+        <p:spPr>
+          <a:xfrm>
+            <a:off x="4517136" y="4306824"/>
+            <a:ext cx="1545336" cy="1005840"/>
+          </a:xfrm>
+          <a:prstGeom prst="rect">
+            <a:avLst/>
+          </a:prstGeom>
+          <a:solidFill>
+            <a:srgbClr val="FFFFFF"/>
+          </a:solidFill>
+          <a:ln w="9525">
+            <a:solidFill>
+              <a:srgbClr val="58635A"/>
+            </a:solidFill>
+            <a:prstDash val="solid"/>
+          </a:ln>
+        </p:spPr>
+      </p:sp>
+      <p:sp>
+        <p:nvSpPr>
+          <p:cNvPr id="35" name="Text 33"/>
+          <p:cNvSpPr/>
+          <p:nvPr/>
+        </p:nvSpPr>
+        <p:spPr>
+          <a:xfrm>
+            <a:off x="4517136" y="4306824"/>
+            <a:ext cx="1545336" cy="1005840"/>
+          </a:xfrm>
+          <a:prstGeom prst="rect">
+            <a:avLst/>
+          </a:prstGeom>
+          <a:noFill/>
+          <a:ln/>
+        </p:spPr>
+        <p:txBody>
+          <a:bodyPr wrap="square" lIns="0" tIns="0" rIns="0" bIns="0" rtlCol="0" anchor="ctr"/>
+          <a:lstStyle/>
+          <a:p>
+            <a:pPr algn="ctr" indent="0" marL="0">
+              <a:buNone/>
+            </a:pPr>
+            <a:r>
+              <a:rPr lang="en-US" sz="850" dirty="0">
+                <a:solidFill>
+                  <a:srgbClr val="58635A"/>
+                </a:solidFill>
+                <a:latin typeface="Calibri" pitchFamily="34" charset="0"/>
+                <a:ea typeface="Calibri" pitchFamily="34" charset="-122"/>
+                <a:cs typeface="Calibri" pitchFamily="34" charset="-120"/>
+              </a:rPr>
+              <a:t>metin</a:t>
+            </a:r>
+            <a:endParaRPr lang="en-US" sz="850" dirty="0"/>
+          </a:p>
+        </p:txBody>
+      </p:sp>
+      <p:sp>
+        <p:nvSpPr>
+          <p:cNvPr id="36" name="Shape 34"/>
+          <p:cNvSpPr/>
+          <p:nvPr/>
+        </p:nvSpPr>
+        <p:spPr>
+          <a:xfrm>
+            <a:off x="6135624" y="4306824"/>
+            <a:ext cx="1545336" cy="1005840"/>
+          </a:xfrm>
+          <a:prstGeom prst="rect">
+            <a:avLst/>
+          </a:prstGeom>
+          <a:solidFill>
+            <a:srgbClr val="F3EDDE"/>
+          </a:solidFill>
+          <a:ln w="9525">
+            <a:solidFill>
+              <a:srgbClr val="58635A"/>
+            </a:solidFill>
+            <a:prstDash val="solid"/>
+          </a:ln>
+        </p:spPr>
+      </p:sp>
+      <p:sp>
+        <p:nvSpPr>
+          <p:cNvPr id="37" name="Text 35"/>
+          <p:cNvSpPr/>
+          <p:nvPr/>
+        </p:nvSpPr>
+        <p:spPr>
+          <a:xfrm>
+            <a:off x="6135624" y="4306824"/>
+            <a:ext cx="1545336" cy="1005840"/>
+          </a:xfrm>
+          <a:prstGeom prst="rect">
+            <a:avLst/>
+          </a:prstGeom>
+          <a:noFill/>
+          <a:ln/>
+        </p:spPr>
+        <p:txBody>
+          <a:bodyPr wrap="square" lIns="0" tIns="0" rIns="0" bIns="0" rtlCol="0" anchor="ctr"/>
+          <a:lstStyle/>
+          <a:p>
+            <a:pPr algn="ctr" indent="0" marL="0">
+              <a:buNone/>
+            </a:pPr>
+            <a:r>
+              <a:rPr lang="en-US" sz="850" dirty="0">
+                <a:solidFill>
+                  <a:srgbClr val="58635A"/>
+                </a:solidFill>
+                <a:latin typeface="Calibri" pitchFamily="34" charset="0"/>
+                <a:ea typeface="Calibri" pitchFamily="34" charset="-122"/>
+                <a:cs typeface="Calibri" pitchFamily="34" charset="-120"/>
+              </a:rPr>
+              <a:t>mockup</a:t>
+            </a:r>
+            <a:endParaRPr lang="en-US" sz="850" dirty="0"/>
+          </a:p>
+        </p:txBody>
+      </p:sp>
+      <p:sp>
+        <p:nvSpPr>
+          <p:cNvPr id="38" name="Text 36"/>
+          <p:cNvSpPr/>
+          <p:nvPr/>
+        </p:nvSpPr>
+        <p:spPr>
+          <a:xfrm>
+            <a:off x="4407408" y="5577840"/>
+            <a:ext cx="3383280" cy="274320"/>
+          </a:xfrm>
+          <a:prstGeom prst="rect">
+            <a:avLst/>
+          </a:prstGeom>
+          <a:noFill/>
+          <a:ln/>
+        </p:spPr>
+        <p:txBody>
+          <a:bodyPr wrap="square" lIns="0" tIns="0" rIns="0" bIns="0" rtlCol="0" anchor="ctr"/>
+          <a:lstStyle/>
+          <a:p>
+            <a:pPr algn="ctr" indent="0" marL="0">
+              <a:buNone/>
+            </a:pPr>
+            <a:r>
+              <a:rPr lang="en-US" sz="1200" b="1" dirty="0">
+                <a:solidFill>
+                  <a:srgbClr val="1E2A24"/>
+                </a:solidFill>
+                <a:latin typeface="Calibri" pitchFamily="34" charset="0"/>
+                <a:ea typeface="Calibri" pitchFamily="34" charset="-122"/>
+                <a:cs typeface="Calibri" pitchFamily="34" charset="-120"/>
+              </a:rPr>
+              <a:t>Özellikler  /ozellikler · 6 bölüm zigzag</a:t>
+            </a:r>
+            <a:endParaRPr lang="en-US" sz="1200" dirty="0"/>
+          </a:p>
+        </p:txBody>
+      </p:sp>
+      <p:sp>
+        <p:nvSpPr>
+          <p:cNvPr id="39" name="Shape 37"/>
+          <p:cNvSpPr/>
+          <p:nvPr/>
+        </p:nvSpPr>
+        <p:spPr>
+          <a:xfrm>
+            <a:off x="8266176" y="1691640"/>
+            <a:ext cx="3383280" cy="3794760"/>
+          </a:xfrm>
+          <a:prstGeom prst="rect">
+            <a:avLst/>
+          </a:prstGeom>
+          <a:solidFill>
+            <a:srgbClr val="FFFFFF"/>
+          </a:solidFill>
+          <a:ln w="15875">
+            <a:solidFill>
+              <a:srgbClr val="1E2A24"/>
+            </a:solidFill>
+            <a:prstDash val="solid"/>
+          </a:ln>
+        </p:spPr>
+      </p:sp>
+      <p:sp>
+        <p:nvSpPr>
+          <p:cNvPr id="40" name="Shape 38"/>
+          <p:cNvSpPr/>
+          <p:nvPr/>
+        </p:nvSpPr>
+        <p:spPr>
+          <a:xfrm>
+            <a:off x="8375904" y="1801368"/>
+            <a:ext cx="3163824" cy="274320"/>
+          </a:xfrm>
+          <a:prstGeom prst="rect">
+            <a:avLst/>
+          </a:prstGeom>
+          <a:solidFill>
+            <a:srgbClr val="FFFFFF"/>
+          </a:solidFill>
+          <a:ln w="9525">
+            <a:solidFill>
+              <a:srgbClr val="58635A"/>
+            </a:solidFill>
+            <a:prstDash val="solid"/>
+          </a:ln>
+        </p:spPr>
+      </p:sp>
+      <p:sp>
+        <p:nvSpPr>
+          <p:cNvPr id="41" name="Text 39"/>
+          <p:cNvSpPr/>
+          <p:nvPr/>
+        </p:nvSpPr>
+        <p:spPr>
+          <a:xfrm>
+            <a:off x="8375904" y="1801368"/>
+            <a:ext cx="3163824" cy="274320"/>
+          </a:xfrm>
+          <a:prstGeom prst="rect">
+            <a:avLst/>
+          </a:prstGeom>
+          <a:noFill/>
+          <a:ln/>
+        </p:spPr>
+        <p:txBody>
+          <a:bodyPr wrap="square" lIns="0" tIns="0" rIns="0" bIns="0" rtlCol="0" anchor="ctr"/>
+          <a:lstStyle/>
+          <a:p>
+            <a:pPr algn="ctr" indent="0" marL="0">
+              <a:buNone/>
+            </a:pPr>
+            <a:r>
+              <a:rPr lang="en-US" sz="850" dirty="0">
+                <a:solidFill>
+                  <a:srgbClr val="58635A"/>
+                </a:solidFill>
+                <a:latin typeface="Calibri" pitchFamily="34" charset="0"/>
+                <a:ea typeface="Calibri" pitchFamily="34" charset="-122"/>
+                <a:cs typeface="Calibri" pitchFamily="34" charset="-120"/>
+              </a:rPr>
+              <a:t>başlık</a:t>
+            </a:r>
+            <a:endParaRPr lang="en-US" sz="850" dirty="0"/>
+          </a:p>
+        </p:txBody>
+      </p:sp>
+      <p:sp>
+        <p:nvSpPr>
+          <p:cNvPr id="42" name="Shape 40"/>
+          <p:cNvSpPr/>
+          <p:nvPr/>
+        </p:nvSpPr>
+        <p:spPr>
+          <a:xfrm>
+            <a:off x="8375904" y="2148840"/>
+            <a:ext cx="3163824" cy="1188720"/>
+          </a:xfrm>
+          <a:prstGeom prst="rect">
+            <a:avLst/>
+          </a:prstGeom>
+          <a:solidFill>
+            <a:srgbClr val="FFFFFF"/>
+          </a:solidFill>
+          <a:ln w="9525">
+            <a:solidFill>
+              <a:srgbClr val="58635A"/>
+            </a:solidFill>
+            <a:prstDash val="solid"/>
+          </a:ln>
+        </p:spPr>
+      </p:sp>
+      <p:sp>
+        <p:nvSpPr>
+          <p:cNvPr id="43" name="Text 41"/>
+          <p:cNvSpPr/>
+          <p:nvPr/>
+        </p:nvSpPr>
+        <p:spPr>
+          <a:xfrm>
+            <a:off x="8375904" y="2148840"/>
+            <a:ext cx="3163824" cy="1188720"/>
+          </a:xfrm>
+          <a:prstGeom prst="rect">
+            <a:avLst/>
+          </a:prstGeom>
+          <a:noFill/>
+          <a:ln/>
+        </p:spPr>
+        <p:txBody>
+          <a:bodyPr wrap="square" lIns="0" tIns="0" rIns="0" bIns="0" rtlCol="0" anchor="ctr"/>
+          <a:lstStyle/>
+          <a:p>
+            <a:pPr algn="ctr" indent="0" marL="0">
+              <a:buNone/>
+            </a:pPr>
+            <a:r>
+              <a:rPr lang="en-US" sz="850" dirty="0">
+                <a:solidFill>
+                  <a:srgbClr val="58635A"/>
+                </a:solidFill>
+                <a:latin typeface="Calibri" pitchFamily="34" charset="0"/>
+                <a:ea typeface="Calibri" pitchFamily="34" charset="-122"/>
+                <a:cs typeface="Calibri" pitchFamily="34" charset="-120"/>
+              </a:rPr>
+              <a:t>hakkında — 2-3 paragraf</a:t>
+            </a:r>
+            <a:endParaRPr lang="en-US" sz="850" dirty="0"/>
+          </a:p>
+        </p:txBody>
+      </p:sp>
+      <p:sp>
+        <p:nvSpPr>
+          <p:cNvPr id="44" name="Shape 42"/>
+          <p:cNvSpPr/>
+          <p:nvPr/>
+        </p:nvSpPr>
+        <p:spPr>
+          <a:xfrm>
+            <a:off x="8375904" y="3410712"/>
+            <a:ext cx="3163824" cy="914400"/>
+          </a:xfrm>
+          <a:prstGeom prst="rect">
+            <a:avLst/>
+          </a:prstGeom>
+          <a:solidFill>
+            <a:srgbClr val="F3EDDE"/>
+          </a:solidFill>
+          <a:ln w="9525">
+            <a:solidFill>
+              <a:srgbClr val="58635A"/>
+            </a:solidFill>
+            <a:prstDash val="solid"/>
+          </a:ln>
+        </p:spPr>
+      </p:sp>
+      <p:sp>
+        <p:nvSpPr>
+          <p:cNvPr id="45" name="Text 43"/>
+          <p:cNvSpPr/>
+          <p:nvPr/>
+        </p:nvSpPr>
+        <p:spPr>
+          <a:xfrm>
+            <a:off x="8375904" y="3410712"/>
+            <a:ext cx="3163824" cy="914400"/>
+          </a:xfrm>
+          <a:prstGeom prst="rect">
+            <a:avLst/>
+          </a:prstGeom>
+          <a:noFill/>
+          <a:ln/>
+        </p:spPr>
+        <p:txBody>
+          <a:bodyPr wrap="square" lIns="0" tIns="0" rIns="0" bIns="0" rtlCol="0" anchor="ctr"/>
+          <a:lstStyle/>
+          <a:p>
+            <a:pPr algn="ctr" indent="0" marL="0">
+              <a:buNone/>
+            </a:pPr>
+            <a:r>
+              <a:rPr lang="en-US" sz="850" dirty="0">
+                <a:solidFill>
+                  <a:srgbClr val="58635A"/>
+                </a:solidFill>
+                <a:latin typeface="Calibri" pitchFamily="34" charset="0"/>
+                <a:ea typeface="Calibri" pitchFamily="34" charset="-122"/>
+                <a:cs typeface="Calibri" pitchFamily="34" charset="-120"/>
+              </a:rPr>
+              <a:t>yol haritası (yakında dili)</a:t>
+            </a:r>
+            <a:endParaRPr lang="en-US" sz="850" dirty="0"/>
+          </a:p>
+        </p:txBody>
+      </p:sp>
+      <p:sp>
+        <p:nvSpPr>
+          <p:cNvPr id="46" name="Shape 44"/>
+          <p:cNvSpPr/>
+          <p:nvPr/>
+        </p:nvSpPr>
+        <p:spPr>
+          <a:xfrm>
+            <a:off x="8375904" y="4398264"/>
+            <a:ext cx="3163824" cy="969264"/>
+          </a:xfrm>
+          <a:prstGeom prst="rect">
+            <a:avLst/>
+          </a:prstGeom>
+          <a:solidFill>
+            <a:srgbClr val="FFFFFF"/>
+          </a:solidFill>
+          <a:ln w="9525">
+            <a:solidFill>
+              <a:srgbClr val="58635A"/>
+            </a:solidFill>
+            <a:prstDash val="solid"/>
+          </a:ln>
+        </p:spPr>
+      </p:sp>
+      <p:sp>
+        <p:nvSpPr>
+          <p:cNvPr id="47" name="Text 45"/>
+          <p:cNvSpPr/>
+          <p:nvPr/>
+        </p:nvSpPr>
+        <p:spPr>
+          <a:xfrm>
+            <a:off x="8375904" y="4398264"/>
+            <a:ext cx="3163824" cy="969264"/>
+          </a:xfrm>
+          <a:prstGeom prst="rect">
+            <a:avLst/>
+          </a:prstGeom>
+          <a:noFill/>
+          <a:ln/>
+        </p:spPr>
+        <p:txBody>
+          <a:bodyPr wrap="square" lIns="0" tIns="0" rIns="0" bIns="0" rtlCol="0" anchor="ctr"/>
+          <a:lstStyle/>
+          <a:p>
+            <a:pPr algn="ctr" indent="0" marL="0">
+              <a:buNone/>
+            </a:pPr>
+            <a:r>
+              <a:rPr lang="en-US" sz="850" dirty="0">
+                <a:solidFill>
+                  <a:srgbClr val="58635A"/>
+                </a:solidFill>
+                <a:latin typeface="Calibri" pitchFamily="34" charset="0"/>
+                <a:ea typeface="Calibri" pitchFamily="34" charset="-122"/>
+                <a:cs typeface="Calibri" pitchFamily="34" charset="-120"/>
+              </a:rPr>
+              <a:t>iletişim — e-posta, adres</a:t>
+            </a:r>
+            <a:endParaRPr lang="en-US" sz="850" dirty="0"/>
+          </a:p>
+        </p:txBody>
+      </p:sp>
+      <p:sp>
+        <p:nvSpPr>
+          <p:cNvPr id="48" name="Text 46"/>
+          <p:cNvSpPr/>
+          <p:nvPr/>
+        </p:nvSpPr>
+        <p:spPr>
+          <a:xfrm>
+            <a:off x="8266176" y="5577840"/>
+            <a:ext cx="3383280" cy="274320"/>
+          </a:xfrm>
+          <a:prstGeom prst="rect">
+            <a:avLst/>
+          </a:prstGeom>
+          <a:noFill/>
+          <a:ln/>
+        </p:spPr>
+        <p:txBody>
+          <a:bodyPr wrap="square" lIns="0" tIns="0" rIns="0" bIns="0" rtlCol="0" anchor="ctr"/>
+          <a:lstStyle/>
+          <a:p>
+            <a:pPr algn="ctr" indent="0" marL="0">
+              <a:buNone/>
+            </a:pPr>
+            <a:r>
+              <a:rPr lang="en-US" sz="1200" b="1" dirty="0">
+                <a:solidFill>
+                  <a:srgbClr val="1E2A24"/>
+                </a:solidFill>
+                <a:latin typeface="Calibri" pitchFamily="34" charset="0"/>
+                <a:ea typeface="Calibri" pitchFamily="34" charset="-122"/>
+                <a:cs typeface="Calibri" pitchFamily="34" charset="-120"/>
+              </a:rPr>
+              <a:t>Hakkında  /hakkinda</a:t>
+            </a:r>
+            <a:endParaRPr lang="en-US" sz="1200" dirty="0"/>
+          </a:p>
+        </p:txBody>
+      </p:sp>
+      <p:sp>
+        <p:nvSpPr>
+          <p:cNvPr id="49" name="Text 47"/>
+          <p:cNvSpPr/>
+          <p:nvPr/>
+        </p:nvSpPr>
+        <p:spPr>
+          <a:xfrm>
+            <a:off x="548640" y="6172200"/>
+            <a:ext cx="11064240" cy="320040"/>
+          </a:xfrm>
+          <a:prstGeom prst="rect">
+            <a:avLst/>
+          </a:prstGeom>
+          <a:noFill/>
+          <a:ln/>
+        </p:spPr>
+        <p:txBody>
+          <a:bodyPr wrap="square" lIns="0" tIns="0" rIns="0" bIns="0" rtlCol="0" anchor="ctr"/>
+          <a:lstStyle/>
+          <a:p>
+            <a:pPr algn="ctr" indent="0" marL="0">
+              <a:buNone/>
+            </a:pPr>
+            <a:r>
+              <a:rPr lang="en-US" sz="1150" i="1" dirty="0">
+                <a:solidFill>
+                  <a:srgbClr val="58635A"/>
+                </a:solidFill>
+                <a:latin typeface="Calibri" pitchFamily="34" charset="0"/>
+                <a:ea typeface="Calibri" pitchFamily="34" charset="-122"/>
+                <a:cs typeface="Calibri" pitchFamily="34" charset="-120"/>
+              </a:rPr>
+              <a:t>Kural: sayfa başına tek h1 · başlık hiyerarşisi atlanmaz · mobil öncelikli (640 / 900 / 1200px)</a:t>
+            </a:r>
+            <a:endParaRPr lang="en-US" sz="1150" dirty="0"/>
+          </a:p>
+        </p:txBody>
+      </p:sp>
+    </p:spTree>
+  </p:cSld>
+  <p:clrMapOvr>
+    <a:masterClrMapping/>
+  </p:clrMapOvr>
+</p:sld>
+</file>
+
+<file path=ppt/slides/slide5.xml><?xml version="1.0" encoding="utf-8"?>
+<p:sld xmlns:a="http://schemas.openxmlformats.org/drawingml/2006/main" xmlns:r="http://schemas.openxmlformats.org/officeDocument/2006/relationships" xmlns:p="http://schemas.openxmlformats.org/presentationml/2006/main">
+  <p:cSld name="Slide 5">
+    <p:bg>
+      <p:bgPr>
+        <a:solidFill>
+          <a:srgbClr val="FAF6EC"/>
+        </a:solidFill>
+      </p:bgPr>
+    </p:bg>
+    <p:spTree>
+      <p:nvGrpSpPr>
+        <p:cNvPr id="1" name=""/>
+        <p:cNvGrpSpPr/>
+        <p:nvPr/>
+      </p:nvGrpSpPr>
+      <p:grpSpPr>
+        <a:xfrm>
+          <a:off x="0" y="0"/>
+          <a:ext cx="0" cy="0"/>
+          <a:chOff x="0" y="0"/>
+          <a:chExt cx="0" cy="0"/>
+        </a:xfrm>
+      </p:grpSpPr>
+      <p:sp>
+        <p:nvSpPr>
+          <p:cNvPr id="2" name="Text 0"/>
+          <p:cNvSpPr/>
+          <p:nvPr/>
+        </p:nvSpPr>
+        <p:spPr>
+          <a:xfrm>
+            <a:off x="548640" y="384048"/>
+            <a:ext cx="4572000" cy="274320"/>
+          </a:xfrm>
+          <a:prstGeom prst="rect">
+            <a:avLst/>
+          </a:prstGeom>
+          <a:noFill/>
+          <a:ln/>
+        </p:spPr>
+        <p:txBody>
+          <a:bodyPr wrap="square" lIns="0" tIns="0" rIns="0" bIns="0" rtlCol="0" anchor="ctr"/>
+          <a:lstStyle/>
+          <a:p>
+            <a:pPr indent="0" marL="0">
+              <a:buNone/>
+            </a:pPr>
+            <a:r>
+              <a:rPr lang="en-US" sz="1200" b="1" spc="300" kern="0" dirty="0">
+                <a:solidFill>
+                  <a:srgbClr val="17604C"/>
+                </a:solidFill>
+                <a:latin typeface="Calibri" pitchFamily="34" charset="0"/>
+                <a:ea typeface="Calibri" pitchFamily="34" charset="-122"/>
+                <a:cs typeface="Calibri" pitchFamily="34" charset="-120"/>
+              </a:rPr>
+              <a:t>GÖREV 4 / 5</a:t>
+            </a:r>
+            <a:endParaRPr lang="en-US" sz="1200" dirty="0"/>
+          </a:p>
+        </p:txBody>
+      </p:sp>
+      <p:sp>
+        <p:nvSpPr>
+          <p:cNvPr id="3" name="Text 1"/>
+          <p:cNvSpPr/>
+          <p:nvPr/>
+        </p:nvSpPr>
+        <p:spPr>
+          <a:xfrm>
+            <a:off x="548640" y="658368"/>
+            <a:ext cx="11064240" cy="640080"/>
+          </a:xfrm>
+          <a:prstGeom prst="rect">
+            <a:avLst/>
+          </a:prstGeom>
+          <a:noFill/>
+          <a:ln/>
+        </p:spPr>
+        <p:txBody>
+          <a:bodyPr wrap="square" lIns="0" tIns="0" rIns="0" bIns="0" rtlCol="0" anchor="ctr"/>
+          <a:lstStyle/>
+          <a:p>
+            <a:pPr indent="0" marL="0">
+              <a:buNone/>
+            </a:pPr>
+            <a:r>
+              <a:rPr lang="en-US" sz="3000" b="1" dirty="0">
+                <a:solidFill>
+                  <a:srgbClr val="1E2A24"/>
+                </a:solidFill>
+                <a:latin typeface="Cambria" pitchFamily="34" charset="0"/>
+                <a:ea typeface="Cambria" pitchFamily="34" charset="-122"/>
+                <a:cs typeface="Cambria" pitchFamily="34" charset="-120"/>
+              </a:rPr>
+              <a:t>Tasarım Dili</a:t>
+            </a:r>
+            <a:endParaRPr lang="en-US" sz="3000" dirty="0"/>
+          </a:p>
+        </p:txBody>
+      </p:sp>
+      <p:sp>
+        <p:nvSpPr>
+          <p:cNvPr id="4" name="Text 2"/>
+          <p:cNvSpPr/>
+          <p:nvPr/>
+        </p:nvSpPr>
+        <p:spPr>
+          <a:xfrm>
+            <a:off x="548640" y="1645920"/>
+            <a:ext cx="4572000" cy="274320"/>
+          </a:xfrm>
+          <a:prstGeom prst="rect">
+            <a:avLst/>
+          </a:prstGeom>
+          <a:noFill/>
+          <a:ln/>
+        </p:spPr>
+        <p:txBody>
+          <a:bodyPr wrap="square" lIns="0" tIns="0" rIns="0" bIns="0" rtlCol="0" anchor="ctr"/>
+          <a:lstStyle/>
+          <a:p>
+            <a:pPr indent="0" marL="0">
+              <a:buNone/>
+            </a:pPr>
+            <a:r>
+              <a:rPr lang="en-US" sz="1100" b="1" spc="300" kern="0" dirty="0">
+                <a:solidFill>
+                  <a:srgbClr val="17604C"/>
+                </a:solidFill>
+                <a:latin typeface="Calibri" pitchFamily="34" charset="0"/>
+                <a:ea typeface="Calibri" pitchFamily="34" charset="-122"/>
+                <a:cs typeface="Calibri" pitchFamily="34" charset="-120"/>
+              </a:rPr>
+              <a:t>RENK PALETİ</a:t>
+            </a:r>
+            <a:endParaRPr lang="en-US" sz="1100" dirty="0"/>
+          </a:p>
+        </p:txBody>
+      </p:sp>
+      <p:sp>
+        <p:nvSpPr>
+          <p:cNvPr id="5" name="Shape 3"/>
+          <p:cNvSpPr/>
+          <p:nvPr/>
+        </p:nvSpPr>
+        <p:spPr>
+          <a:xfrm>
+            <a:off x="548640" y="2011680"/>
+            <a:ext cx="2468880" cy="685800"/>
+          </a:xfrm>
+          <a:prstGeom prst="roundRect">
+            <a:avLst>
+              <a:gd name="adj" fmla="val 10667"/>
+            </a:avLst>
+          </a:prstGeom>
+          <a:solidFill>
+            <a:srgbClr val="FAF6EC"/>
+          </a:solidFill>
+          <a:ln w="12700">
+            <a:solidFill>
+              <a:srgbClr val="E8E1D2"/>
+            </a:solidFill>
+            <a:prstDash val="solid"/>
+          </a:ln>
+        </p:spPr>
+      </p:sp>
+      <p:sp>
+        <p:nvSpPr>
+          <p:cNvPr id="6" name="Text 4"/>
+          <p:cNvSpPr/>
+          <p:nvPr/>
+        </p:nvSpPr>
+        <p:spPr>
+          <a:xfrm>
+            <a:off x="548640" y="2724912"/>
+            <a:ext cx="2468880" cy="274320"/>
+          </a:xfrm>
+          <a:prstGeom prst="rect">
+            <a:avLst/>
+          </a:prstGeom>
+          <a:noFill/>
+          <a:ln/>
+        </p:spPr>
+        <p:txBody>
+          <a:bodyPr wrap="square" lIns="0" tIns="0" rIns="0" bIns="0" rtlCol="0" anchor="ctr"/>
+          <a:lstStyle/>
+          <a:p>
+            <a:pPr indent="0" marL="0">
+              <a:buNone/>
+            </a:pPr>
+            <a:r>
+              <a:rPr lang="en-US" sz="1100" b="1" dirty="0">
+                <a:solidFill>
+                  <a:srgbClr val="1E2A24"/>
+                </a:solidFill>
+                <a:latin typeface="Calibri" pitchFamily="34" charset="0"/>
+                <a:ea typeface="Calibri" pitchFamily="34" charset="-122"/>
+                <a:cs typeface="Calibri" pitchFamily="34" charset="-120"/>
+              </a:rPr>
+              <a:t>Krem zemin  </a:t>
+            </a:r>
+            <a:pPr indent="0" marL="0">
+              <a:buNone/>
+            </a:pPr>
+            <a:r>
+              <a:rPr lang="en-US" sz="1000" dirty="0">
+                <a:solidFill>
+                  <a:srgbClr val="58635A"/>
+                </a:solidFill>
+                <a:latin typeface="Calibri" pitchFamily="34" charset="0"/>
+                <a:ea typeface="Calibri" pitchFamily="34" charset="-122"/>
+                <a:cs typeface="Calibri" pitchFamily="34" charset="-120"/>
+              </a:rPr>
+              <a:t>#FAF6EC</a:t>
+            </a:r>
+            <a:endParaRPr lang="en-US" sz="1100" dirty="0"/>
+          </a:p>
+        </p:txBody>
+      </p:sp>
+      <p:sp>
+        <p:nvSpPr>
+          <p:cNvPr id="7" name="Shape 5"/>
+          <p:cNvSpPr/>
+          <p:nvPr/>
+        </p:nvSpPr>
+        <p:spPr>
+          <a:xfrm>
+            <a:off x="3246120" y="2011680"/>
+            <a:ext cx="2468880" cy="685800"/>
+          </a:xfrm>
+          <a:prstGeom prst="roundRect">
+            <a:avLst>
+              <a:gd name="adj" fmla="val 10667"/>
+            </a:avLst>
+          </a:prstGeom>
+          <a:solidFill>
+            <a:srgbClr val="17604C"/>
+          </a:solidFill>
+          <a:ln/>
+        </p:spPr>
+      </p:sp>
+      <p:sp>
+        <p:nvSpPr>
+          <p:cNvPr id="8" name="Text 6"/>
+          <p:cNvSpPr/>
+          <p:nvPr/>
+        </p:nvSpPr>
+        <p:spPr>
+          <a:xfrm>
+            <a:off x="3246120" y="2724912"/>
+            <a:ext cx="2468880" cy="274320"/>
+          </a:xfrm>
+          <a:prstGeom prst="rect">
+            <a:avLst/>
+          </a:prstGeom>
+          <a:noFill/>
+          <a:ln/>
+        </p:spPr>
+        <p:txBody>
+          <a:bodyPr wrap="square" lIns="0" tIns="0" rIns="0" bIns="0" rtlCol="0" anchor="ctr"/>
+          <a:lstStyle/>
+          <a:p>
+            <a:pPr indent="0" marL="0">
+              <a:buNone/>
+            </a:pPr>
+            <a:r>
+              <a:rPr lang="en-US" sz="1100" b="1" dirty="0">
+                <a:solidFill>
+                  <a:srgbClr val="1E2A24"/>
+                </a:solidFill>
+                <a:latin typeface="Calibri" pitchFamily="34" charset="0"/>
+                <a:ea typeface="Calibri" pitchFamily="34" charset="-122"/>
+                <a:cs typeface="Calibri" pitchFamily="34" charset="-120"/>
+              </a:rPr>
+              <a:t>Koyu yeşil (marka)  </a:t>
+            </a:r>
+            <a:pPr indent="0" marL="0">
+              <a:buNone/>
+            </a:pPr>
+            <a:r>
+              <a:rPr lang="en-US" sz="1000" dirty="0">
+                <a:solidFill>
+                  <a:srgbClr val="58635A"/>
+                </a:solidFill>
+                <a:latin typeface="Calibri" pitchFamily="34" charset="0"/>
+                <a:ea typeface="Calibri" pitchFamily="34" charset="-122"/>
+                <a:cs typeface="Calibri" pitchFamily="34" charset="-120"/>
+              </a:rPr>
+              <a:t>#17604C</a:t>
+            </a:r>
+            <a:endParaRPr lang="en-US" sz="1100" dirty="0"/>
+          </a:p>
+        </p:txBody>
+      </p:sp>
+      <p:sp>
+        <p:nvSpPr>
+          <p:cNvPr id="9" name="Shape 7"/>
+          <p:cNvSpPr/>
+          <p:nvPr/>
+        </p:nvSpPr>
+        <p:spPr>
+          <a:xfrm>
+            <a:off x="548640" y="3246120"/>
+            <a:ext cx="2468880" cy="685800"/>
+          </a:xfrm>
+          <a:prstGeom prst="roundRect">
+            <a:avLst>
+              <a:gd name="adj" fmla="val 10667"/>
+            </a:avLst>
+          </a:prstGeom>
+          <a:solidFill>
+            <a:srgbClr val="F0A93F"/>
+          </a:solidFill>
+          <a:ln/>
+        </p:spPr>
+      </p:sp>
+      <p:sp>
+        <p:nvSpPr>
+          <p:cNvPr id="10" name="Text 8"/>
+          <p:cNvSpPr/>
+          <p:nvPr/>
+        </p:nvSpPr>
+        <p:spPr>
+          <a:xfrm>
+            <a:off x="548640" y="3959352"/>
+            <a:ext cx="2468880" cy="274320"/>
+          </a:xfrm>
+          <a:prstGeom prst="rect">
+            <a:avLst/>
+          </a:prstGeom>
+          <a:noFill/>
+          <a:ln/>
+        </p:spPr>
+        <p:txBody>
+          <a:bodyPr wrap="square" lIns="0" tIns="0" rIns="0" bIns="0" rtlCol="0" anchor="ctr"/>
+          <a:lstStyle/>
+          <a:p>
+            <a:pPr indent="0" marL="0">
+              <a:buNone/>
+            </a:pPr>
+            <a:r>
+              <a:rPr lang="en-US" sz="1100" b="1" dirty="0">
+                <a:solidFill>
+                  <a:srgbClr val="1E2A24"/>
+                </a:solidFill>
+                <a:latin typeface="Calibri" pitchFamily="34" charset="0"/>
+                <a:ea typeface="Calibri" pitchFamily="34" charset="-122"/>
+                <a:cs typeface="Calibri" pitchFamily="34" charset="-120"/>
+              </a:rPr>
+              <a:t>Amber (eylem)  </a:t>
+            </a:r>
+            <a:pPr indent="0" marL="0">
+              <a:buNone/>
+            </a:pPr>
+            <a:r>
+              <a:rPr lang="en-US" sz="1000" dirty="0">
+                <a:solidFill>
+                  <a:srgbClr val="58635A"/>
+                </a:solidFill>
+                <a:latin typeface="Calibri" pitchFamily="34" charset="0"/>
+                <a:ea typeface="Calibri" pitchFamily="34" charset="-122"/>
+                <a:cs typeface="Calibri" pitchFamily="34" charset="-120"/>
+              </a:rPr>
+              <a:t>#F0A93F</a:t>
+            </a:r>
+            <a:endParaRPr lang="en-US" sz="1100" dirty="0"/>
+          </a:p>
+        </p:txBody>
+      </p:sp>
+      <p:sp>
+        <p:nvSpPr>
+          <p:cNvPr id="11" name="Shape 9"/>
+          <p:cNvSpPr/>
+          <p:nvPr/>
+        </p:nvSpPr>
+        <p:spPr>
+          <a:xfrm>
+            <a:off x="3246120" y="3246120"/>
+            <a:ext cx="2468880" cy="685800"/>
+          </a:xfrm>
+          <a:prstGeom prst="roundRect">
+            <a:avLst>
+              <a:gd name="adj" fmla="val 10667"/>
+            </a:avLst>
+          </a:prstGeom>
+          <a:solidFill>
+            <a:srgbClr val="10201B"/>
+          </a:solidFill>
+          <a:ln/>
+        </p:spPr>
+      </p:sp>
+      <p:sp>
+        <p:nvSpPr>
+          <p:cNvPr id="12" name="Text 10"/>
+          <p:cNvSpPr/>
+          <p:nvPr/>
+        </p:nvSpPr>
+        <p:spPr>
+          <a:xfrm>
+            <a:off x="3246120" y="3959352"/>
+            <a:ext cx="2468880" cy="274320"/>
+          </a:xfrm>
+          <a:prstGeom prst="rect">
+            <a:avLst/>
+          </a:prstGeom>
+          <a:noFill/>
+          <a:ln/>
+        </p:spPr>
+        <p:txBody>
+          <a:bodyPr wrap="square" lIns="0" tIns="0" rIns="0" bIns="0" rtlCol="0" anchor="ctr"/>
+          <a:lstStyle/>
+          <a:p>
+            <a:pPr indent="0" marL="0">
+              <a:buNone/>
+            </a:pPr>
+            <a:r>
+              <a:rPr lang="en-US" sz="1100" b="1" dirty="0">
+                <a:solidFill>
+                  <a:srgbClr val="1E2A24"/>
+                </a:solidFill>
+                <a:latin typeface="Calibri" pitchFamily="34" charset="0"/>
+                <a:ea typeface="Calibri" pitchFamily="34" charset="-122"/>
+                <a:cs typeface="Calibri" pitchFamily="34" charset="-120"/>
+              </a:rPr>
+              <a:t>Koyu harita  </a:t>
+            </a:r>
+            <a:pPr indent="0" marL="0">
+              <a:buNone/>
+            </a:pPr>
+            <a:r>
+              <a:rPr lang="en-US" sz="1000" dirty="0">
+                <a:solidFill>
+                  <a:srgbClr val="58635A"/>
+                </a:solidFill>
+                <a:latin typeface="Calibri" pitchFamily="34" charset="0"/>
+                <a:ea typeface="Calibri" pitchFamily="34" charset="-122"/>
+                <a:cs typeface="Calibri" pitchFamily="34" charset="-120"/>
+              </a:rPr>
+              <a:t>#10201B</a:t>
+            </a:r>
+            <a:endParaRPr lang="en-US" sz="1100" dirty="0"/>
+          </a:p>
+        </p:txBody>
+      </p:sp>
+      <p:sp>
+        <p:nvSpPr>
+          <p:cNvPr id="13" name="Shape 11"/>
+          <p:cNvSpPr/>
+          <p:nvPr/>
+        </p:nvSpPr>
+        <p:spPr>
+          <a:xfrm>
+            <a:off x="548640" y="4480560"/>
+            <a:ext cx="2468880" cy="685800"/>
+          </a:xfrm>
+          <a:prstGeom prst="roundRect">
+            <a:avLst>
+              <a:gd name="adj" fmla="val 10667"/>
+            </a:avLst>
+          </a:prstGeom>
+          <a:solidFill>
+            <a:srgbClr val="35C4B5"/>
+          </a:solidFill>
+          <a:ln/>
+        </p:spPr>
+      </p:sp>
+      <p:sp>
+        <p:nvSpPr>
+          <p:cNvPr id="14" name="Text 12"/>
+          <p:cNvSpPr/>
+          <p:nvPr/>
+        </p:nvSpPr>
+        <p:spPr>
+          <a:xfrm>
+            <a:off x="548640" y="5193792"/>
+            <a:ext cx="2468880" cy="274320"/>
+          </a:xfrm>
+          <a:prstGeom prst="rect">
+            <a:avLst/>
+          </a:prstGeom>
+          <a:noFill/>
+          <a:ln/>
+        </p:spPr>
+        <p:txBody>
+          <a:bodyPr wrap="square" lIns="0" tIns="0" rIns="0" bIns="0" rtlCol="0" anchor="ctr"/>
+          <a:lstStyle/>
+          <a:p>
+            <a:pPr indent="0" marL="0">
+              <a:buNone/>
+            </a:pPr>
+            <a:r>
+              <a:rPr lang="en-US" sz="1100" b="1" dirty="0">
+                <a:solidFill>
+                  <a:srgbClr val="1E2A24"/>
+                </a:solidFill>
+                <a:latin typeface="Calibri" pitchFamily="34" charset="0"/>
+                <a:ea typeface="Calibri" pitchFamily="34" charset="-122"/>
+                <a:cs typeface="Calibri" pitchFamily="34" charset="-120"/>
+              </a:rPr>
+              <a:t>Turkuaz (katman)  </a:t>
+            </a:r>
+            <a:pPr indent="0" marL="0">
+              <a:buNone/>
+            </a:pPr>
+            <a:r>
+              <a:rPr lang="en-US" sz="1000" dirty="0">
+                <a:solidFill>
+                  <a:srgbClr val="58635A"/>
+                </a:solidFill>
+                <a:latin typeface="Calibri" pitchFamily="34" charset="0"/>
+                <a:ea typeface="Calibri" pitchFamily="34" charset="-122"/>
+                <a:cs typeface="Calibri" pitchFamily="34" charset="-120"/>
+              </a:rPr>
+              <a:t>#35C4B5</a:t>
+            </a:r>
+            <a:endParaRPr lang="en-US" sz="1100" dirty="0"/>
+          </a:p>
+        </p:txBody>
+      </p:sp>
+      <p:sp>
+        <p:nvSpPr>
+          <p:cNvPr id="15" name="Shape 13"/>
+          <p:cNvSpPr/>
+          <p:nvPr/>
+        </p:nvSpPr>
+        <p:spPr>
+          <a:xfrm>
+            <a:off x="3246120" y="4480560"/>
+            <a:ext cx="2468880" cy="685800"/>
+          </a:xfrm>
+          <a:prstGeom prst="roundRect">
+            <a:avLst>
+              <a:gd name="adj" fmla="val 10667"/>
+            </a:avLst>
+          </a:prstGeom>
+          <a:solidFill>
+            <a:srgbClr val="1E2A24"/>
+          </a:solidFill>
+          <a:ln/>
+        </p:spPr>
+      </p:sp>
+      <p:sp>
+        <p:nvSpPr>
+          <p:cNvPr id="16" name="Text 14"/>
+          <p:cNvSpPr/>
+          <p:nvPr/>
+        </p:nvSpPr>
+        <p:spPr>
+          <a:xfrm>
+            <a:off x="3246120" y="5193792"/>
+            <a:ext cx="2468880" cy="274320"/>
+          </a:xfrm>
+          <a:prstGeom prst="rect">
+            <a:avLst/>
+          </a:prstGeom>
+          <a:noFill/>
+          <a:ln/>
+        </p:spPr>
+        <p:txBody>
+          <a:bodyPr wrap="square" lIns="0" tIns="0" rIns="0" bIns="0" rtlCol="0" anchor="ctr"/>
+          <a:lstStyle/>
+          <a:p>
+            <a:pPr indent="0" marL="0">
+              <a:buNone/>
+            </a:pPr>
+            <a:r>
+              <a:rPr lang="en-US" sz="1100" b="1" dirty="0">
+                <a:solidFill>
+                  <a:srgbClr val="1E2A24"/>
+                </a:solidFill>
+                <a:latin typeface="Calibri" pitchFamily="34" charset="0"/>
+                <a:ea typeface="Calibri" pitchFamily="34" charset="-122"/>
+                <a:cs typeface="Calibri" pitchFamily="34" charset="-120"/>
+              </a:rPr>
+              <a:t>Metin  </a:t>
+            </a:r>
+            <a:pPr indent="0" marL="0">
+              <a:buNone/>
+            </a:pPr>
+            <a:r>
+              <a:rPr lang="en-US" sz="1000" dirty="0">
+                <a:solidFill>
+                  <a:srgbClr val="58635A"/>
+                </a:solidFill>
+                <a:latin typeface="Calibri" pitchFamily="34" charset="0"/>
+                <a:ea typeface="Calibri" pitchFamily="34" charset="-122"/>
+                <a:cs typeface="Calibri" pitchFamily="34" charset="-120"/>
+              </a:rPr>
+              <a:t>#1E2A24</a:t>
+            </a:r>
+            <a:endParaRPr lang="en-US" sz="1100" dirty="0"/>
+          </a:p>
+        </p:txBody>
+      </p:sp>
+      <p:sp>
+        <p:nvSpPr>
+          <p:cNvPr id="17" name="Text 15"/>
+          <p:cNvSpPr/>
+          <p:nvPr/>
+        </p:nvSpPr>
+        <p:spPr>
+          <a:xfrm>
+            <a:off x="548640" y="5806440"/>
+            <a:ext cx="5394960" cy="548640"/>
+          </a:xfrm>
+          <a:prstGeom prst="rect">
+            <a:avLst/>
+          </a:prstGeom>
+          <a:noFill/>
+          <a:ln/>
+        </p:spPr>
+        <p:txBody>
+          <a:bodyPr wrap="square" lIns="0" tIns="0" rIns="0" bIns="0" rtlCol="0" anchor="ctr"/>
+          <a:lstStyle/>
+          <a:p>
+            <a:pPr indent="0" marL="0">
+              <a:buNone/>
+            </a:pPr>
+            <a:r>
+              <a:rPr lang="en-US" sz="1100" i="1" dirty="0">
+                <a:solidFill>
+                  <a:srgbClr val="58635A"/>
+                </a:solidFill>
+                <a:latin typeface="Calibri" pitchFamily="34" charset="0"/>
+                <a:ea typeface="Calibri" pitchFamily="34" charset="-122"/>
+                <a:cs typeface="Calibri" pitchFamily="34" charset="-120"/>
+              </a:rPr>
+              <a:t>Kural: renk kodu yalnızca tokens.css'te yazılır · metin/zemin kontrastı ≥ 4.5:1</a:t>
+            </a:r>
+            <a:endParaRPr lang="en-US" sz="1100" dirty="0"/>
+          </a:p>
+        </p:txBody>
+      </p:sp>
+      <p:sp>
+        <p:nvSpPr>
+          <p:cNvPr id="18" name="Text 16"/>
+          <p:cNvSpPr/>
+          <p:nvPr/>
+        </p:nvSpPr>
+        <p:spPr>
+          <a:xfrm>
+            <a:off x="6400800" y="1645920"/>
+            <a:ext cx="4572000" cy="274320"/>
+          </a:xfrm>
+          <a:prstGeom prst="rect">
+            <a:avLst/>
+          </a:prstGeom>
+          <a:noFill/>
+          <a:ln/>
+        </p:spPr>
+        <p:txBody>
+          <a:bodyPr wrap="square" lIns="0" tIns="0" rIns="0" bIns="0" rtlCol="0" anchor="ctr"/>
+          <a:lstStyle/>
+          <a:p>
+            <a:pPr indent="0" marL="0">
+              <a:buNone/>
+            </a:pPr>
+            <a:r>
+              <a:rPr lang="en-US" sz="1100" b="1" spc="300" kern="0" dirty="0">
+                <a:solidFill>
+                  <a:srgbClr val="17604C"/>
+                </a:solidFill>
+                <a:latin typeface="Calibri" pitchFamily="34" charset="0"/>
+                <a:ea typeface="Calibri" pitchFamily="34" charset="-122"/>
+                <a:cs typeface="Calibri" pitchFamily="34" charset="-120"/>
+              </a:rPr>
+              <a:t>TİPOGRAFİ</a:t>
+            </a:r>
+            <a:endParaRPr lang="en-US" sz="1100" dirty="0"/>
+          </a:p>
+        </p:txBody>
+      </p:sp>
+      <p:sp>
+        <p:nvSpPr>
+          <p:cNvPr id="19" name="Text 17"/>
+          <p:cNvSpPr/>
+          <p:nvPr/>
+        </p:nvSpPr>
+        <p:spPr>
+          <a:xfrm>
+            <a:off x="6400800" y="1920240"/>
+            <a:ext cx="1463040" cy="1005840"/>
+          </a:xfrm>
+          <a:prstGeom prst="rect">
+            <a:avLst/>
+          </a:prstGeom>
+          <a:noFill/>
+          <a:ln/>
+        </p:spPr>
+        <p:txBody>
+          <a:bodyPr wrap="square" lIns="0" tIns="0" rIns="0" bIns="0" rtlCol="0" anchor="ctr"/>
+          <a:lstStyle/>
+          <a:p>
+            <a:pPr indent="0" marL="0">
+              <a:buNone/>
+            </a:pPr>
+            <a:r>
+              <a:rPr lang="en-US" sz="5400" b="1" dirty="0">
+                <a:solidFill>
+                  <a:srgbClr val="1E2A24"/>
+                </a:solidFill>
+                <a:latin typeface="Cambria" pitchFamily="34" charset="0"/>
+                <a:ea typeface="Cambria" pitchFamily="34" charset="-122"/>
+                <a:cs typeface="Cambria" pitchFamily="34" charset="-120"/>
+              </a:rPr>
+              <a:t>Aa</a:t>
+            </a:r>
+            <a:endParaRPr lang="en-US" sz="5400" dirty="0"/>
+          </a:p>
+        </p:txBody>
+      </p:sp>
+      <p:sp>
+        <p:nvSpPr>
+          <p:cNvPr id="20" name="Text 18"/>
+          <p:cNvSpPr/>
+          <p:nvPr/>
+        </p:nvSpPr>
+        <p:spPr>
+          <a:xfrm>
+            <a:off x="7955280" y="2103120"/>
+            <a:ext cx="3657600" cy="822960"/>
+          </a:xfrm>
+          <a:prstGeom prst="rect">
+            <a:avLst/>
+          </a:prstGeom>
+          <a:noFill/>
+          <a:ln/>
+        </p:spPr>
+        <p:txBody>
+          <a:bodyPr wrap="square" lIns="0" tIns="0" rIns="0" bIns="0" rtlCol="0" anchor="ctr"/>
+          <a:lstStyle/>
+          <a:p>
+            <a:pPr indent="0" marL="0">
+              <a:buNone/>
+            </a:pPr>
+            <a:r>
+              <a:rPr lang="en-US" sz="1400" b="1" dirty="0">
+                <a:solidFill>
+                  <a:srgbClr val="1E2A24"/>
+                </a:solidFill>
+                <a:latin typeface="Calibri" pitchFamily="34" charset="0"/>
+                <a:ea typeface="Calibri" pitchFamily="34" charset="-122"/>
+                <a:cs typeface="Calibri" pitchFamily="34" charset="-120"/>
+              </a:rPr>
+              <a:t>Serif başlıklar</a:t>
+            </a:r>
+            <a:endParaRPr lang="en-US" sz="1400" dirty="0"/>
+          </a:p>
+          <a:p>
+            <a:pPr indent="0" marL="0">
+              <a:buNone/>
+            </a:pPr>
+            <a:r>
+              <a:rPr lang="en-US" sz="1150" dirty="0">
+                <a:solidFill>
+                  <a:srgbClr val="58635A"/>
+                </a:solidFill>
+                <a:latin typeface="Calibri" pitchFamily="34" charset="0"/>
+                <a:ea typeface="Calibri" pitchFamily="34" charset="-122"/>
+                <a:cs typeface="Calibri" pitchFamily="34" charset="-120"/>
+              </a:rPr>
+              <a:t>Georgia — zarif, kurumsal; vurgular italik ve koyu yeşil</a:t>
+            </a:r>
+            <a:endParaRPr lang="en-US" sz="1400" dirty="0"/>
+          </a:p>
+        </p:txBody>
+      </p:sp>
+      <p:sp>
+        <p:nvSpPr>
+          <p:cNvPr id="21" name="Text 19"/>
+          <p:cNvSpPr/>
+          <p:nvPr/>
+        </p:nvSpPr>
+        <p:spPr>
+          <a:xfrm>
+            <a:off x="6400800" y="3063240"/>
+            <a:ext cx="1463040" cy="914400"/>
+          </a:xfrm>
+          <a:prstGeom prst="rect">
+            <a:avLst/>
+          </a:prstGeom>
+          <a:noFill/>
+          <a:ln/>
+        </p:spPr>
+        <p:txBody>
+          <a:bodyPr wrap="square" lIns="0" tIns="0" rIns="0" bIns="0" rtlCol="0" anchor="ctr"/>
+          <a:lstStyle/>
+          <a:p>
+            <a:pPr indent="0" marL="0">
+              <a:buNone/>
+            </a:pPr>
+            <a:r>
+              <a:rPr lang="en-US" sz="4400" dirty="0">
+                <a:solidFill>
+                  <a:srgbClr val="1E2A24"/>
+                </a:solidFill>
+                <a:latin typeface="Calibri" pitchFamily="34" charset="0"/>
+                <a:ea typeface="Calibri" pitchFamily="34" charset="-122"/>
+                <a:cs typeface="Calibri" pitchFamily="34" charset="-120"/>
+              </a:rPr>
+              <a:t>Aa</a:t>
+            </a:r>
+            <a:endParaRPr lang="en-US" sz="4400" dirty="0"/>
+          </a:p>
+        </p:txBody>
+      </p:sp>
+      <p:sp>
+        <p:nvSpPr>
+          <p:cNvPr id="22" name="Text 20"/>
+          <p:cNvSpPr/>
+          <p:nvPr/>
+        </p:nvSpPr>
+        <p:spPr>
+          <a:xfrm>
+            <a:off x="7955280" y="3200400"/>
+            <a:ext cx="3657600" cy="822960"/>
+          </a:xfrm>
+          <a:prstGeom prst="rect">
+            <a:avLst/>
+          </a:prstGeom>
+          <a:noFill/>
+          <a:ln/>
+        </p:spPr>
+        <p:txBody>
+          <a:bodyPr wrap="square" lIns="0" tIns="0" rIns="0" bIns="0" rtlCol="0" anchor="ctr"/>
+          <a:lstStyle/>
+          <a:p>
+            <a:pPr indent="0" marL="0">
+              <a:buNone/>
+            </a:pPr>
+            <a:r>
+              <a:rPr lang="en-US" sz="1400" b="1" dirty="0">
+                <a:solidFill>
+                  <a:srgbClr val="1E2A24"/>
+                </a:solidFill>
+                <a:latin typeface="Calibri" pitchFamily="34" charset="0"/>
+                <a:ea typeface="Calibri" pitchFamily="34" charset="-122"/>
+                <a:cs typeface="Calibri" pitchFamily="34" charset="-120"/>
+              </a:rPr>
+              <a:t>Sans-serif gövde</a:t>
+            </a:r>
+            <a:endParaRPr lang="en-US" sz="1400" dirty="0"/>
+          </a:p>
+          <a:p>
+            <a:pPr indent="0" marL="0">
+              <a:buNone/>
+            </a:pPr>
+            <a:r>
+              <a:rPr lang="en-US" sz="1150" dirty="0">
+                <a:solidFill>
+                  <a:srgbClr val="58635A"/>
+                </a:solidFill>
+                <a:latin typeface="Calibri" pitchFamily="34" charset="0"/>
+                <a:ea typeface="Calibri" pitchFamily="34" charset="-122"/>
+                <a:cs typeface="Calibri" pitchFamily="34" charset="-120"/>
+              </a:rPr>
+              <a:t>Segoe UI — okunaklı; kalıcı yerel font 2. haftada eklenecek</a:t>
+            </a:r>
+            <a:endParaRPr lang="en-US" sz="1400" dirty="0"/>
+          </a:p>
+        </p:txBody>
+      </p:sp>
+      <p:sp>
+        <p:nvSpPr>
+          <p:cNvPr id="23" name="Text 21"/>
+          <p:cNvSpPr/>
+          <p:nvPr/>
+        </p:nvSpPr>
+        <p:spPr>
+          <a:xfrm>
+            <a:off x="6400800" y="4343400"/>
+            <a:ext cx="4572000" cy="274320"/>
+          </a:xfrm>
+          <a:prstGeom prst="rect">
+            <a:avLst/>
+          </a:prstGeom>
+          <a:noFill/>
+          <a:ln/>
+        </p:spPr>
+        <p:txBody>
+          <a:bodyPr wrap="square" lIns="0" tIns="0" rIns="0" bIns="0" rtlCol="0" anchor="ctr"/>
+          <a:lstStyle/>
+          <a:p>
+            <a:pPr indent="0" marL="0">
+              <a:buNone/>
+            </a:pPr>
+            <a:r>
+              <a:rPr lang="en-US" sz="1100" b="1" spc="300" kern="0" dirty="0">
+                <a:solidFill>
+                  <a:srgbClr val="17604C"/>
+                </a:solidFill>
+                <a:latin typeface="Calibri" pitchFamily="34" charset="0"/>
+                <a:ea typeface="Calibri" pitchFamily="34" charset="-122"/>
+                <a:cs typeface="Calibri" pitchFamily="34" charset="-120"/>
+              </a:rPr>
+              <a:t>LOGO</a:t>
+            </a:r>
+            <a:endParaRPr lang="en-US" sz="1100" dirty="0"/>
+          </a:p>
+        </p:txBody>
+      </p:sp>
+      <p:sp>
+        <p:nvSpPr>
+          <p:cNvPr id="24" name="Shape 22"/>
+          <p:cNvSpPr/>
+          <p:nvPr/>
+        </p:nvSpPr>
+        <p:spPr>
+          <a:xfrm>
+            <a:off x="6400800" y="4709160"/>
+            <a:ext cx="777240" cy="349758"/>
+          </a:xfrm>
+          <a:prstGeom prst="diamond">
+            <a:avLst/>
+          </a:prstGeom>
+          <a:solidFill>
+            <a:srgbClr val="17604C"/>
+          </a:solidFill>
+          <a:ln/>
+        </p:spPr>
+      </p:sp>
+      <p:sp>
+        <p:nvSpPr>
+          <p:cNvPr id="25" name="Shape 23"/>
+          <p:cNvSpPr/>
+          <p:nvPr/>
+        </p:nvSpPr>
+        <p:spPr>
+          <a:xfrm>
+            <a:off x="6400800" y="4926010"/>
+            <a:ext cx="777240" cy="349758"/>
+          </a:xfrm>
+          <a:prstGeom prst="diamond">
+            <a:avLst/>
+          </a:prstGeom>
+          <a:solidFill>
+            <a:srgbClr val="35C4B5">
+              <a:alpha val="85000"/>
+            </a:srgbClr>
+          </a:solidFill>
+          <a:ln/>
+        </p:spPr>
+      </p:sp>
+      <p:sp>
+        <p:nvSpPr>
+          <p:cNvPr id="26" name="Shape 24"/>
+          <p:cNvSpPr/>
+          <p:nvPr/>
+        </p:nvSpPr>
+        <p:spPr>
+          <a:xfrm>
+            <a:off x="6400800" y="5142860"/>
+            <a:ext cx="777240" cy="349758"/>
+          </a:xfrm>
+          <a:prstGeom prst="diamond">
+            <a:avLst/>
+          </a:prstGeom>
+          <a:solidFill>
+            <a:srgbClr val="F0A93F">
+              <a:alpha val="90000"/>
+            </a:srgbClr>
+          </a:solidFill>
+          <a:ln/>
+        </p:spPr>
+      </p:sp>
+      <p:sp>
+        <p:nvSpPr>
+          <p:cNvPr id="27" name="Text 25"/>
+          <p:cNvSpPr/>
+          <p:nvPr/>
+        </p:nvSpPr>
+        <p:spPr>
+          <a:xfrm>
+            <a:off x="7406640" y="4754880"/>
+            <a:ext cx="1463040" cy="731520"/>
+          </a:xfrm>
+          <a:prstGeom prst="rect">
+            <a:avLst/>
+          </a:prstGeom>
+          <a:noFill/>
+          <a:ln/>
+        </p:spPr>
+        <p:txBody>
+          <a:bodyPr wrap="square" lIns="0" tIns="0" rIns="0" bIns="0" rtlCol="0" anchor="ctr"/>
+          <a:lstStyle/>
+          <a:p>
+            <a:pPr indent="0" marL="0">
+              <a:buNone/>
+            </a:pPr>
+            <a:r>
+              <a:rPr lang="en-US" sz="3000" b="1" dirty="0">
+                <a:solidFill>
+                  <a:srgbClr val="1E2A24"/>
+                </a:solidFill>
+                <a:latin typeface="Cambria" pitchFamily="34" charset="0"/>
+                <a:ea typeface="Cambria" pitchFamily="34" charset="-122"/>
+                <a:cs typeface="Cambria" pitchFamily="34" charset="-120"/>
+              </a:rPr>
+              <a:t>CBS</a:t>
+            </a:r>
+            <a:endParaRPr lang="en-US" sz="3000" dirty="0"/>
+          </a:p>
+        </p:txBody>
+      </p:sp>
+      <p:sp>
+        <p:nvSpPr>
+          <p:cNvPr id="28" name="Text 26"/>
+          <p:cNvSpPr/>
+          <p:nvPr/>
+        </p:nvSpPr>
+        <p:spPr>
+          <a:xfrm>
+            <a:off x="8869680" y="4663440"/>
+            <a:ext cx="2743200" cy="1005840"/>
+          </a:xfrm>
+          <a:prstGeom prst="rect">
+            <a:avLst/>
+          </a:prstGeom>
+          <a:noFill/>
+          <a:ln/>
+        </p:spPr>
+        <p:txBody>
+          <a:bodyPr wrap="square" lIns="0" tIns="0" rIns="0" bIns="0" rtlCol="0" anchor="ctr"/>
+          <a:lstStyle/>
+          <a:p>
+            <a:pPr indent="0" marL="0">
+              <a:buNone/>
+            </a:pPr>
+            <a:r>
+              <a:rPr lang="en-US" sz="1150" dirty="0">
+                <a:solidFill>
+                  <a:srgbClr val="58635A"/>
+                </a:solidFill>
+                <a:latin typeface="Calibri" pitchFamily="34" charset="0"/>
+                <a:ea typeface="Calibri" pitchFamily="34" charset="-122"/>
+                <a:cs typeface="Calibri" pitchFamily="34" charset="-120"/>
+              </a:rPr>
+              <a:t>"Katmanlar" işareti — üç veri katmanı üst üste. 3 seçenek arasından seçildi; favicon üretildi.</a:t>
+            </a:r>
+            <a:endParaRPr lang="en-US" sz="1150" dirty="0"/>
+          </a:p>
+        </p:txBody>
+      </p:sp>
+    </p:spTree>
+  </p:cSld>
+  <p:clrMapOvr>
+    <a:masterClrMapping/>
+  </p:clrMapOvr>
+</p:sld>
+</file>
+
+<file path=ppt/slides/slide6.xml><?xml version="1.0" encoding="utf-8"?>
+<p:sld xmlns:a="http://schemas.openxmlformats.org/drawingml/2006/main" xmlns:r="http://schemas.openxmlformats.org/officeDocument/2006/relationships" xmlns:p="http://schemas.openxmlformats.org/presentationml/2006/main">
+  <p:cSld name="Slide 6">
     <p:bg>
       <p:bgPr>
         <a:solidFill>
@@ -3741,6 +6456,1126 @@
       </p:grpSpPr>
       <p:sp>
         <p:nvSpPr>
+          <p:cNvPr id="2" name="Text 0"/>
+          <p:cNvSpPr/>
+          <p:nvPr/>
+        </p:nvSpPr>
+        <p:spPr>
+          <a:xfrm>
+            <a:off x="548640" y="384048"/>
+            <a:ext cx="4572000" cy="274320"/>
+          </a:xfrm>
+          <a:prstGeom prst="rect">
+            <a:avLst/>
+          </a:prstGeom>
+          <a:noFill/>
+          <a:ln/>
+        </p:spPr>
+        <p:txBody>
+          <a:bodyPr wrap="square" lIns="0" tIns="0" rIns="0" bIns="0" rtlCol="0" anchor="ctr"/>
+          <a:lstStyle/>
+          <a:p>
+            <a:pPr indent="0" marL="0">
+              <a:buNone/>
+            </a:pPr>
+            <a:r>
+              <a:rPr lang="en-US" sz="1200" b="1" spc="300" kern="0" dirty="0">
+                <a:solidFill>
+                  <a:srgbClr val="35C4B5"/>
+                </a:solidFill>
+                <a:latin typeface="Calibri" pitchFamily="34" charset="0"/>
+                <a:ea typeface="Calibri" pitchFamily="34" charset="-122"/>
+                <a:cs typeface="Calibri" pitchFamily="34" charset="-120"/>
+              </a:rPr>
+              <a:t>GÖREV 5 / 5</a:t>
+            </a:r>
+            <a:endParaRPr lang="en-US" sz="1200" dirty="0"/>
+          </a:p>
+        </p:txBody>
+      </p:sp>
+      <p:sp>
+        <p:nvSpPr>
+          <p:cNvPr id="3" name="Text 1"/>
+          <p:cNvSpPr/>
+          <p:nvPr/>
+        </p:nvSpPr>
+        <p:spPr>
+          <a:xfrm>
+            <a:off x="548640" y="658368"/>
+            <a:ext cx="11064240" cy="640080"/>
+          </a:xfrm>
+          <a:prstGeom prst="rect">
+            <a:avLst/>
+          </a:prstGeom>
+          <a:noFill/>
+          <a:ln/>
+        </p:spPr>
+        <p:txBody>
+          <a:bodyPr wrap="square" lIns="0" tIns="0" rIns="0" bIns="0" rtlCol="0" anchor="ctr"/>
+          <a:lstStyle/>
+          <a:p>
+            <a:pPr indent="0" marL="0">
+              <a:buNone/>
+            </a:pPr>
+            <a:r>
+              <a:rPr lang="en-US" sz="3000" b="1" dirty="0">
+                <a:solidFill>
+                  <a:srgbClr val="EAF3EE"/>
+                </a:solidFill>
+                <a:latin typeface="Cambria" pitchFamily="34" charset="0"/>
+                <a:ea typeface="Cambria" pitchFamily="34" charset="-122"/>
+                <a:cs typeface="Cambria" pitchFamily="34" charset="-120"/>
+              </a:rPr>
+              <a:t>Hero Taslağı &amp; Kalibrasyon — Çıktının Kendisi</a:t>
+            </a:r>
+            <a:endParaRPr lang="en-US" sz="3000" dirty="0"/>
+          </a:p>
+        </p:txBody>
+      </p:sp>
+      <p:pic>
+        <p:nvPicPr>
+          <p:cNvPr id="4" name="Image 0" descr="C:/Users/nuhse/AppData/Local/Temp/claude/C--Users-nuhse-OneDrive-Masa-st--bingol/40443026-e10f-46f3-8fbe-591507743d75/scratchpad/hero-ss.png">    </p:cNvPr>
+          <p:cNvPicPr>
+            <a:picLocks noChangeAspect="1"/>
+          </p:cNvPicPr>
+          <p:nvPr/>
+        </p:nvPicPr>
+        <p:blipFill>
+          <a:blip r:embed="rId1"/>
+          <a:stretch>
+            <a:fillRect/>
+          </a:stretch>
+        </p:blipFill>
+        <p:spPr>
+          <a:xfrm>
+            <a:off x="548640" y="1508760"/>
+            <a:ext cx="6583680" cy="4700016"/>
+          </a:xfrm>
+          <a:prstGeom prst="rect">
+            <a:avLst/>
+          </a:prstGeom>
+          <a:effectLst>
+            <a:outerShdw sx="100000" sy="100000" kx="0" ky="0" algn="bl" rotWithShape="0" blurRad="152400" dist="50800" dir="5400000">
+              <a:srgbClr val="000000">
+                <a:alpha val="50000"/>
+              </a:srgbClr>
+            </a:outerShdw>
+          </a:effectLst>
+        </p:spPr>
+      </p:pic>
+      <p:sp>
+        <p:nvSpPr>
+          <p:cNvPr id="5" name="Text 2"/>
+          <p:cNvSpPr/>
+          <p:nvPr/>
+        </p:nvSpPr>
+        <p:spPr>
+          <a:xfrm>
+            <a:off x="548640" y="6263640"/>
+            <a:ext cx="6583680" cy="274320"/>
+          </a:xfrm>
+          <a:prstGeom prst="rect">
+            <a:avLst/>
+          </a:prstGeom>
+          <a:noFill/>
+          <a:ln/>
+        </p:spPr>
+        <p:txBody>
+          <a:bodyPr wrap="square" lIns="0" tIns="0" rIns="0" bIns="0" rtlCol="0" anchor="ctr"/>
+          <a:lstStyle/>
+          <a:p>
+            <a:pPr indent="0" marL="0">
+              <a:buNone/>
+            </a:pPr>
+            <a:r>
+              <a:rPr lang="en-US" sz="1100" i="1" dirty="0">
+                <a:solidFill>
+                  <a:srgbClr val="9CB2A8"/>
+                </a:solidFill>
+                <a:latin typeface="Calibri" pitchFamily="34" charset="0"/>
+                <a:ea typeface="Calibri" pitchFamily="34" charset="-122"/>
+                <a:cs typeface="Calibri" pitchFamily="34" charset="-120"/>
+              </a:rPr>
+              <a:t>Ana sayfa hero taslağı — onaylı tasarım dili uygulanmış hâli</a:t>
+            </a:r>
+            <a:endParaRPr lang="en-US" sz="1100" dirty="0"/>
+          </a:p>
+        </p:txBody>
+      </p:sp>
+      <p:pic>
+        <p:nvPicPr>
+          <p:cNvPr id="6" name="Image 1" descr="C:/Users/nuhse/AppData/Local/Temp/claude/C--Users-nuhse-OneDrive-Masa-st--bingol/40443026-e10f-46f3-8fbe-591507743d75/scratchpad/kalib-ss.png">    </p:cNvPr>
+          <p:cNvPicPr>
+            <a:picLocks noChangeAspect="1"/>
+          </p:cNvPicPr>
+          <p:nvPr/>
+        </p:nvPicPr>
+        <p:blipFill>
+          <a:blip r:embed="rId2"/>
+          <a:stretch>
+            <a:fillRect/>
+          </a:stretch>
+        </p:blipFill>
+        <p:spPr>
+          <a:xfrm>
+            <a:off x="7498080" y="1508760"/>
+            <a:ext cx="4160520" cy="2679192"/>
+          </a:xfrm>
+          <a:prstGeom prst="rect">
+            <a:avLst/>
+          </a:prstGeom>
+          <a:effectLst>
+            <a:outerShdw sx="100000" sy="100000" kx="0" ky="0" algn="bl" rotWithShape="0" blurRad="152400" dist="50800" dir="5400000">
+              <a:srgbClr val="000000">
+                <a:alpha val="50000"/>
+              </a:srgbClr>
+            </a:outerShdw>
+          </a:effectLst>
+        </p:spPr>
+      </p:pic>
+      <p:sp>
+        <p:nvSpPr>
+          <p:cNvPr id="7" name="Text 3"/>
+          <p:cNvSpPr/>
+          <p:nvPr/>
+        </p:nvSpPr>
+        <p:spPr>
+          <a:xfrm>
+            <a:off x="7498080" y="4224528"/>
+            <a:ext cx="4160520" cy="457200"/>
+          </a:xfrm>
+          <a:prstGeom prst="rect">
+            <a:avLst/>
+          </a:prstGeom>
+          <a:noFill/>
+          <a:ln/>
+        </p:spPr>
+        <p:txBody>
+          <a:bodyPr wrap="square" lIns="0" tIns="0" rIns="0" bIns="0" rtlCol="0" anchor="ctr"/>
+          <a:lstStyle/>
+          <a:p>
+            <a:pPr indent="0" marL="0">
+              <a:buNone/>
+            </a:pPr>
+            <a:r>
+              <a:rPr lang="en-US" sz="1100" i="1" dirty="0">
+                <a:solidFill>
+                  <a:srgbClr val="9CB2A8"/>
+                </a:solidFill>
+                <a:latin typeface="Calibri" pitchFamily="34" charset="0"/>
+                <a:ea typeface="Calibri" pitchFamily="34" charset="-122"/>
+                <a:cs typeface="Calibri" pitchFamily="34" charset="-120"/>
+              </a:rPr>
+              <a:t>Kalibrasyon görevi — tek bölümlük duyarlı sayfa (3→2→1 sütun)</a:t>
+            </a:r>
+            <a:endParaRPr lang="en-US" sz="1100" dirty="0"/>
+          </a:p>
+        </p:txBody>
+      </p:sp>
+      <p:sp>
+        <p:nvSpPr>
+          <p:cNvPr id="8" name="Shape 4"/>
+          <p:cNvSpPr/>
+          <p:nvPr/>
+        </p:nvSpPr>
+        <p:spPr>
+          <a:xfrm>
+            <a:off x="7498080" y="4892040"/>
+            <a:ext cx="4160520" cy="1325880"/>
+          </a:xfrm>
+          <a:prstGeom prst="roundRect">
+            <a:avLst>
+              <a:gd name="adj" fmla="val 6897"/>
+            </a:avLst>
+          </a:prstGeom>
+          <a:solidFill>
+            <a:srgbClr val="1A2F28"/>
+          </a:solidFill>
+          <a:ln/>
+        </p:spPr>
+      </p:sp>
+      <p:sp>
+        <p:nvSpPr>
+          <p:cNvPr id="9" name="Text 5"/>
+          <p:cNvSpPr/>
+          <p:nvPr/>
+        </p:nvSpPr>
+        <p:spPr>
+          <a:xfrm>
+            <a:off x="7772400" y="5074920"/>
+            <a:ext cx="3657600" cy="1005840"/>
+          </a:xfrm>
+          <a:prstGeom prst="rect">
+            <a:avLst/>
+          </a:prstGeom>
+          <a:noFill/>
+          <a:ln/>
+        </p:spPr>
+        <p:txBody>
+          <a:bodyPr wrap="square" lIns="0" tIns="0" rIns="0" bIns="0" rtlCol="0" anchor="t"/>
+          <a:lstStyle/>
+          <a:p>
+            <a:pPr indent="0" marL="0">
+              <a:spcAft>
+                <a:spcPts val="600"/>
+              </a:spcAft>
+              <a:buNone/>
+            </a:pPr>
+            <a:r>
+              <a:rPr lang="en-US" sz="1100" b="1" spc="200" kern="0" dirty="0">
+                <a:solidFill>
+                  <a:srgbClr val="35C4B5"/>
+                </a:solidFill>
+                <a:latin typeface="Calibri" pitchFamily="34" charset="0"/>
+                <a:ea typeface="Calibri" pitchFamily="34" charset="-122"/>
+                <a:cs typeface="Calibri" pitchFamily="34" charset="-120"/>
+              </a:rPr>
+              <a:t>CANLI DEMO</a:t>
+            </a:r>
+            <a:endParaRPr lang="en-US" sz="1100" dirty="0"/>
+          </a:p>
+          <a:p>
+            <a:pPr indent="0" marL="0">
+              <a:buNone/>
+            </a:pPr>
+            <a:r>
+              <a:rPr lang="en-US" sz="1200" dirty="0">
+                <a:solidFill>
+                  <a:srgbClr val="EAF3EE"/>
+                </a:solidFill>
+                <a:latin typeface="Calibri" pitchFamily="34" charset="0"/>
+                <a:ea typeface="Calibri" pitchFamily="34" charset="-122"/>
+                <a:cs typeface="Calibri" pitchFamily="34" charset="-120"/>
+              </a:rPr>
+              <a:t>Her iki sayfa tarayıcıda gezilecek; pencere daraltılarak mobil hâli gösterilecek.</a:t>
+            </a:r>
+            <a:endParaRPr lang="en-US" sz="1100" dirty="0"/>
+          </a:p>
+        </p:txBody>
+      </p:sp>
+    </p:spTree>
+  </p:cSld>
+  <p:clrMapOvr>
+    <a:masterClrMapping/>
+  </p:clrMapOvr>
+</p:sld>
+</file>
+
+<file path=ppt/slides/slide7.xml><?xml version="1.0" encoding="utf-8"?>
+<p:sld xmlns:a="http://schemas.openxmlformats.org/drawingml/2006/main" xmlns:r="http://schemas.openxmlformats.org/officeDocument/2006/relationships" xmlns:p="http://schemas.openxmlformats.org/presentationml/2006/main">
+  <p:cSld name="Slide 7">
+    <p:bg>
+      <p:bgPr>
+        <a:solidFill>
+          <a:srgbClr val="FAF6EC"/>
+        </a:solidFill>
+      </p:bgPr>
+    </p:bg>
+    <p:spTree>
+      <p:nvGrpSpPr>
+        <p:cNvPr id="1" name=""/>
+        <p:cNvGrpSpPr/>
+        <p:nvPr/>
+      </p:nvGrpSpPr>
+      <p:grpSpPr>
+        <a:xfrm>
+          <a:off x="0" y="0"/>
+          <a:ext cx="0" cy="0"/>
+          <a:chOff x="0" y="0"/>
+          <a:chExt cx="0" cy="0"/>
+        </a:xfrm>
+      </p:grpSpPr>
+      <p:sp>
+        <p:nvSpPr>
+          <p:cNvPr id="2" name="Text 0"/>
+          <p:cNvSpPr/>
+          <p:nvPr/>
+        </p:nvSpPr>
+        <p:spPr>
+          <a:xfrm>
+            <a:off x="548640" y="457200"/>
+            <a:ext cx="11064240" cy="685800"/>
+          </a:xfrm>
+          <a:prstGeom prst="rect">
+            <a:avLst/>
+          </a:prstGeom>
+          <a:noFill/>
+          <a:ln/>
+        </p:spPr>
+        <p:txBody>
+          <a:bodyPr wrap="square" lIns="0" tIns="0" rIns="0" bIns="0" rtlCol="0" anchor="ctr"/>
+          <a:lstStyle/>
+          <a:p>
+            <a:pPr indent="0" marL="0">
+              <a:buNone/>
+            </a:pPr>
+            <a:r>
+              <a:rPr lang="en-US" sz="3400" b="1" dirty="0">
+                <a:solidFill>
+                  <a:srgbClr val="1E2A24"/>
+                </a:solidFill>
+                <a:latin typeface="Cambria" pitchFamily="34" charset="0"/>
+                <a:ea typeface="Cambria" pitchFamily="34" charset="-122"/>
+                <a:cs typeface="Cambria" pitchFamily="34" charset="-120"/>
+              </a:rPr>
+              <a:t>Ne Öğrendim · Neyi Farklı Yapardım</a:t>
+            </a:r>
+            <a:endParaRPr lang="en-US" sz="3400" dirty="0"/>
+          </a:p>
+        </p:txBody>
+      </p:sp>
+      <p:sp>
+        <p:nvSpPr>
+          <p:cNvPr id="3" name="Shape 1"/>
+          <p:cNvSpPr/>
+          <p:nvPr/>
+        </p:nvSpPr>
+        <p:spPr>
+          <a:xfrm>
+            <a:off x="548640" y="1417320"/>
+            <a:ext cx="5669280" cy="4846320"/>
+          </a:xfrm>
+          <a:prstGeom prst="roundRect">
+            <a:avLst>
+              <a:gd name="adj" fmla="val 2264"/>
+            </a:avLst>
+          </a:prstGeom>
+          <a:solidFill>
+            <a:srgbClr val="FFFFFF"/>
+          </a:solidFill>
+          <a:ln/>
+          <a:effectLst>
+            <a:outerShdw sx="100000" sy="100000" kx="0" ky="0" algn="bl" rotWithShape="0" blurRad="101600" dist="38100" dir="5400000">
+              <a:srgbClr val="1E2A24">
+                <a:alpha val="12000"/>
+              </a:srgbClr>
+            </a:outerShdw>
+          </a:effectLst>
+        </p:spPr>
+      </p:sp>
+      <p:sp>
+        <p:nvSpPr>
+          <p:cNvPr id="4" name="Text 2"/>
+          <p:cNvSpPr/>
+          <p:nvPr/>
+        </p:nvSpPr>
+        <p:spPr>
+          <a:xfrm>
+            <a:off x="914400" y="1737360"/>
+            <a:ext cx="4937760" cy="320040"/>
+          </a:xfrm>
+          <a:prstGeom prst="rect">
+            <a:avLst/>
+          </a:prstGeom>
+          <a:noFill/>
+          <a:ln/>
+        </p:spPr>
+        <p:txBody>
+          <a:bodyPr wrap="square" lIns="0" tIns="0" rIns="0" bIns="0" rtlCol="0" anchor="ctr"/>
+          <a:lstStyle/>
+          <a:p>
+            <a:pPr indent="0" marL="0">
+              <a:buNone/>
+            </a:pPr>
+            <a:r>
+              <a:rPr lang="en-US" sz="1200" b="1" spc="300" kern="0" dirty="0">
+                <a:solidFill>
+                  <a:srgbClr val="17604C"/>
+                </a:solidFill>
+                <a:latin typeface="Calibri" pitchFamily="34" charset="0"/>
+                <a:ea typeface="Calibri" pitchFamily="34" charset="-122"/>
+                <a:cs typeface="Calibri" pitchFamily="34" charset="-120"/>
+              </a:rPr>
+              <a:t>NE ÖĞRENDİM</a:t>
+            </a:r>
+            <a:endParaRPr lang="en-US" sz="1200" dirty="0"/>
+          </a:p>
+        </p:txBody>
+      </p:sp>
+      <p:sp>
+        <p:nvSpPr>
+          <p:cNvPr id="5" name="Shape 3"/>
+          <p:cNvSpPr/>
+          <p:nvPr/>
+        </p:nvSpPr>
+        <p:spPr>
+          <a:xfrm>
+            <a:off x="914400" y="2286000"/>
+            <a:ext cx="201168" cy="201168"/>
+          </a:xfrm>
+          <a:prstGeom prst="diamond">
+            <a:avLst/>
+          </a:prstGeom>
+          <a:solidFill>
+            <a:srgbClr val="35C4B5"/>
+          </a:solidFill>
+          <a:ln/>
+        </p:spPr>
+      </p:sp>
+      <p:sp>
+        <p:nvSpPr>
+          <p:cNvPr id="6" name="Text 4"/>
+          <p:cNvSpPr/>
+          <p:nvPr/>
+        </p:nvSpPr>
+        <p:spPr>
+          <a:xfrm>
+            <a:off x="1280160" y="2103120"/>
+            <a:ext cx="4663440" cy="960120"/>
+          </a:xfrm>
+          <a:prstGeom prst="rect">
+            <a:avLst/>
+          </a:prstGeom>
+          <a:noFill/>
+          <a:ln/>
+        </p:spPr>
+        <p:txBody>
+          <a:bodyPr wrap="square" lIns="0" tIns="0" rIns="0" bIns="0" rtlCol="0" anchor="ctr"/>
+          <a:lstStyle/>
+          <a:p>
+            <a:pPr indent="0" marL="0">
+              <a:buNone/>
+            </a:pPr>
+            <a:r>
+              <a:rPr lang="en-US" sz="1400" b="1" dirty="0">
+                <a:solidFill>
+                  <a:srgbClr val="1E2A24"/>
+                </a:solidFill>
+                <a:latin typeface="Calibri" pitchFamily="34" charset="0"/>
+                <a:ea typeface="Calibri" pitchFamily="34" charset="-122"/>
+                <a:cs typeface="Calibri" pitchFamily="34" charset="-120"/>
+              </a:rPr>
+              <a:t>TUCBS</a:t>
+            </a:r>
+            <a:endParaRPr lang="en-US" sz="1400" dirty="0"/>
+          </a:p>
+          <a:p>
+            <a:pPr indent="0" marL="0">
+              <a:buNone/>
+            </a:pPr>
+            <a:r>
+              <a:rPr lang="en-US" sz="1150" dirty="0">
+                <a:solidFill>
+                  <a:srgbClr val="58635A"/>
+                </a:solidFill>
+                <a:latin typeface="Calibri" pitchFamily="34" charset="0"/>
+                <a:ea typeface="Calibri" pitchFamily="34" charset="-122"/>
+                <a:cs typeface="Calibri" pitchFamily="34" charset="-120"/>
+              </a:rPr>
+              <a:t>Ulusal coğrafi veri standardı; 32 veri teması — "uyumluluk" mesajımızın dayanağı</a:t>
+            </a:r>
+            <a:endParaRPr lang="en-US" sz="1400" dirty="0"/>
+          </a:p>
+        </p:txBody>
+      </p:sp>
+      <p:sp>
+        <p:nvSpPr>
+          <p:cNvPr id="7" name="Shape 5"/>
+          <p:cNvSpPr/>
+          <p:nvPr/>
+        </p:nvSpPr>
+        <p:spPr>
+          <a:xfrm>
+            <a:off x="914400" y="3273552"/>
+            <a:ext cx="201168" cy="201168"/>
+          </a:xfrm>
+          <a:prstGeom prst="diamond">
+            <a:avLst/>
+          </a:prstGeom>
+          <a:solidFill>
+            <a:srgbClr val="35C4B5"/>
+          </a:solidFill>
+          <a:ln/>
+        </p:spPr>
+      </p:sp>
+      <p:sp>
+        <p:nvSpPr>
+          <p:cNvPr id="8" name="Text 6"/>
+          <p:cNvSpPr/>
+          <p:nvPr/>
+        </p:nvSpPr>
+        <p:spPr>
+          <a:xfrm>
+            <a:off x="1280160" y="3090672"/>
+            <a:ext cx="4663440" cy="960120"/>
+          </a:xfrm>
+          <a:prstGeom prst="rect">
+            <a:avLst/>
+          </a:prstGeom>
+          <a:noFill/>
+          <a:ln/>
+        </p:spPr>
+        <p:txBody>
+          <a:bodyPr wrap="square" lIns="0" tIns="0" rIns="0" bIns="0" rtlCol="0" anchor="ctr"/>
+          <a:lstStyle/>
+          <a:p>
+            <a:pPr indent="0" marL="0">
+              <a:buNone/>
+            </a:pPr>
+            <a:r>
+              <a:rPr lang="en-US" sz="1400" b="1" dirty="0">
+                <a:solidFill>
+                  <a:srgbClr val="1E2A24"/>
+                </a:solidFill>
+                <a:latin typeface="Calibri" pitchFamily="34" charset="0"/>
+                <a:ea typeface="Calibri" pitchFamily="34" charset="-122"/>
+                <a:cs typeface="Calibri" pitchFamily="34" charset="-120"/>
+              </a:rPr>
+              <a:t>Vektör karo (MVT)</a:t>
+            </a:r>
+            <a:endParaRPr lang="en-US" sz="1400" dirty="0"/>
+          </a:p>
+          <a:p>
+            <a:pPr indent="0" marL="0">
+              <a:buNone/>
+            </a:pPr>
+            <a:r>
+              <a:rPr lang="en-US" sz="1150" dirty="0">
+                <a:solidFill>
+                  <a:srgbClr val="58635A"/>
+                </a:solidFill>
+                <a:latin typeface="Calibri" pitchFamily="34" charset="0"/>
+                <a:ea typeface="Calibri" pitchFamily="34" charset="-122"/>
+                <a:cs typeface="Calibri" pitchFamily="34" charset="-120"/>
+              </a:rPr>
+              <a:t>Raster karodan 5–10× küçük; çizim tarayıcıda — "hızlı harita" iddiası ölçülebilir</a:t>
+            </a:r>
+            <a:endParaRPr lang="en-US" sz="1400" dirty="0"/>
+          </a:p>
+        </p:txBody>
+      </p:sp>
+      <p:sp>
+        <p:nvSpPr>
+          <p:cNvPr id="9" name="Shape 7"/>
+          <p:cNvSpPr/>
+          <p:nvPr/>
+        </p:nvSpPr>
+        <p:spPr>
+          <a:xfrm>
+            <a:off x="914400" y="4261104"/>
+            <a:ext cx="201168" cy="201168"/>
+          </a:xfrm>
+          <a:prstGeom prst="diamond">
+            <a:avLst/>
+          </a:prstGeom>
+          <a:solidFill>
+            <a:srgbClr val="35C4B5"/>
+          </a:solidFill>
+          <a:ln/>
+        </p:spPr>
+      </p:sp>
+      <p:sp>
+        <p:nvSpPr>
+          <p:cNvPr id="10" name="Text 8"/>
+          <p:cNvSpPr/>
+          <p:nvPr/>
+        </p:nvSpPr>
+        <p:spPr>
+          <a:xfrm>
+            <a:off x="1280160" y="4078224"/>
+            <a:ext cx="4663440" cy="960120"/>
+          </a:xfrm>
+          <a:prstGeom prst="rect">
+            <a:avLst/>
+          </a:prstGeom>
+          <a:noFill/>
+          <a:ln/>
+        </p:spPr>
+        <p:txBody>
+          <a:bodyPr wrap="square" lIns="0" tIns="0" rIns="0" bIns="0" rtlCol="0" anchor="ctr"/>
+          <a:lstStyle/>
+          <a:p>
+            <a:pPr indent="0" marL="0">
+              <a:buNone/>
+            </a:pPr>
+            <a:r>
+              <a:rPr lang="en-US" sz="1400" b="1" dirty="0">
+                <a:solidFill>
+                  <a:srgbClr val="1E2A24"/>
+                </a:solidFill>
+                <a:latin typeface="Calibri" pitchFamily="34" charset="0"/>
+                <a:ea typeface="Calibri" pitchFamily="34" charset="-122"/>
+                <a:cs typeface="Calibri" pitchFamily="34" charset="-120"/>
+              </a:rPr>
+              <a:t>Metaveri &amp; lineage</a:t>
+            </a:r>
+            <a:endParaRPr lang="en-US" sz="1400" dirty="0"/>
+          </a:p>
+          <a:p>
+            <a:pPr indent="0" marL="0">
+              <a:buNone/>
+            </a:pPr>
+            <a:r>
+              <a:rPr lang="en-US" sz="1150" dirty="0">
+                <a:solidFill>
+                  <a:srgbClr val="58635A"/>
+                </a:solidFill>
+                <a:latin typeface="Calibri" pitchFamily="34" charset="0"/>
+                <a:ea typeface="Calibri" pitchFamily="34" charset="-122"/>
+                <a:cs typeface="Calibri" pitchFamily="34" charset="-120"/>
+              </a:rPr>
+              <a:t>"Veri nereden geldi" sorusunun teknik karşılığı — veri kalitesi mesajının temeli</a:t>
+            </a:r>
+            <a:endParaRPr lang="en-US" sz="1400" dirty="0"/>
+          </a:p>
+        </p:txBody>
+      </p:sp>
+      <p:sp>
+        <p:nvSpPr>
+          <p:cNvPr id="11" name="Shape 9"/>
+          <p:cNvSpPr/>
+          <p:nvPr/>
+        </p:nvSpPr>
+        <p:spPr>
+          <a:xfrm>
+            <a:off x="914400" y="5248656"/>
+            <a:ext cx="201168" cy="201168"/>
+          </a:xfrm>
+          <a:prstGeom prst="diamond">
+            <a:avLst/>
+          </a:prstGeom>
+          <a:solidFill>
+            <a:srgbClr val="35C4B5"/>
+          </a:solidFill>
+          <a:ln/>
+        </p:spPr>
+      </p:sp>
+      <p:sp>
+        <p:nvSpPr>
+          <p:cNvPr id="12" name="Text 10"/>
+          <p:cNvSpPr/>
+          <p:nvPr/>
+        </p:nvSpPr>
+        <p:spPr>
+          <a:xfrm>
+            <a:off x="1280160" y="5065776"/>
+            <a:ext cx="4663440" cy="960120"/>
+          </a:xfrm>
+          <a:prstGeom prst="rect">
+            <a:avLst/>
+          </a:prstGeom>
+          <a:noFill/>
+          <a:ln/>
+        </p:spPr>
+        <p:txBody>
+          <a:bodyPr wrap="square" lIns="0" tIns="0" rIns="0" bIns="0" rtlCol="0" anchor="ctr"/>
+          <a:lstStyle/>
+          <a:p>
+            <a:pPr indent="0" marL="0">
+              <a:buNone/>
+            </a:pPr>
+            <a:r>
+              <a:rPr lang="en-US" sz="1400" b="1" dirty="0">
+                <a:solidFill>
+                  <a:srgbClr val="1E2A24"/>
+                </a:solidFill>
+                <a:latin typeface="Calibri" pitchFamily="34" charset="0"/>
+                <a:ea typeface="Calibri" pitchFamily="34" charset="-122"/>
+                <a:cs typeface="Calibri" pitchFamily="34" charset="-120"/>
+              </a:rPr>
+              <a:t>Benchmark dersi</a:t>
+            </a:r>
+            <a:endParaRPr lang="en-US" sz="1400" dirty="0"/>
+          </a:p>
+          <a:p>
+            <a:pPr indent="0" marL="0">
+              <a:buNone/>
+            </a:pPr>
+            <a:r>
+              <a:rPr lang="en-US" sz="1150" dirty="0">
+                <a:solidFill>
+                  <a:srgbClr val="58635A"/>
+                </a:solidFill>
+                <a:latin typeface="Calibri" pitchFamily="34" charset="0"/>
+                <a:ea typeface="Calibri" pitchFamily="34" charset="-122"/>
+                <a:cs typeface="Calibri" pitchFamily="34" charset="-120"/>
+              </a:rPr>
+              <a:t>İçeriği JS'e gömülü KBS siteleri arama motoruna görünmüyor — statik HTML kararı doğru</a:t>
+            </a:r>
+            <a:endParaRPr lang="en-US" sz="1400" dirty="0"/>
+          </a:p>
+        </p:txBody>
+      </p:sp>
+      <p:sp>
+        <p:nvSpPr>
+          <p:cNvPr id="13" name="Shape 11"/>
+          <p:cNvSpPr/>
+          <p:nvPr/>
+        </p:nvSpPr>
+        <p:spPr>
+          <a:xfrm>
+            <a:off x="6492240" y="1417320"/>
+            <a:ext cx="5120640" cy="4846320"/>
+          </a:xfrm>
+          <a:prstGeom prst="roundRect">
+            <a:avLst>
+              <a:gd name="adj" fmla="val 2264"/>
+            </a:avLst>
+          </a:prstGeom>
+          <a:solidFill>
+            <a:srgbClr val="10201B"/>
+          </a:solidFill>
+          <a:ln/>
+        </p:spPr>
+      </p:sp>
+      <p:sp>
+        <p:nvSpPr>
+          <p:cNvPr id="14" name="Text 12"/>
+          <p:cNvSpPr/>
+          <p:nvPr/>
+        </p:nvSpPr>
+        <p:spPr>
+          <a:xfrm>
+            <a:off x="6858000" y="1737360"/>
+            <a:ext cx="4389120" cy="320040"/>
+          </a:xfrm>
+          <a:prstGeom prst="rect">
+            <a:avLst/>
+          </a:prstGeom>
+          <a:noFill/>
+          <a:ln/>
+        </p:spPr>
+        <p:txBody>
+          <a:bodyPr wrap="square" lIns="0" tIns="0" rIns="0" bIns="0" rtlCol="0" anchor="ctr"/>
+          <a:lstStyle/>
+          <a:p>
+            <a:pPr indent="0" marL="0">
+              <a:buNone/>
+            </a:pPr>
+            <a:r>
+              <a:rPr lang="en-US" sz="1200" b="1" spc="300" kern="0" dirty="0">
+                <a:solidFill>
+                  <a:srgbClr val="F0A93F"/>
+                </a:solidFill>
+                <a:latin typeface="Calibri" pitchFamily="34" charset="0"/>
+                <a:ea typeface="Calibri" pitchFamily="34" charset="-122"/>
+                <a:cs typeface="Calibri" pitchFamily="34" charset="-120"/>
+              </a:rPr>
+              <a:t>NEYİ FARKLI YAPARDIM</a:t>
+            </a:r>
+            <a:endParaRPr lang="en-US" sz="1200" dirty="0"/>
+          </a:p>
+        </p:txBody>
+      </p:sp>
+      <p:sp>
+        <p:nvSpPr>
+          <p:cNvPr id="15" name="Text 13"/>
+          <p:cNvSpPr/>
+          <p:nvPr/>
+        </p:nvSpPr>
+        <p:spPr>
+          <a:xfrm>
+            <a:off x="6858000" y="2194560"/>
+            <a:ext cx="457200" cy="548640"/>
+          </a:xfrm>
+          <a:prstGeom prst="rect">
+            <a:avLst/>
+          </a:prstGeom>
+          <a:noFill/>
+          <a:ln/>
+        </p:spPr>
+        <p:txBody>
+          <a:bodyPr wrap="square" lIns="0" tIns="0" rIns="0" bIns="0" rtlCol="0" anchor="ctr"/>
+          <a:lstStyle/>
+          <a:p>
+            <a:pPr indent="0" marL="0">
+              <a:buNone/>
+            </a:pPr>
+            <a:r>
+              <a:rPr lang="en-US" sz="2600" b="1" dirty="0">
+                <a:solidFill>
+                  <a:srgbClr val="F0A93F"/>
+                </a:solidFill>
+                <a:latin typeface="Cambria" pitchFamily="34" charset="0"/>
+                <a:ea typeface="Cambria" pitchFamily="34" charset="-122"/>
+                <a:cs typeface="Cambria" pitchFamily="34" charset="-120"/>
+              </a:rPr>
+              <a:t>1</a:t>
+            </a:r>
+            <a:endParaRPr lang="en-US" sz="2600" dirty="0"/>
+          </a:p>
+        </p:txBody>
+      </p:sp>
+      <p:sp>
+        <p:nvSpPr>
+          <p:cNvPr id="16" name="Text 14"/>
+          <p:cNvSpPr/>
+          <p:nvPr/>
+        </p:nvSpPr>
+        <p:spPr>
+          <a:xfrm>
+            <a:off x="7452360" y="2148840"/>
+            <a:ext cx="3931920" cy="1234440"/>
+          </a:xfrm>
+          <a:prstGeom prst="rect">
+            <a:avLst/>
+          </a:prstGeom>
+          <a:noFill/>
+          <a:ln/>
+        </p:spPr>
+        <p:txBody>
+          <a:bodyPr wrap="square" lIns="0" tIns="0" rIns="0" bIns="0" rtlCol="0" anchor="ctr"/>
+          <a:lstStyle/>
+          <a:p>
+            <a:pPr indent="0" marL="0">
+              <a:buNone/>
+            </a:pPr>
+            <a:r>
+              <a:rPr lang="en-US" sz="1400" b="1" dirty="0">
+                <a:solidFill>
+                  <a:srgbClr val="EAF3EE"/>
+                </a:solidFill>
+                <a:latin typeface="Calibri" pitchFamily="34" charset="0"/>
+                <a:ea typeface="Calibri" pitchFamily="34" charset="-122"/>
+                <a:cs typeface="Calibri" pitchFamily="34" charset="-120"/>
+              </a:rPr>
+              <a:t>Depoyu ilk iş kurmak</a:t>
+            </a:r>
+            <a:endParaRPr lang="en-US" sz="1400" dirty="0"/>
+          </a:p>
+          <a:p>
+            <a:pPr indent="0" marL="0">
+              <a:buNone/>
+            </a:pPr>
+            <a:r>
+              <a:rPr lang="en-US" sz="1150" dirty="0">
+                <a:solidFill>
+                  <a:srgbClr val="9CB2A8"/>
+                </a:solidFill>
+                <a:latin typeface="Calibri" pitchFamily="34" charset="0"/>
+                <a:ea typeface="Calibri" pitchFamily="34" charset="-122"/>
+                <a:cs typeface="Calibri" pitchFamily="34" charset="-120"/>
+              </a:rPr>
+              <a:t>GitHub bağlantısı sona kaldı; birleştirme çakışmasıyla uğraştım. Önce iskelet, sonra üretim.</a:t>
+            </a:r>
+            <a:endParaRPr lang="en-US" sz="1400" dirty="0"/>
+          </a:p>
+        </p:txBody>
+      </p:sp>
+      <p:sp>
+        <p:nvSpPr>
+          <p:cNvPr id="17" name="Text 15"/>
+          <p:cNvSpPr/>
+          <p:nvPr/>
+        </p:nvSpPr>
+        <p:spPr>
+          <a:xfrm>
+            <a:off x="6858000" y="3474720"/>
+            <a:ext cx="457200" cy="548640"/>
+          </a:xfrm>
+          <a:prstGeom prst="rect">
+            <a:avLst/>
+          </a:prstGeom>
+          <a:noFill/>
+          <a:ln/>
+        </p:spPr>
+        <p:txBody>
+          <a:bodyPr wrap="square" lIns="0" tIns="0" rIns="0" bIns="0" rtlCol="0" anchor="ctr"/>
+          <a:lstStyle/>
+          <a:p>
+            <a:pPr indent="0" marL="0">
+              <a:buNone/>
+            </a:pPr>
+            <a:r>
+              <a:rPr lang="en-US" sz="2600" b="1" dirty="0">
+                <a:solidFill>
+                  <a:srgbClr val="F0A93F"/>
+                </a:solidFill>
+                <a:latin typeface="Cambria" pitchFamily="34" charset="0"/>
+                <a:ea typeface="Cambria" pitchFamily="34" charset="-122"/>
+                <a:cs typeface="Cambria" pitchFamily="34" charset="-120"/>
+              </a:rPr>
+              <a:t>2</a:t>
+            </a:r>
+            <a:endParaRPr lang="en-US" sz="2600" dirty="0"/>
+          </a:p>
+        </p:txBody>
+      </p:sp>
+      <p:sp>
+        <p:nvSpPr>
+          <p:cNvPr id="18" name="Text 16"/>
+          <p:cNvSpPr/>
+          <p:nvPr/>
+        </p:nvSpPr>
+        <p:spPr>
+          <a:xfrm>
+            <a:off x="7452360" y="3429000"/>
+            <a:ext cx="3931920" cy="1234440"/>
+          </a:xfrm>
+          <a:prstGeom prst="rect">
+            <a:avLst/>
+          </a:prstGeom>
+          <a:noFill/>
+          <a:ln/>
+        </p:spPr>
+        <p:txBody>
+          <a:bodyPr wrap="square" lIns="0" tIns="0" rIns="0" bIns="0" rtlCol="0" anchor="ctr"/>
+          <a:lstStyle/>
+          <a:p>
+            <a:pPr indent="0" marL="0">
+              <a:buNone/>
+            </a:pPr>
+            <a:r>
+              <a:rPr lang="en-US" sz="1400" b="1" dirty="0">
+                <a:solidFill>
+                  <a:srgbClr val="EAF3EE"/>
+                </a:solidFill>
+                <a:latin typeface="Calibri" pitchFamily="34" charset="0"/>
+                <a:ea typeface="Calibri" pitchFamily="34" charset="-122"/>
+                <a:cs typeface="Calibri" pitchFamily="34" charset="-120"/>
+              </a:rPr>
+              <a:t>Tek turda tek değişiklik</a:t>
+            </a:r>
+            <a:endParaRPr lang="en-US" sz="1400" dirty="0"/>
+          </a:p>
+          <a:p>
+            <a:pPr indent="0" marL="0">
+              <a:buNone/>
+            </a:pPr>
+            <a:r>
+              <a:rPr lang="en-US" sz="1150" dirty="0">
+                <a:solidFill>
+                  <a:srgbClr val="9CB2A8"/>
+                </a:solidFill>
+                <a:latin typeface="Calibri" pitchFamily="34" charset="0"/>
+                <a:ea typeface="Calibri" pitchFamily="34" charset="-122"/>
+                <a:cs typeface="Calibri" pitchFamily="34" charset="-120"/>
+              </a:rPr>
+              <a:t>Hero'da aynı anda çok şeyi değiştirmek karşılaştırmayı zorlaştırdı; küçük adım daha hızlı sonuç verdi.</a:t>
+            </a:r>
+            <a:endParaRPr lang="en-US" sz="1400" dirty="0"/>
+          </a:p>
+        </p:txBody>
+      </p:sp>
+      <p:sp>
+        <p:nvSpPr>
+          <p:cNvPr id="19" name="Text 17"/>
+          <p:cNvSpPr/>
+          <p:nvPr/>
+        </p:nvSpPr>
+        <p:spPr>
+          <a:xfrm>
+            <a:off x="6858000" y="4754880"/>
+            <a:ext cx="457200" cy="548640"/>
+          </a:xfrm>
+          <a:prstGeom prst="rect">
+            <a:avLst/>
+          </a:prstGeom>
+          <a:noFill/>
+          <a:ln/>
+        </p:spPr>
+        <p:txBody>
+          <a:bodyPr wrap="square" lIns="0" tIns="0" rIns="0" bIns="0" rtlCol="0" anchor="ctr"/>
+          <a:lstStyle/>
+          <a:p>
+            <a:pPr indent="0" marL="0">
+              <a:buNone/>
+            </a:pPr>
+            <a:r>
+              <a:rPr lang="en-US" sz="2600" b="1" dirty="0">
+                <a:solidFill>
+                  <a:srgbClr val="F0A93F"/>
+                </a:solidFill>
+                <a:latin typeface="Cambria" pitchFamily="34" charset="0"/>
+                <a:ea typeface="Cambria" pitchFamily="34" charset="-122"/>
+                <a:cs typeface="Cambria" pitchFamily="34" charset="-120"/>
+              </a:rPr>
+              <a:t>3</a:t>
+            </a:r>
+            <a:endParaRPr lang="en-US" sz="2600" dirty="0"/>
+          </a:p>
+        </p:txBody>
+      </p:sp>
+      <p:sp>
+        <p:nvSpPr>
+          <p:cNvPr id="20" name="Text 18"/>
+          <p:cNvSpPr/>
+          <p:nvPr/>
+        </p:nvSpPr>
+        <p:spPr>
+          <a:xfrm>
+            <a:off x="7452360" y="4709160"/>
+            <a:ext cx="3931920" cy="1234440"/>
+          </a:xfrm>
+          <a:prstGeom prst="rect">
+            <a:avLst/>
+          </a:prstGeom>
+          <a:noFill/>
+          <a:ln/>
+        </p:spPr>
+        <p:txBody>
+          <a:bodyPr wrap="square" lIns="0" tIns="0" rIns="0" bIns="0" rtlCol="0" anchor="ctr"/>
+          <a:lstStyle/>
+          <a:p>
+            <a:pPr indent="0" marL="0">
+              <a:buNone/>
+            </a:pPr>
+            <a:r>
+              <a:rPr lang="en-US" sz="1400" b="1" dirty="0">
+                <a:solidFill>
+                  <a:srgbClr val="EAF3EE"/>
+                </a:solidFill>
+                <a:latin typeface="Calibri" pitchFamily="34" charset="0"/>
+                <a:ea typeface="Calibri" pitchFamily="34" charset="-122"/>
+                <a:cs typeface="Calibri" pitchFamily="34" charset="-120"/>
+              </a:rPr>
+              <a:t>Görsel yönü erken göstermek</a:t>
+            </a:r>
+            <a:endParaRPr lang="en-US" sz="1400" dirty="0"/>
+          </a:p>
+          <a:p>
+            <a:pPr indent="0" marL="0">
+              <a:buNone/>
+            </a:pPr>
+            <a:r>
+              <a:rPr lang="en-US" sz="1150" dirty="0">
+                <a:solidFill>
+                  <a:srgbClr val="9CB2A8"/>
+                </a:solidFill>
+                <a:latin typeface="Calibri" pitchFamily="34" charset="0"/>
+                <a:ea typeface="Calibri" pitchFamily="34" charset="-122"/>
+                <a:cs typeface="Calibri" pitchFamily="34" charset="-120"/>
+              </a:rPr>
+              <a:t>Krem zemin + serif kararına geri bildirimle ulaştık — ilk taslağı daha erken paylaşmak zaman kazandırırdı.</a:t>
+            </a:r>
+            <a:endParaRPr lang="en-US" sz="1400" dirty="0"/>
+          </a:p>
+        </p:txBody>
+      </p:sp>
+    </p:spTree>
+  </p:cSld>
+  <p:clrMapOvr>
+    <a:masterClrMapping/>
+  </p:clrMapOvr>
+</p:sld>
+</file>
+
+<file path=ppt/slides/slide8.xml><?xml version="1.0" encoding="utf-8"?>
+<p:sld xmlns:a="http://schemas.openxmlformats.org/drawingml/2006/main" xmlns:r="http://schemas.openxmlformats.org/officeDocument/2006/relationships" xmlns:p="http://schemas.openxmlformats.org/presentationml/2006/main">
+  <p:cSld name="Slide 8">
+    <p:bg>
+      <p:bgPr>
+        <a:solidFill>
+          <a:srgbClr val="10201B"/>
+        </a:solidFill>
+      </p:bgPr>
+    </p:bg>
+    <p:spTree>
+      <p:nvGrpSpPr>
+        <p:cNvPr id="1" name=""/>
+        <p:cNvGrpSpPr/>
+        <p:nvPr/>
+      </p:nvGrpSpPr>
+      <p:grpSpPr>
+        <a:xfrm>
+          <a:off x="0" y="0"/>
+          <a:ext cx="0" cy="0"/>
+          <a:chOff x="0" y="0"/>
+          <a:chExt cx="0" cy="0"/>
+        </a:xfrm>
+      </p:grpSpPr>
+      <p:sp>
+        <p:nvSpPr>
           <p:cNvPr id="2" name="Shape 0"/>
           <p:cNvSpPr/>
           <p:nvPr/>
@@ -4554,7 +8389,7 @@
                 <a:ea typeface="Calibri" pitchFamily="34" charset="-122"/>
                 <a:cs typeface="Calibri" pitchFamily="34" charset="-120"/>
               </a:rPr>
-              <a:t>Bugünkü sunum tasarım onay kapısı — site haritası, wireframe ve görsel yön için onay/düzeltme bekliyorum.</a:t>
+              <a:t>Bugünkü sunum tasarım onay kapısı — site haritası, wireframe ve tasarım dili için onay/düzeltme bekliyorum.</a:t>
             </a:r>
             <a:endParaRPr lang="en-US" sz="1400" dirty="0"/>
           </a:p>
